--- a/presentations/digital_twin_adapters/Telecom_Digital_Twin_Adapters_and_Standards_v2.pptx
+++ b/presentations/digital_twin_adapters/Telecom_Digital_Twin_Adapters_and_Standards_v2.pptx
@@ -15,9 +15,11 @@
     <p:sldId id="263" r:id="rId9"/>
     <p:sldId id="264" r:id="rId10"/>
     <p:sldId id="265" r:id="rId11"/>
+    <p:sldId id="266" r:id="rId12"/>
+    <p:sldId id="267" r:id="rId13"/>
   </p:sldIdLst>
   <p:notesMasterIdLst>
-    <p:notesMasterId r:id="rId12"/>
+    <p:notesMasterId r:id="rId14"/>
   </p:notesMasterIdLst>
   <p:sldSz cx="9144000" cy="5143500"/>
   <p:notesSz cx="5143500" cy="9144000"/>
@@ -1219,9 +1221,9 @@
           <a:p>
             <a:r>
               <a:rPr lang="en-US" dirty="0"/>
-              <a:t>Zero-risk what-if validation: operators test severe perturbations (3.5x bulk surges, category-5 tropical rain fade, fibre cuts) in a microsecond-accurate twin without risking live production circuits.
-Standardised multi-vendor interoperability: built on open telecom specifications (TMF921, 3GPP TS 28.561, ITU-T Y.3090, ITU-T Y.3092, RFC 8040 RESTCONF) with the open-source ETSI TeraFlowSDN controller.
-Seconds-scale closed loop: SLA intent is ingested, simulated, verified and actuated in about 1.9-2.2 s. (The original deck called this 'sub-second'; the measured end-to-end figure is about 2 s.)</a:t>
+              <a:t>Stage 1, candidate datastore staging: the AI decision engine output is translated into YANG configuration and staged in the TeraFlowSDN candidate datastore. Target device: Ceragon MH-T261 (UUID f676623c...). Changes: ACM floor MCS 0 -&gt; MCS 4 (&gt;= 500 Mbps), QoS FIFO -&gt; IEEE 802.1Q PCP class 6 (PfifoFast), carrier 60.48 GHz -&gt; 64.80 GHz.
+Stage 2, pre-flight safety gate (3GPP TS 28.561): gate 1 latency (predicted 1.12 ms &lt;= 1.5 ms), gate 2 queue stability (buffer occupancy &lt; 40%), gate 3 hardware capability (MH-T261 supports MCS 4), gate 4 spectral mask (64.80 GHz approved in V-band).
+Stage 3, two-phase commit over RESTCONF to 192.168.1.225:80: phase 1 PATCH the candidate datastore, phase 2 POST ietf-netconf:commit, then continuous RFC 8040 telemetry polling with automatic revert if health checks fail.</a:t>
             </a:r>
             <a:endParaRPr lang="en-US" dirty="0"/>
           </a:p>
@@ -1245,6 +1247,186 @@
             <a:fld id="{F7021451-1387-4CA6-816F-3879F97B5CBC}" type="slidenum">
               <a:rPr lang="en-US"/>
               <a:t>10</a:t>
+            </a:fld>
+            <a:endParaRPr lang="en-US"/>
+          </a:p>
+        </p:txBody>
+      </p:sp>
+    </p:spTree>
+    <p:extLst>
+      <p:ext uri="{BB962C8B-B14F-4D97-AF65-F5344CB8AC3E}">
+        <p14:creationId xmlns:p14="http://schemas.microsoft.com/office/powerpoint/2010/main" val="1024086991"/>
+      </p:ext>
+    </p:extLst>
+  </p:cSld>
+  <p:clrMapOvr>
+    <a:masterClrMapping/>
+  </p:clrMapOvr>
+</p:notes>
+</file>
+
+<file path=ppt/notesSlides/notesSlide11.xml><?xml version="1.0" encoding="utf-8"?>
+<p:notes xmlns:a="http://schemas.openxmlformats.org/drawingml/2006/main" xmlns:r="http://schemas.openxmlformats.org/officeDocument/2006/relationships" xmlns:p="http://schemas.openxmlformats.org/presentationml/2006/main">
+  <p:cSld>
+    <p:spTree>
+      <p:nvGrpSpPr>
+        <p:cNvPr id="1" name=""/>
+        <p:cNvGrpSpPr/>
+        <p:nvPr/>
+      </p:nvGrpSpPr>
+      <p:grpSpPr>
+        <a:xfrm>
+          <a:off x="0" y="0"/>
+          <a:ext cx="0" cy="0"/>
+          <a:chOff x="0" y="0"/>
+          <a:chExt cx="0" cy="0"/>
+        </a:xfrm>
+      </p:grpSpPr>
+      <p:sp>
+        <p:nvSpPr>
+          <p:cNvPr id="2" name="Slide Image Placeholder 1"/>
+          <p:cNvSpPr>
+            <a:spLocks noGrp="1" noRot="1" noChangeAspect="1"/>
+          </p:cNvSpPr>
+          <p:nvPr>
+            <p:ph type="sldImg"/>
+          </p:nvPr>
+        </p:nvSpPr>
+        <p:spPr/>
+      </p:sp>
+      <p:sp>
+        <p:nvSpPr>
+          <p:cNvPr id="3" name="Notes Placeholder 2"/>
+          <p:cNvSpPr>
+            <a:spLocks noGrp="1"/>
+          </p:cNvSpPr>
+          <p:nvPr>
+            <p:ph type="body" idx="1"/>
+          </p:nvPr>
+        </p:nvSpPr>
+        <p:spPr/>
+        <p:txBody>
+          <a:bodyPr/>
+          <a:lstStyle/>
+          <a:p>
+            <a:r>
+              <a:rPr lang="en-US" dirty="0"/>
+              <a:t>The loop: SLA intent is ingested (TMF921), simulated in ns-3, safety-verified against the TS 28.561 gates, actuated through TeraFlowSDN over RESTCONF, and monitored through live telemetry. End to end this takes about 1.9 to 2.2 s.
+The ns-3 what-if run at Tier 4 is about 1.15 s of that; the remaining 0.75-1.05 s is topology reconciliation, gate checks and the two-phase commit (derived as total minus simulation time).
+This replaces hours of manual CLI troubleshooting.</a:t>
+            </a:r>
+            <a:endParaRPr lang="en-US" dirty="0"/>
+          </a:p>
+        </p:txBody>
+      </p:sp>
+      <p:sp>
+        <p:nvSpPr>
+          <p:cNvPr id="4" name="Slide Number Placeholder 3"/>
+          <p:cNvSpPr>
+            <a:spLocks noGrp="1"/>
+          </p:cNvSpPr>
+          <p:nvPr>
+            <p:ph type="sldNum" sz="quarter" idx="10"/>
+          </p:nvPr>
+        </p:nvSpPr>
+        <p:spPr/>
+        <p:txBody>
+          <a:bodyPr/>
+          <a:lstStyle/>
+          <a:p>
+            <a:fld id="{F7021451-1387-4CA6-816F-3879F97B5CBC}" type="slidenum">
+              <a:rPr lang="en-US"/>
+              <a:t>11</a:t>
+            </a:fld>
+            <a:endParaRPr lang="en-US"/>
+          </a:p>
+        </p:txBody>
+      </p:sp>
+    </p:spTree>
+    <p:extLst>
+      <p:ext uri="{BB962C8B-B14F-4D97-AF65-F5344CB8AC3E}">
+        <p14:creationId xmlns:p14="http://schemas.microsoft.com/office/powerpoint/2010/main" val="1024086991"/>
+      </p:ext>
+    </p:extLst>
+  </p:cSld>
+  <p:clrMapOvr>
+    <a:masterClrMapping/>
+  </p:clrMapOvr>
+</p:notes>
+</file>
+
+<file path=ppt/notesSlides/notesSlide12.xml><?xml version="1.0" encoding="utf-8"?>
+<p:notes xmlns:a="http://schemas.openxmlformats.org/drawingml/2006/main" xmlns:r="http://schemas.openxmlformats.org/officeDocument/2006/relationships" xmlns:p="http://schemas.openxmlformats.org/presentationml/2006/main">
+  <p:cSld>
+    <p:spTree>
+      <p:nvGrpSpPr>
+        <p:cNvPr id="1" name=""/>
+        <p:cNvGrpSpPr/>
+        <p:nvPr/>
+      </p:nvGrpSpPr>
+      <p:grpSpPr>
+        <a:xfrm>
+          <a:off x="0" y="0"/>
+          <a:ext cx="0" cy="0"/>
+          <a:chOff x="0" y="0"/>
+          <a:chExt cx="0" cy="0"/>
+        </a:xfrm>
+      </p:grpSpPr>
+      <p:sp>
+        <p:nvSpPr>
+          <p:cNvPr id="2" name="Slide Image Placeholder 1"/>
+          <p:cNvSpPr>
+            <a:spLocks noGrp="1" noRot="1" noChangeAspect="1"/>
+          </p:cNvSpPr>
+          <p:nvPr>
+            <p:ph type="sldImg"/>
+          </p:nvPr>
+        </p:nvSpPr>
+        <p:spPr/>
+      </p:sp>
+      <p:sp>
+        <p:nvSpPr>
+          <p:cNvPr id="3" name="Notes Placeholder 2"/>
+          <p:cNvSpPr>
+            <a:spLocks noGrp="1"/>
+          </p:cNvSpPr>
+          <p:nvPr>
+            <p:ph type="body" idx="1"/>
+          </p:nvPr>
+        </p:nvSpPr>
+        <p:spPr/>
+        <p:txBody>
+          <a:bodyPr/>
+          <a:lstStyle/>
+          <a:p>
+            <a:r>
+              <a:rPr lang="en-US" dirty="0"/>
+              <a:t>Zero-risk what-if validation: operators test severe perturbations (3.5x bulk surges, category-5 tropical rain fade, fibre cuts) in a microsecond-accurate twin without risking live production circuits.
+Standardised multi-vendor interoperability: built on open telecom specifications (TMF921, 3GPP TS 28.561, ITU-T Y.3090, ITU-T Y.3092, RFC 8040 RESTCONF) with the open-source ETSI TeraFlowSDN controller.
+Seconds-scale closed loop: SLA intent is ingested, simulated, verified and actuated in about 1.9-2.2 s. (The original deck called this 'sub-second'; the measured end-to-end figure is about 2 s.)</a:t>
+            </a:r>
+            <a:endParaRPr lang="en-US" dirty="0"/>
+          </a:p>
+        </p:txBody>
+      </p:sp>
+      <p:sp>
+        <p:nvSpPr>
+          <p:cNvPr id="4" name="Slide Number Placeholder 3"/>
+          <p:cNvSpPr>
+            <a:spLocks noGrp="1"/>
+          </p:cNvSpPr>
+          <p:nvPr>
+            <p:ph type="sldNum" sz="quarter" idx="10"/>
+          </p:nvPr>
+        </p:nvSpPr>
+        <p:spPr/>
+        <p:txBody>
+          <a:bodyPr/>
+          <a:lstStyle/>
+          <a:p>
+            <a:fld id="{F7021451-1387-4CA6-816F-3879F97B5CBC}" type="slidenum">
+              <a:rPr lang="en-US"/>
+              <a:t>12</a:t>
             </a:fld>
             <a:endParaRPr lang="en-US"/>
           </a:p>
@@ -1769,9 +1951,12 @@
           <a:p>
             <a:r>
               <a:rPr lang="en-US" dirty="0"/>
-              <a:t>Scenario values are the ones used in this deck: rain fade (ITU-R P.838) pushes adaptive coding and modulation down so the link rate falls from about 1 Gbps to 100 Mbps. Raising the ACM floor from MCS 0 to MCS 4 keeps at least 500 Mbps.
-The same candidate configuration also moves URLLC traffic into IEEE 802.1Q PCP class 6 (PfifoFast band 0) and retunes the carrier from 60.48 GHz to 64.80 GHz.
-ns-3 predicts 1.12 ms latency for this configuration, inside the 1.5 ms SLA, so it passes gate 1 of the pre-flight check.</a:t>
+              <a:t>The TFS to ns-3 link has three jobs, and each has a standard option today and a coming one.
+Job control. Now: 3GPP TS 28.561 models each what-if run as an NDTJob, created and managed with the generic TS 28.532 REST management-service operations; ITU-T Y.3092 (09/2024) calls this the NDT-m interface. Coming: 3GPP Release 20 'NDT phase 2' (study TR 28.883, completed March 2026, now normative work) adds NDT interaction with network and automation functions, multi-NDT collaboration, data collection and NDT job runtime behaviour. ITU-T Q.SDTN (SG11, 'Signalling and protocol for digital twin network supported for IMT-2020 and beyond') is still under study, target around December 2026, and defines the data-exchange interfaces between the twin, third-party applications and the physical network.
+State sync. Now: TeraFlowSDN's own Context and Monitoring gRPC services are the de facto source; standard streaming alternatives are IETF YANG-Push (RFC 8641) and OpenConfig gNMI. Y.3092 names this the NDT-p interface. Coming: Rel-20 NDT data-collection enhancements; IRTF NMRG twin interface drafts (research, not standards track).
+Shared models. Now: IETF RFC 8345 (ietf-network / ietf-network-topology YANG) as the common topology model; ITU-T Y.3093 (data domain, 08/2025) and Y.3094 (model domain). Coming: multi-NDT collaboration from TR 28.883; the O-RAN nGRG digital-twin research line (O-RAN co-funded the Colosseum O-RAN digital-twin platform in 2025).
+Frameworks that frame all of this: ITU-T Y.3090 (digital twin network architecture), ETSI GR ZSM 015 (2024, network digital twin in zero-touch management), IRTF NMRG network digital twin architecture draft.
+Recommended stack: TS 28.561 NDTJob for control, TFS gRPC for live state, RFC 8345 for the topology model.</a:t>
             </a:r>
             <a:endParaRPr lang="en-US" dirty="0"/>
           </a:p>
@@ -1859,9 +2044,11 @@
           <a:p>
             <a:r>
               <a:rPr lang="en-US" dirty="0"/>
-              <a:t>Stage 1, candidate datastore staging: the AI decision engine output is translated into YANG configuration and staged in the TeraFlowSDN candidate datastore. Target device: Ceragon MH-T261 (UUID f676623c...). Changes: ACM floor MCS 0 -&gt; MCS 4 (&gt;= 500 Mbps), QoS FIFO -&gt; IEEE 802.1Q PCP class 6 (PfifoFast), carrier 60.48 GHz -&gt; 64.80 GHz.
-Stage 2, pre-flight safety gate (3GPP TS 28.561): gate 1 latency (predicted 1.12 ms &lt;= 1.5 ms), gate 2 queue stability (buffer occupancy &lt; 40%), gate 3 hardware capability (MH-T261 supports MCS 4), gate 4 spectral mask (64.80 GHz approved in V-band).
-Stage 3, two-phase commit over RESTCONF to 192.168.1.225:80: phase 1 PATCH the candidate datastore, phase 2 POST ietf-netconf:commit, then continuous RFC 8040 telemetry polling with automatic revert if health checks fail.</a:t>
+              <a:t>Three layers keep Python AI/ML inside twin runs organised.
+1. Couple in-run. The agent must exchange observations, rewards and actions with ns-3 at every simulation step. There is no SDO standard for this; the de facto options are ns3-ai (shared-memory IPC between C++ and Python, reported up to about 100x faster than socket IPC, with a Gymnasium-style interface) and ns3-gym (ZeroMQ sockets, OpenAI Gym / Gymnasium API). Recommendation: expose every scenario as a Gymnasium environment so any agent, including the MAPPO shared actor from the MARL-RIC code in this repository (ce_ck_s1234/policy_final.pt), plugs in the same way.
+2. Package and serve. Export trained models to ONNX so the identical artefact runs in the twin and in the live controller; serve it behind the KServe Open Inference Protocol (REST/gRPC) when the agent runs outside the ns-3 process. These are open industry formats, not SDO standards.
+3. Govern the lifecycle. 3GPP TS 28.105 (AI/ML management) covers ML training, testing, deployment and inference; Release 19 adds AI/ML inference emulation, i.e. running inference in an emulation environment to evaluate a model before it is deployed, which is exactly what a twin run is. ITU-T Y.3181 (2022) defines an ML sandbox: an isolated environment with simulators for validating ML before deployment, with reference points and APIs. ITU-T Y.3172 defines the ML pipeline architecture (sources, pre-processing, model, policy, sinks) and the ML function orchestrator.
+Coming: 3GPP Rel-20 NDT phase 2 (TR 28.883) covers how NDTs work with machine-learning and automation functions, which links NDT jobs (TS 28.561) to ML entities (TS 28.105).</a:t>
             </a:r>
             <a:endParaRPr lang="en-US" dirty="0"/>
           </a:p>
@@ -1949,9 +2136,9 @@
           <a:p>
             <a:r>
               <a:rPr lang="en-US" dirty="0"/>
-              <a:t>The loop: SLA intent is ingested (TMF921), simulated in ns-3, safety-verified against the TS 28.561 gates, actuated through TeraFlowSDN over RESTCONF, and monitored through live telemetry. End to end this takes about 1.9 to 2.2 s.
-The ns-3 what-if run at Tier 4 is about 1.15 s of that; the remaining 0.75-1.05 s is topology reconciliation, gate checks and the two-phase commit (derived as total minus simulation time).
-This replaces hours of manual CLI troubleshooting.</a:t>
+              <a:t>Scenario values are the ones used in this deck: rain fade (ITU-R P.838) pushes adaptive coding and modulation down so the link rate falls from about 1 Gbps to 100 Mbps. Raising the ACM floor from MCS 0 to MCS 4 keeps at least 500 Mbps.
+The same candidate configuration also moves URLLC traffic into IEEE 802.1Q PCP class 6 (PfifoFast band 0) and retunes the carrier from 60.48 GHz to 64.80 GHz.
+ns-3 predicts 1.12 ms latency for this configuration, inside the 1.5 ms SLA, so it passes gate 1 of the pre-flight check.</a:t>
             </a:r>
             <a:endParaRPr lang="en-US" dirty="0"/>
           </a:p>
@@ -3025,6 +3212,2864 @@
     <p:bg>
       <p:bgPr>
         <a:solidFill>
+          <a:srgbClr val="FFFFFF"/>
+        </a:solidFill>
+      </p:bgPr>
+    </p:bg>
+    <p:spTree>
+      <p:nvGrpSpPr>
+        <p:cNvPr id="1" name=""/>
+        <p:cNvGrpSpPr/>
+        <p:nvPr/>
+      </p:nvGrpSpPr>
+      <p:grpSpPr>
+        <a:xfrm>
+          <a:off x="0" y="0"/>
+          <a:ext cx="0" cy="0"/>
+          <a:chOff x="0" y="0"/>
+          <a:chExt cx="0" cy="0"/>
+        </a:xfrm>
+      </p:grpSpPr>
+      <p:sp>
+        <p:nvSpPr>
+          <p:cNvPr id="2" name="Text 0"/>
+          <p:cNvSpPr txBox="1"/>
+          <p:nvPr/>
+        </p:nvSpPr>
+        <p:spPr>
+          <a:xfrm>
+            <a:off x="457200" y="274320"/>
+            <a:ext cx="8229600" cy="228600"/>
+          </a:xfrm>
+          <a:prstGeom prst="rect">
+            <a:avLst/>
+          </a:prstGeom>
+          <a:noFill/>
+          <a:ln/>
+        </p:spPr>
+        <p:txBody>
+          <a:bodyPr wrap="square" lIns="0" tIns="0" rIns="0" bIns="0" rtlCol="0" anchor="ctr"/>
+          <a:lstStyle/>
+          <a:p>
+            <a:pPr indent="0" marL="0">
+              <a:buNone/>
+            </a:pPr>
+            <a:r>
+              <a:rPr lang="en-US" sz="1000" b="1" spc="200" kern="0" dirty="0">
+                <a:solidFill>
+                  <a:srgbClr val="0FA3B1"/>
+                </a:solidFill>
+                <a:latin typeface="Arial" pitchFamily="34" charset="0"/>
+                <a:ea typeface="Arial" pitchFamily="34" charset="-122"/>
+                <a:cs typeface="Arial" pitchFamily="34" charset="-120"/>
+              </a:rPr>
+              <a:t>ADAPTER ③ · TFS → HARDWARE</a:t>
+            </a:r>
+            <a:endParaRPr lang="en-US" sz="1000" dirty="0"/>
+          </a:p>
+        </p:txBody>
+      </p:sp>
+      <p:sp>
+        <p:nvSpPr>
+          <p:cNvPr id="3" name="Text 1"/>
+          <p:cNvSpPr txBox="1"/>
+          <p:nvPr/>
+        </p:nvSpPr>
+        <p:spPr>
+          <a:xfrm>
+            <a:off x="457200" y="502920"/>
+            <a:ext cx="8229600" cy="548640"/>
+          </a:xfrm>
+          <a:prstGeom prst="rect">
+            <a:avLst/>
+          </a:prstGeom>
+          <a:noFill/>
+          <a:ln/>
+        </p:spPr>
+        <p:txBody>
+          <a:bodyPr wrap="square" lIns="0" tIns="0" rIns="0" bIns="0" rtlCol="0" anchor="ctr"/>
+          <a:lstStyle/>
+          <a:p>
+            <a:pPr indent="0" marL="0">
+              <a:buNone/>
+            </a:pPr>
+            <a:r>
+              <a:rPr lang="en-US" sz="2400" b="1" dirty="0">
+                <a:solidFill>
+                  <a:srgbClr val="0B1D33"/>
+                </a:solidFill>
+                <a:latin typeface="Arial" pitchFamily="34" charset="0"/>
+                <a:ea typeface="Arial" pitchFamily="34" charset="-122"/>
+                <a:cs typeface="Arial" pitchFamily="34" charset="-120"/>
+              </a:rPr>
+              <a:t>Stage → verify → commit, with automatic rollback</a:t>
+            </a:r>
+            <a:endParaRPr lang="en-US" sz="2400" dirty="0"/>
+          </a:p>
+        </p:txBody>
+      </p:sp>
+      <p:sp>
+        <p:nvSpPr>
+          <p:cNvPr id="4" name="Shape 2"/>
+          <p:cNvSpPr/>
+          <p:nvPr/>
+        </p:nvSpPr>
+        <p:spPr>
+          <a:xfrm>
+            <a:off x="457200" y="1188720"/>
+            <a:ext cx="2514600" cy="2514600"/>
+          </a:xfrm>
+          <a:prstGeom prst="roundRect">
+            <a:avLst>
+              <a:gd name="adj" fmla="val 3636"/>
+            </a:avLst>
+          </a:prstGeom>
+          <a:solidFill>
+            <a:srgbClr val="F2F5F8"/>
+          </a:solidFill>
+          <a:ln w="12700">
+            <a:solidFill>
+              <a:srgbClr val="F2F5F8"/>
+            </a:solidFill>
+            <a:prstDash val="solid"/>
+          </a:ln>
+        </p:spPr>
+      </p:sp>
+      <p:sp>
+        <p:nvSpPr>
+          <p:cNvPr id="5" name="Shape 3"/>
+          <p:cNvSpPr/>
+          <p:nvPr/>
+        </p:nvSpPr>
+        <p:spPr>
+          <a:xfrm>
+            <a:off x="640080" y="1371600"/>
+            <a:ext cx="457200" cy="457200"/>
+          </a:xfrm>
+          <a:prstGeom prst="ellipse">
+            <a:avLst/>
+          </a:prstGeom>
+          <a:solidFill>
+            <a:srgbClr val="7C5CFF"/>
+          </a:solidFill>
+          <a:ln w="12700">
+            <a:solidFill>
+              <a:srgbClr val="7C5CFF"/>
+            </a:solidFill>
+            <a:prstDash val="solid"/>
+          </a:ln>
+        </p:spPr>
+      </p:sp>
+      <p:pic>
+        <p:nvPicPr>
+          <p:cNvPr id="6" name="Image 0" descr="preencoded.png">    </p:cNvPr>
+          <p:cNvPicPr>
+            <a:picLocks noChangeAspect="1"/>
+          </p:cNvPicPr>
+          <p:nvPr/>
+        </p:nvPicPr>
+        <p:blipFill>
+          <a:blip r:embed="rId1"/>
+          <a:stretch>
+            <a:fillRect/>
+          </a:stretch>
+        </p:blipFill>
+        <p:spPr>
+          <a:xfrm>
+            <a:off x="754380" y="1485900"/>
+            <a:ext cx="228600" cy="228600"/>
+          </a:xfrm>
+          <a:prstGeom prst="rect">
+            <a:avLst/>
+          </a:prstGeom>
+        </p:spPr>
+      </p:pic>
+      <p:sp>
+        <p:nvSpPr>
+          <p:cNvPr id="7" name="Text 4"/>
+          <p:cNvSpPr txBox="1"/>
+          <p:nvPr/>
+        </p:nvSpPr>
+        <p:spPr>
+          <a:xfrm>
+            <a:off x="1234440" y="1389888"/>
+            <a:ext cx="1645920" cy="182880"/>
+          </a:xfrm>
+          <a:prstGeom prst="rect">
+            <a:avLst/>
+          </a:prstGeom>
+          <a:noFill/>
+          <a:ln/>
+        </p:spPr>
+        <p:txBody>
+          <a:bodyPr wrap="square" lIns="0" tIns="0" rIns="0" bIns="0" rtlCol="0" anchor="t"/>
+          <a:lstStyle/>
+          <a:p>
+            <a:pPr indent="0" marL="0">
+              <a:buNone/>
+            </a:pPr>
+            <a:r>
+              <a:rPr lang="en-US" sz="900" b="1" spc="50" kern="0" dirty="0">
+                <a:solidFill>
+                  <a:srgbClr val="7C5CFF"/>
+                </a:solidFill>
+                <a:latin typeface="Calibri" pitchFamily="34" charset="0"/>
+                <a:ea typeface="Calibri" pitchFamily="34" charset="-122"/>
+                <a:cs typeface="Calibri" pitchFamily="34" charset="-120"/>
+              </a:rPr>
+              <a:t>STAGE 1</a:t>
+            </a:r>
+            <a:endParaRPr lang="en-US" sz="900" dirty="0"/>
+          </a:p>
+        </p:txBody>
+      </p:sp>
+      <p:sp>
+        <p:nvSpPr>
+          <p:cNvPr id="8" name="Text 5"/>
+          <p:cNvSpPr txBox="1"/>
+          <p:nvPr/>
+        </p:nvSpPr>
+        <p:spPr>
+          <a:xfrm>
+            <a:off x="1234440" y="1572768"/>
+            <a:ext cx="1645920" cy="274320"/>
+          </a:xfrm>
+          <a:prstGeom prst="rect">
+            <a:avLst/>
+          </a:prstGeom>
+          <a:noFill/>
+          <a:ln/>
+        </p:spPr>
+        <p:txBody>
+          <a:bodyPr wrap="square" lIns="0" tIns="0" rIns="0" bIns="0" rtlCol="0" anchor="t"/>
+          <a:lstStyle/>
+          <a:p>
+            <a:pPr indent="0" marL="0">
+              <a:buNone/>
+            </a:pPr>
+            <a:r>
+              <a:rPr lang="en-US" sz="1150" b="1" dirty="0">
+                <a:solidFill>
+                  <a:srgbClr val="0B1D33"/>
+                </a:solidFill>
+                <a:latin typeface="Arial" pitchFamily="34" charset="0"/>
+                <a:ea typeface="Arial" pitchFamily="34" charset="-122"/>
+                <a:cs typeface="Arial" pitchFamily="34" charset="-120"/>
+              </a:rPr>
+              <a:t>Stage the candidate</a:t>
+            </a:r>
+            <a:endParaRPr lang="en-US" sz="1150" dirty="0"/>
+          </a:p>
+        </p:txBody>
+      </p:sp>
+      <p:pic>
+        <p:nvPicPr>
+          <p:cNvPr id="9" name="Image 1" descr="preencoded.png">    </p:cNvPr>
+          <p:cNvPicPr>
+            <a:picLocks noChangeAspect="1"/>
+          </p:cNvPicPr>
+          <p:nvPr/>
+        </p:nvPicPr>
+        <p:blipFill>
+          <a:blip r:embed="rId2"/>
+          <a:stretch>
+            <a:fillRect/>
+          </a:stretch>
+        </p:blipFill>
+        <p:spPr>
+          <a:xfrm>
+            <a:off x="658368" y="2112264"/>
+            <a:ext cx="164592" cy="164592"/>
+          </a:xfrm>
+          <a:prstGeom prst="rect">
+            <a:avLst/>
+          </a:prstGeom>
+        </p:spPr>
+      </p:pic>
+      <p:sp>
+        <p:nvSpPr>
+          <p:cNvPr id="10" name="Text 6"/>
+          <p:cNvSpPr txBox="1"/>
+          <p:nvPr/>
+        </p:nvSpPr>
+        <p:spPr>
+          <a:xfrm>
+            <a:off x="914400" y="2057400"/>
+            <a:ext cx="1920240" cy="329184"/>
+          </a:xfrm>
+          <a:prstGeom prst="rect">
+            <a:avLst/>
+          </a:prstGeom>
+          <a:noFill/>
+          <a:ln/>
+        </p:spPr>
+        <p:txBody>
+          <a:bodyPr wrap="square" lIns="0" tIns="0" rIns="0" bIns="0" rtlCol="0" anchor="t"/>
+          <a:lstStyle/>
+          <a:p>
+            <a:pPr indent="0" marL="0">
+              <a:buNone/>
+            </a:pPr>
+            <a:r>
+              <a:rPr lang="en-US" sz="1050" dirty="0">
+                <a:solidFill>
+                  <a:srgbClr val="1A2B3C"/>
+                </a:solidFill>
+                <a:latin typeface="Calibri" pitchFamily="34" charset="0"/>
+                <a:ea typeface="Calibri" pitchFamily="34" charset="-122"/>
+                <a:cs typeface="Calibri" pitchFamily="34" charset="-120"/>
+              </a:rPr>
+              <a:t>Decision engine output becomes YANG config</a:t>
+            </a:r>
+            <a:endParaRPr lang="en-US" sz="1050" dirty="0"/>
+          </a:p>
+        </p:txBody>
+      </p:sp>
+      <p:pic>
+        <p:nvPicPr>
+          <p:cNvPr id="11" name="Image 2" descr="preencoded.png">    </p:cNvPr>
+          <p:cNvPicPr>
+            <a:picLocks noChangeAspect="1"/>
+          </p:cNvPicPr>
+          <p:nvPr/>
+        </p:nvPicPr>
+        <p:blipFill>
+          <a:blip r:embed="rId3"/>
+          <a:stretch>
+            <a:fillRect/>
+          </a:stretch>
+        </p:blipFill>
+        <p:spPr>
+          <a:xfrm>
+            <a:off x="658368" y="2496312"/>
+            <a:ext cx="164592" cy="164592"/>
+          </a:xfrm>
+          <a:prstGeom prst="rect">
+            <a:avLst/>
+          </a:prstGeom>
+        </p:spPr>
+      </p:pic>
+      <p:sp>
+        <p:nvSpPr>
+          <p:cNvPr id="12" name="Text 7"/>
+          <p:cNvSpPr txBox="1"/>
+          <p:nvPr/>
+        </p:nvSpPr>
+        <p:spPr>
+          <a:xfrm>
+            <a:off x="914400" y="2441448"/>
+            <a:ext cx="1920240" cy="329184"/>
+          </a:xfrm>
+          <a:prstGeom prst="rect">
+            <a:avLst/>
+          </a:prstGeom>
+          <a:noFill/>
+          <a:ln/>
+        </p:spPr>
+        <p:txBody>
+          <a:bodyPr wrap="square" lIns="0" tIns="0" rIns="0" bIns="0" rtlCol="0" anchor="t"/>
+          <a:lstStyle/>
+          <a:p>
+            <a:pPr indent="0" marL="0">
+              <a:buNone/>
+            </a:pPr>
+            <a:r>
+              <a:rPr lang="en-US" sz="1050" dirty="0">
+                <a:solidFill>
+                  <a:srgbClr val="1A2B3C"/>
+                </a:solidFill>
+                <a:latin typeface="Calibri" pitchFamily="34" charset="0"/>
+                <a:ea typeface="Calibri" pitchFamily="34" charset="-122"/>
+                <a:cs typeface="Calibri" pitchFamily="34" charset="-120"/>
+              </a:rPr>
+              <a:t>Held in the TFS candidate datastore, not live</a:t>
+            </a:r>
+            <a:endParaRPr lang="en-US" sz="1050" dirty="0"/>
+          </a:p>
+        </p:txBody>
+      </p:sp>
+      <p:pic>
+        <p:nvPicPr>
+          <p:cNvPr id="13" name="Image 3" descr="preencoded.png">    </p:cNvPr>
+          <p:cNvPicPr>
+            <a:picLocks noChangeAspect="1"/>
+          </p:cNvPicPr>
+          <p:nvPr/>
+        </p:nvPicPr>
+        <p:blipFill>
+          <a:blip r:embed="rId4"/>
+          <a:stretch>
+            <a:fillRect/>
+          </a:stretch>
+        </p:blipFill>
+        <p:spPr>
+          <a:xfrm>
+            <a:off x="658368" y="2880360"/>
+            <a:ext cx="164592" cy="164592"/>
+          </a:xfrm>
+          <a:prstGeom prst="rect">
+            <a:avLst/>
+          </a:prstGeom>
+        </p:spPr>
+      </p:pic>
+      <p:sp>
+        <p:nvSpPr>
+          <p:cNvPr id="14" name="Text 8"/>
+          <p:cNvSpPr txBox="1"/>
+          <p:nvPr/>
+        </p:nvSpPr>
+        <p:spPr>
+          <a:xfrm>
+            <a:off x="914400" y="2825496"/>
+            <a:ext cx="1920240" cy="329184"/>
+          </a:xfrm>
+          <a:prstGeom prst="rect">
+            <a:avLst/>
+          </a:prstGeom>
+          <a:noFill/>
+          <a:ln/>
+        </p:spPr>
+        <p:txBody>
+          <a:bodyPr wrap="square" lIns="0" tIns="0" rIns="0" bIns="0" rtlCol="0" anchor="t"/>
+          <a:lstStyle/>
+          <a:p>
+            <a:pPr indent="0" marL="0">
+              <a:buNone/>
+            </a:pPr>
+            <a:r>
+              <a:rPr lang="en-US" sz="1050" dirty="0">
+                <a:solidFill>
+                  <a:srgbClr val="1A2B3C"/>
+                </a:solidFill>
+                <a:latin typeface="Calibri" pitchFamily="34" charset="0"/>
+                <a:ea typeface="Calibri" pitchFamily="34" charset="-122"/>
+                <a:cs typeface="Calibri" pitchFamily="34" charset="-120"/>
+              </a:rPr>
+              <a:t>Diff checked against the running config</a:t>
+            </a:r>
+            <a:endParaRPr lang="en-US" sz="1050" dirty="0"/>
+          </a:p>
+        </p:txBody>
+      </p:sp>
+      <p:sp>
+        <p:nvSpPr>
+          <p:cNvPr id="15" name="Shape 9"/>
+          <p:cNvSpPr/>
+          <p:nvPr/>
+        </p:nvSpPr>
+        <p:spPr>
+          <a:xfrm>
+            <a:off x="3017520" y="2446020"/>
+            <a:ext cx="251460" cy="0"/>
+          </a:xfrm>
+          <a:prstGeom prst="line">
+            <a:avLst/>
+          </a:prstGeom>
+          <a:noFill/>
+          <a:ln w="22225">
+            <a:solidFill>
+              <a:srgbClr val="0B1D33"/>
+            </a:solidFill>
+            <a:prstDash val="solid"/>
+            <a:headEnd type="none"/>
+            <a:tailEnd type="triangle"/>
+          </a:ln>
+        </p:spPr>
+      </p:sp>
+      <p:sp>
+        <p:nvSpPr>
+          <p:cNvPr id="16" name="Shape 10"/>
+          <p:cNvSpPr/>
+          <p:nvPr/>
+        </p:nvSpPr>
+        <p:spPr>
+          <a:xfrm>
+            <a:off x="3314700" y="1188720"/>
+            <a:ext cx="2514600" cy="2514600"/>
+          </a:xfrm>
+          <a:prstGeom prst="roundRect">
+            <a:avLst>
+              <a:gd name="adj" fmla="val 3636"/>
+            </a:avLst>
+          </a:prstGeom>
+          <a:solidFill>
+            <a:srgbClr val="F2F5F8"/>
+          </a:solidFill>
+          <a:ln w="12700">
+            <a:solidFill>
+              <a:srgbClr val="F2F5F8"/>
+            </a:solidFill>
+            <a:prstDash val="solid"/>
+          </a:ln>
+        </p:spPr>
+      </p:sp>
+      <p:sp>
+        <p:nvSpPr>
+          <p:cNvPr id="17" name="Shape 11"/>
+          <p:cNvSpPr/>
+          <p:nvPr/>
+        </p:nvSpPr>
+        <p:spPr>
+          <a:xfrm>
+            <a:off x="3497580" y="1371600"/>
+            <a:ext cx="457200" cy="457200"/>
+          </a:xfrm>
+          <a:prstGeom prst="ellipse">
+            <a:avLst/>
+          </a:prstGeom>
+          <a:solidFill>
+            <a:srgbClr val="0FA3B1"/>
+          </a:solidFill>
+          <a:ln w="12700">
+            <a:solidFill>
+              <a:srgbClr val="0FA3B1"/>
+            </a:solidFill>
+            <a:prstDash val="solid"/>
+          </a:ln>
+        </p:spPr>
+      </p:sp>
+      <p:pic>
+        <p:nvPicPr>
+          <p:cNvPr id="18" name="Image 4" descr="preencoded.png">    </p:cNvPr>
+          <p:cNvPicPr>
+            <a:picLocks noChangeAspect="1"/>
+          </p:cNvPicPr>
+          <p:nvPr/>
+        </p:nvPicPr>
+        <p:blipFill>
+          <a:blip r:embed="rId5"/>
+          <a:stretch>
+            <a:fillRect/>
+          </a:stretch>
+        </p:blipFill>
+        <p:spPr>
+          <a:xfrm>
+            <a:off x="3611880" y="1485900"/>
+            <a:ext cx="228600" cy="228600"/>
+          </a:xfrm>
+          <a:prstGeom prst="rect">
+            <a:avLst/>
+          </a:prstGeom>
+        </p:spPr>
+      </p:pic>
+      <p:sp>
+        <p:nvSpPr>
+          <p:cNvPr id="19" name="Text 12"/>
+          <p:cNvSpPr txBox="1"/>
+          <p:nvPr/>
+        </p:nvSpPr>
+        <p:spPr>
+          <a:xfrm>
+            <a:off x="4091940" y="1389888"/>
+            <a:ext cx="1645920" cy="182880"/>
+          </a:xfrm>
+          <a:prstGeom prst="rect">
+            <a:avLst/>
+          </a:prstGeom>
+          <a:noFill/>
+          <a:ln/>
+        </p:spPr>
+        <p:txBody>
+          <a:bodyPr wrap="square" lIns="0" tIns="0" rIns="0" bIns="0" rtlCol="0" anchor="t"/>
+          <a:lstStyle/>
+          <a:p>
+            <a:pPr indent="0" marL="0">
+              <a:buNone/>
+            </a:pPr>
+            <a:r>
+              <a:rPr lang="en-US" sz="900" b="1" spc="50" kern="0" dirty="0">
+                <a:solidFill>
+                  <a:srgbClr val="0FA3B1"/>
+                </a:solidFill>
+                <a:latin typeface="Calibri" pitchFamily="34" charset="0"/>
+                <a:ea typeface="Calibri" pitchFamily="34" charset="-122"/>
+                <a:cs typeface="Calibri" pitchFamily="34" charset="-120"/>
+              </a:rPr>
+              <a:t>STAGE 2 · TS 28.561</a:t>
+            </a:r>
+            <a:endParaRPr lang="en-US" sz="900" dirty="0"/>
+          </a:p>
+        </p:txBody>
+      </p:sp>
+      <p:sp>
+        <p:nvSpPr>
+          <p:cNvPr id="20" name="Text 13"/>
+          <p:cNvSpPr txBox="1"/>
+          <p:nvPr/>
+        </p:nvSpPr>
+        <p:spPr>
+          <a:xfrm>
+            <a:off x="4091940" y="1572768"/>
+            <a:ext cx="1645920" cy="274320"/>
+          </a:xfrm>
+          <a:prstGeom prst="rect">
+            <a:avLst/>
+          </a:prstGeom>
+          <a:noFill/>
+          <a:ln/>
+        </p:spPr>
+        <p:txBody>
+          <a:bodyPr wrap="square" lIns="0" tIns="0" rIns="0" bIns="0" rtlCol="0" anchor="t"/>
+          <a:lstStyle/>
+          <a:p>
+            <a:pPr indent="0" marL="0">
+              <a:buNone/>
+            </a:pPr>
+            <a:r>
+              <a:rPr lang="en-US" sz="1150" b="1" dirty="0">
+                <a:solidFill>
+                  <a:srgbClr val="0B1D33"/>
+                </a:solidFill>
+                <a:latin typeface="Arial" pitchFamily="34" charset="0"/>
+                <a:ea typeface="Arial" pitchFamily="34" charset="-122"/>
+                <a:cs typeface="Arial" pitchFamily="34" charset="-120"/>
+              </a:rPr>
+              <a:t>Pre-flight gates</a:t>
+            </a:r>
+            <a:endParaRPr lang="en-US" sz="1150" dirty="0"/>
+          </a:p>
+        </p:txBody>
+      </p:sp>
+      <p:pic>
+        <p:nvPicPr>
+          <p:cNvPr id="21" name="Image 5" descr="preencoded.png">    </p:cNvPr>
+          <p:cNvPicPr>
+            <a:picLocks noChangeAspect="1"/>
+          </p:cNvPicPr>
+          <p:nvPr/>
+        </p:nvPicPr>
+        <p:blipFill>
+          <a:blip r:embed="rId6"/>
+          <a:stretch>
+            <a:fillRect/>
+          </a:stretch>
+        </p:blipFill>
+        <p:spPr>
+          <a:xfrm>
+            <a:off x="3515868" y="2112264"/>
+            <a:ext cx="164592" cy="164592"/>
+          </a:xfrm>
+          <a:prstGeom prst="rect">
+            <a:avLst/>
+          </a:prstGeom>
+        </p:spPr>
+      </p:pic>
+      <p:sp>
+        <p:nvSpPr>
+          <p:cNvPr id="22" name="Text 14"/>
+          <p:cNvSpPr txBox="1"/>
+          <p:nvPr/>
+        </p:nvSpPr>
+        <p:spPr>
+          <a:xfrm>
+            <a:off x="3771900" y="2057400"/>
+            <a:ext cx="1920240" cy="329184"/>
+          </a:xfrm>
+          <a:prstGeom prst="rect">
+            <a:avLst/>
+          </a:prstGeom>
+          <a:noFill/>
+          <a:ln/>
+        </p:spPr>
+        <p:txBody>
+          <a:bodyPr wrap="square" lIns="0" tIns="0" rIns="0" bIns="0" rtlCol="0" anchor="t"/>
+          <a:lstStyle/>
+          <a:p>
+            <a:pPr indent="0" marL="0">
+              <a:buNone/>
+            </a:pPr>
+            <a:r>
+              <a:rPr lang="en-US" sz="1050" dirty="0">
+                <a:solidFill>
+                  <a:srgbClr val="1A2B3C"/>
+                </a:solidFill>
+                <a:latin typeface="Calibri" pitchFamily="34" charset="0"/>
+                <a:ea typeface="Calibri" pitchFamily="34" charset="-122"/>
+                <a:cs typeface="Calibri" pitchFamily="34" charset="-120"/>
+              </a:rPr>
+              <a:t>Latency 1.12 ms ≤ 1.5 ms</a:t>
+            </a:r>
+            <a:endParaRPr lang="en-US" sz="1050" dirty="0"/>
+          </a:p>
+        </p:txBody>
+      </p:sp>
+      <p:pic>
+        <p:nvPicPr>
+          <p:cNvPr id="23" name="Image 6" descr="preencoded.png">    </p:cNvPr>
+          <p:cNvPicPr>
+            <a:picLocks noChangeAspect="1"/>
+          </p:cNvPicPr>
+          <p:nvPr/>
+        </p:nvPicPr>
+        <p:blipFill>
+          <a:blip r:embed="rId7"/>
+          <a:stretch>
+            <a:fillRect/>
+          </a:stretch>
+        </p:blipFill>
+        <p:spPr>
+          <a:xfrm>
+            <a:off x="3515868" y="2496312"/>
+            <a:ext cx="164592" cy="164592"/>
+          </a:xfrm>
+          <a:prstGeom prst="rect">
+            <a:avLst/>
+          </a:prstGeom>
+        </p:spPr>
+      </p:pic>
+      <p:sp>
+        <p:nvSpPr>
+          <p:cNvPr id="24" name="Text 15"/>
+          <p:cNvSpPr txBox="1"/>
+          <p:nvPr/>
+        </p:nvSpPr>
+        <p:spPr>
+          <a:xfrm>
+            <a:off x="3771900" y="2441448"/>
+            <a:ext cx="1920240" cy="329184"/>
+          </a:xfrm>
+          <a:prstGeom prst="rect">
+            <a:avLst/>
+          </a:prstGeom>
+          <a:noFill/>
+          <a:ln/>
+        </p:spPr>
+        <p:txBody>
+          <a:bodyPr wrap="square" lIns="0" tIns="0" rIns="0" bIns="0" rtlCol="0" anchor="t"/>
+          <a:lstStyle/>
+          <a:p>
+            <a:pPr indent="0" marL="0">
+              <a:buNone/>
+            </a:pPr>
+            <a:r>
+              <a:rPr lang="en-US" sz="1050" dirty="0">
+                <a:solidFill>
+                  <a:srgbClr val="1A2B3C"/>
+                </a:solidFill>
+                <a:latin typeface="Calibri" pitchFamily="34" charset="0"/>
+                <a:ea typeface="Calibri" pitchFamily="34" charset="-122"/>
+                <a:cs typeface="Calibri" pitchFamily="34" charset="-120"/>
+              </a:rPr>
+              <a:t>Buffer occupancy &lt; 40%</a:t>
+            </a:r>
+            <a:endParaRPr lang="en-US" sz="1050" dirty="0"/>
+          </a:p>
+        </p:txBody>
+      </p:sp>
+      <p:pic>
+        <p:nvPicPr>
+          <p:cNvPr id="25" name="Image 7" descr="preencoded.png">    </p:cNvPr>
+          <p:cNvPicPr>
+            <a:picLocks noChangeAspect="1"/>
+          </p:cNvPicPr>
+          <p:nvPr/>
+        </p:nvPicPr>
+        <p:blipFill>
+          <a:blip r:embed="rId8"/>
+          <a:stretch>
+            <a:fillRect/>
+          </a:stretch>
+        </p:blipFill>
+        <p:spPr>
+          <a:xfrm>
+            <a:off x="3515868" y="2880360"/>
+            <a:ext cx="164592" cy="164592"/>
+          </a:xfrm>
+          <a:prstGeom prst="rect">
+            <a:avLst/>
+          </a:prstGeom>
+        </p:spPr>
+      </p:pic>
+      <p:sp>
+        <p:nvSpPr>
+          <p:cNvPr id="26" name="Text 16"/>
+          <p:cNvSpPr txBox="1"/>
+          <p:nvPr/>
+        </p:nvSpPr>
+        <p:spPr>
+          <a:xfrm>
+            <a:off x="3771900" y="2825496"/>
+            <a:ext cx="1920240" cy="329184"/>
+          </a:xfrm>
+          <a:prstGeom prst="rect">
+            <a:avLst/>
+          </a:prstGeom>
+          <a:noFill/>
+          <a:ln/>
+        </p:spPr>
+        <p:txBody>
+          <a:bodyPr wrap="square" lIns="0" tIns="0" rIns="0" bIns="0" rtlCol="0" anchor="t"/>
+          <a:lstStyle/>
+          <a:p>
+            <a:pPr indent="0" marL="0">
+              <a:buNone/>
+            </a:pPr>
+            <a:r>
+              <a:rPr lang="en-US" sz="1050" dirty="0">
+                <a:solidFill>
+                  <a:srgbClr val="1A2B3C"/>
+                </a:solidFill>
+                <a:latin typeface="Calibri" pitchFamily="34" charset="0"/>
+                <a:ea typeface="Calibri" pitchFamily="34" charset="-122"/>
+                <a:cs typeface="Calibri" pitchFamily="34" charset="-120"/>
+              </a:rPr>
+              <a:t>MH-T261 supports MCS 4</a:t>
+            </a:r>
+            <a:endParaRPr lang="en-US" sz="1050" dirty="0"/>
+          </a:p>
+        </p:txBody>
+      </p:sp>
+      <p:pic>
+        <p:nvPicPr>
+          <p:cNvPr id="27" name="Image 8" descr="preencoded.png">    </p:cNvPr>
+          <p:cNvPicPr>
+            <a:picLocks noChangeAspect="1"/>
+          </p:cNvPicPr>
+          <p:nvPr/>
+        </p:nvPicPr>
+        <p:blipFill>
+          <a:blip r:embed="rId9"/>
+          <a:stretch>
+            <a:fillRect/>
+          </a:stretch>
+        </p:blipFill>
+        <p:spPr>
+          <a:xfrm>
+            <a:off x="3515868" y="3264408"/>
+            <a:ext cx="164592" cy="164592"/>
+          </a:xfrm>
+          <a:prstGeom prst="rect">
+            <a:avLst/>
+          </a:prstGeom>
+        </p:spPr>
+      </p:pic>
+      <p:sp>
+        <p:nvSpPr>
+          <p:cNvPr id="28" name="Text 17"/>
+          <p:cNvSpPr txBox="1"/>
+          <p:nvPr/>
+        </p:nvSpPr>
+        <p:spPr>
+          <a:xfrm>
+            <a:off x="3771900" y="3209544"/>
+            <a:ext cx="1920240" cy="329184"/>
+          </a:xfrm>
+          <a:prstGeom prst="rect">
+            <a:avLst/>
+          </a:prstGeom>
+          <a:noFill/>
+          <a:ln/>
+        </p:spPr>
+        <p:txBody>
+          <a:bodyPr wrap="square" lIns="0" tIns="0" rIns="0" bIns="0" rtlCol="0" anchor="t"/>
+          <a:lstStyle/>
+          <a:p>
+            <a:pPr indent="0" marL="0">
+              <a:buNone/>
+            </a:pPr>
+            <a:r>
+              <a:rPr lang="en-US" sz="1050" dirty="0">
+                <a:solidFill>
+                  <a:srgbClr val="1A2B3C"/>
+                </a:solidFill>
+                <a:latin typeface="Calibri" pitchFamily="34" charset="0"/>
+                <a:ea typeface="Calibri" pitchFamily="34" charset="-122"/>
+                <a:cs typeface="Calibri" pitchFamily="34" charset="-120"/>
+              </a:rPr>
+              <a:t>64.80 GHz inside V-band mask</a:t>
+            </a:r>
+            <a:endParaRPr lang="en-US" sz="1050" dirty="0"/>
+          </a:p>
+        </p:txBody>
+      </p:sp>
+      <p:sp>
+        <p:nvSpPr>
+          <p:cNvPr id="29" name="Shape 18"/>
+          <p:cNvSpPr/>
+          <p:nvPr/>
+        </p:nvSpPr>
+        <p:spPr>
+          <a:xfrm>
+            <a:off x="5875020" y="2446020"/>
+            <a:ext cx="251460" cy="0"/>
+          </a:xfrm>
+          <a:prstGeom prst="line">
+            <a:avLst/>
+          </a:prstGeom>
+          <a:noFill/>
+          <a:ln w="22225">
+            <a:solidFill>
+              <a:srgbClr val="0B1D33"/>
+            </a:solidFill>
+            <a:prstDash val="solid"/>
+            <a:headEnd type="none"/>
+            <a:tailEnd type="triangle"/>
+          </a:ln>
+        </p:spPr>
+      </p:sp>
+      <p:sp>
+        <p:nvSpPr>
+          <p:cNvPr id="30" name="Shape 19"/>
+          <p:cNvSpPr/>
+          <p:nvPr/>
+        </p:nvSpPr>
+        <p:spPr>
+          <a:xfrm>
+            <a:off x="6172200" y="1188720"/>
+            <a:ext cx="2514600" cy="2514600"/>
+          </a:xfrm>
+          <a:prstGeom prst="roundRect">
+            <a:avLst>
+              <a:gd name="adj" fmla="val 3636"/>
+            </a:avLst>
+          </a:prstGeom>
+          <a:solidFill>
+            <a:srgbClr val="F2F5F8"/>
+          </a:solidFill>
+          <a:ln w="12700">
+            <a:solidFill>
+              <a:srgbClr val="F2F5F8"/>
+            </a:solidFill>
+            <a:prstDash val="solid"/>
+          </a:ln>
+        </p:spPr>
+      </p:sp>
+      <p:sp>
+        <p:nvSpPr>
+          <p:cNvPr id="31" name="Shape 20"/>
+          <p:cNvSpPr/>
+          <p:nvPr/>
+        </p:nvSpPr>
+        <p:spPr>
+          <a:xfrm>
+            <a:off x="6355080" y="1371600"/>
+            <a:ext cx="457200" cy="457200"/>
+          </a:xfrm>
+          <a:prstGeom prst="ellipse">
+            <a:avLst/>
+          </a:prstGeom>
+          <a:solidFill>
+            <a:srgbClr val="22A06B"/>
+          </a:solidFill>
+          <a:ln w="12700">
+            <a:solidFill>
+              <a:srgbClr val="22A06B"/>
+            </a:solidFill>
+            <a:prstDash val="solid"/>
+          </a:ln>
+        </p:spPr>
+      </p:sp>
+      <p:pic>
+        <p:nvPicPr>
+          <p:cNvPr id="32" name="Image 9" descr="preencoded.png">    </p:cNvPr>
+          <p:cNvPicPr>
+            <a:picLocks noChangeAspect="1"/>
+          </p:cNvPicPr>
+          <p:nvPr/>
+        </p:nvPicPr>
+        <p:blipFill>
+          <a:blip r:embed="rId10"/>
+          <a:stretch>
+            <a:fillRect/>
+          </a:stretch>
+        </p:blipFill>
+        <p:spPr>
+          <a:xfrm>
+            <a:off x="6469380" y="1485900"/>
+            <a:ext cx="228600" cy="228600"/>
+          </a:xfrm>
+          <a:prstGeom prst="rect">
+            <a:avLst/>
+          </a:prstGeom>
+        </p:spPr>
+      </p:pic>
+      <p:sp>
+        <p:nvSpPr>
+          <p:cNvPr id="33" name="Text 21"/>
+          <p:cNvSpPr txBox="1"/>
+          <p:nvPr/>
+        </p:nvSpPr>
+        <p:spPr>
+          <a:xfrm>
+            <a:off x="6949440" y="1389888"/>
+            <a:ext cx="1645920" cy="182880"/>
+          </a:xfrm>
+          <a:prstGeom prst="rect">
+            <a:avLst/>
+          </a:prstGeom>
+          <a:noFill/>
+          <a:ln/>
+        </p:spPr>
+        <p:txBody>
+          <a:bodyPr wrap="square" lIns="0" tIns="0" rIns="0" bIns="0" rtlCol="0" anchor="t"/>
+          <a:lstStyle/>
+          <a:p>
+            <a:pPr indent="0" marL="0">
+              <a:buNone/>
+            </a:pPr>
+            <a:r>
+              <a:rPr lang="en-US" sz="900" b="1" spc="50" kern="0" dirty="0">
+                <a:solidFill>
+                  <a:srgbClr val="22A06B"/>
+                </a:solidFill>
+                <a:latin typeface="Calibri" pitchFamily="34" charset="0"/>
+                <a:ea typeface="Calibri" pitchFamily="34" charset="-122"/>
+                <a:cs typeface="Calibri" pitchFamily="34" charset="-120"/>
+              </a:rPr>
+              <a:t>STAGE 3 · RESTCONF</a:t>
+            </a:r>
+            <a:endParaRPr lang="en-US" sz="900" dirty="0"/>
+          </a:p>
+        </p:txBody>
+      </p:sp>
+      <p:sp>
+        <p:nvSpPr>
+          <p:cNvPr id="34" name="Text 22"/>
+          <p:cNvSpPr txBox="1"/>
+          <p:nvPr/>
+        </p:nvSpPr>
+        <p:spPr>
+          <a:xfrm>
+            <a:off x="6949440" y="1572768"/>
+            <a:ext cx="1645920" cy="274320"/>
+          </a:xfrm>
+          <a:prstGeom prst="rect">
+            <a:avLst/>
+          </a:prstGeom>
+          <a:noFill/>
+          <a:ln/>
+        </p:spPr>
+        <p:txBody>
+          <a:bodyPr wrap="square" lIns="0" tIns="0" rIns="0" bIns="0" rtlCol="0" anchor="t"/>
+          <a:lstStyle/>
+          <a:p>
+            <a:pPr indent="0" marL="0">
+              <a:buNone/>
+            </a:pPr>
+            <a:r>
+              <a:rPr lang="en-US" sz="1150" b="1" dirty="0">
+                <a:solidFill>
+                  <a:srgbClr val="0B1D33"/>
+                </a:solidFill>
+                <a:latin typeface="Arial" pitchFamily="34" charset="0"/>
+                <a:ea typeface="Arial" pitchFamily="34" charset="-122"/>
+                <a:cs typeface="Arial" pitchFamily="34" charset="-120"/>
+              </a:rPr>
+              <a:t>Two-phase commit</a:t>
+            </a:r>
+            <a:endParaRPr lang="en-US" sz="1150" dirty="0"/>
+          </a:p>
+        </p:txBody>
+      </p:sp>
+      <p:pic>
+        <p:nvPicPr>
+          <p:cNvPr id="35" name="Image 10" descr="preencoded.png">    </p:cNvPr>
+          <p:cNvPicPr>
+            <a:picLocks noChangeAspect="1"/>
+          </p:cNvPicPr>
+          <p:nvPr/>
+        </p:nvPicPr>
+        <p:blipFill>
+          <a:blip r:embed="rId11"/>
+          <a:stretch>
+            <a:fillRect/>
+          </a:stretch>
+        </p:blipFill>
+        <p:spPr>
+          <a:xfrm>
+            <a:off x="6373368" y="2112264"/>
+            <a:ext cx="164592" cy="164592"/>
+          </a:xfrm>
+          <a:prstGeom prst="rect">
+            <a:avLst/>
+          </a:prstGeom>
+        </p:spPr>
+      </p:pic>
+      <p:sp>
+        <p:nvSpPr>
+          <p:cNvPr id="36" name="Text 23"/>
+          <p:cNvSpPr txBox="1"/>
+          <p:nvPr/>
+        </p:nvSpPr>
+        <p:spPr>
+          <a:xfrm>
+            <a:off x="6629400" y="2057400"/>
+            <a:ext cx="1920240" cy="329184"/>
+          </a:xfrm>
+          <a:prstGeom prst="rect">
+            <a:avLst/>
+          </a:prstGeom>
+          <a:noFill/>
+          <a:ln/>
+        </p:spPr>
+        <p:txBody>
+          <a:bodyPr wrap="square" lIns="0" tIns="0" rIns="0" bIns="0" rtlCol="0" anchor="t"/>
+          <a:lstStyle/>
+          <a:p>
+            <a:pPr indent="0" marL="0">
+              <a:buNone/>
+            </a:pPr>
+            <a:r>
+              <a:rPr lang="en-US" sz="1050" dirty="0">
+                <a:solidFill>
+                  <a:srgbClr val="1A2B3C"/>
+                </a:solidFill>
+                <a:latin typeface="Calibri" pitchFamily="34" charset="0"/>
+                <a:ea typeface="Calibri" pitchFamily="34" charset="-122"/>
+                <a:cs typeface="Calibri" pitchFamily="34" charset="-120"/>
+              </a:rPr>
+              <a:t>Prepare: PATCH the candidate</a:t>
+            </a:r>
+            <a:endParaRPr lang="en-US" sz="1050" dirty="0"/>
+          </a:p>
+        </p:txBody>
+      </p:sp>
+      <p:pic>
+        <p:nvPicPr>
+          <p:cNvPr id="37" name="Image 11" descr="preencoded.png">    </p:cNvPr>
+          <p:cNvPicPr>
+            <a:picLocks noChangeAspect="1"/>
+          </p:cNvPicPr>
+          <p:nvPr/>
+        </p:nvPicPr>
+        <p:blipFill>
+          <a:blip r:embed="rId12"/>
+          <a:stretch>
+            <a:fillRect/>
+          </a:stretch>
+        </p:blipFill>
+        <p:spPr>
+          <a:xfrm>
+            <a:off x="6373368" y="2496312"/>
+            <a:ext cx="164592" cy="164592"/>
+          </a:xfrm>
+          <a:prstGeom prst="rect">
+            <a:avLst/>
+          </a:prstGeom>
+        </p:spPr>
+      </p:pic>
+      <p:sp>
+        <p:nvSpPr>
+          <p:cNvPr id="38" name="Text 24"/>
+          <p:cNvSpPr txBox="1"/>
+          <p:nvPr/>
+        </p:nvSpPr>
+        <p:spPr>
+          <a:xfrm>
+            <a:off x="6629400" y="2441448"/>
+            <a:ext cx="1920240" cy="329184"/>
+          </a:xfrm>
+          <a:prstGeom prst="rect">
+            <a:avLst/>
+          </a:prstGeom>
+          <a:noFill/>
+          <a:ln/>
+        </p:spPr>
+        <p:txBody>
+          <a:bodyPr wrap="square" lIns="0" tIns="0" rIns="0" bIns="0" rtlCol="0" anchor="t"/>
+          <a:lstStyle/>
+          <a:p>
+            <a:pPr indent="0" marL="0">
+              <a:buNone/>
+            </a:pPr>
+            <a:r>
+              <a:rPr lang="en-US" sz="1050" dirty="0">
+                <a:solidFill>
+                  <a:srgbClr val="1A2B3C"/>
+                </a:solidFill>
+                <a:latin typeface="Calibri" pitchFamily="34" charset="0"/>
+                <a:ea typeface="Calibri" pitchFamily="34" charset="-122"/>
+                <a:cs typeface="Calibri" pitchFamily="34" charset="-120"/>
+              </a:rPr>
+              <a:t>Commit: POST ietf-netconf:commit</a:t>
+            </a:r>
+            <a:endParaRPr lang="en-US" sz="1050" dirty="0"/>
+          </a:p>
+        </p:txBody>
+      </p:sp>
+      <p:pic>
+        <p:nvPicPr>
+          <p:cNvPr id="39" name="Image 12" descr="preencoded.png">    </p:cNvPr>
+          <p:cNvPicPr>
+            <a:picLocks noChangeAspect="1"/>
+          </p:cNvPicPr>
+          <p:nvPr/>
+        </p:nvPicPr>
+        <p:blipFill>
+          <a:blip r:embed="rId13"/>
+          <a:stretch>
+            <a:fillRect/>
+          </a:stretch>
+        </p:blipFill>
+        <p:spPr>
+          <a:xfrm>
+            <a:off x="6373368" y="2880360"/>
+            <a:ext cx="164592" cy="164592"/>
+          </a:xfrm>
+          <a:prstGeom prst="rect">
+            <a:avLst/>
+          </a:prstGeom>
+        </p:spPr>
+      </p:pic>
+      <p:sp>
+        <p:nvSpPr>
+          <p:cNvPr id="40" name="Text 25"/>
+          <p:cNvSpPr txBox="1"/>
+          <p:nvPr/>
+        </p:nvSpPr>
+        <p:spPr>
+          <a:xfrm>
+            <a:off x="6629400" y="2825496"/>
+            <a:ext cx="1920240" cy="329184"/>
+          </a:xfrm>
+          <a:prstGeom prst="rect">
+            <a:avLst/>
+          </a:prstGeom>
+          <a:noFill/>
+          <a:ln/>
+        </p:spPr>
+        <p:txBody>
+          <a:bodyPr wrap="square" lIns="0" tIns="0" rIns="0" bIns="0" rtlCol="0" anchor="t"/>
+          <a:lstStyle/>
+          <a:p>
+            <a:pPr indent="0" marL="0">
+              <a:buNone/>
+            </a:pPr>
+            <a:r>
+              <a:rPr lang="en-US" sz="1050" dirty="0">
+                <a:solidFill>
+                  <a:srgbClr val="1A2B3C"/>
+                </a:solidFill>
+                <a:latin typeface="Calibri" pitchFamily="34" charset="0"/>
+                <a:ea typeface="Calibri" pitchFamily="34" charset="-122"/>
+                <a:cs typeface="Calibri" pitchFamily="34" charset="-120"/>
+              </a:rPr>
+              <a:t>Verify: poll telemetry</a:t>
+            </a:r>
+            <a:endParaRPr lang="en-US" sz="1050" dirty="0"/>
+          </a:p>
+        </p:txBody>
+      </p:sp>
+      <p:sp>
+        <p:nvSpPr>
+          <p:cNvPr id="41" name="Shape 26"/>
+          <p:cNvSpPr/>
+          <p:nvPr/>
+        </p:nvSpPr>
+        <p:spPr>
+          <a:xfrm>
+            <a:off x="7429500" y="3703320"/>
+            <a:ext cx="0" cy="274320"/>
+          </a:xfrm>
+          <a:prstGeom prst="line">
+            <a:avLst/>
+          </a:prstGeom>
+          <a:noFill/>
+          <a:ln w="19050">
+            <a:solidFill>
+              <a:srgbClr val="D64545"/>
+            </a:solidFill>
+            <a:prstDash val="dash"/>
+          </a:ln>
+        </p:spPr>
+      </p:sp>
+      <p:sp>
+        <p:nvSpPr>
+          <p:cNvPr id="42" name="Shape 27"/>
+          <p:cNvSpPr/>
+          <p:nvPr/>
+        </p:nvSpPr>
+        <p:spPr>
+          <a:xfrm>
+            <a:off x="1714500" y="3977640"/>
+            <a:ext cx="5715000" cy="0"/>
+          </a:xfrm>
+          <a:prstGeom prst="line">
+            <a:avLst/>
+          </a:prstGeom>
+          <a:noFill/>
+          <a:ln w="19050">
+            <a:solidFill>
+              <a:srgbClr val="D64545"/>
+            </a:solidFill>
+            <a:prstDash val="dash"/>
+          </a:ln>
+        </p:spPr>
+      </p:sp>
+      <p:sp>
+        <p:nvSpPr>
+          <p:cNvPr id="43" name="Shape 28"/>
+          <p:cNvSpPr/>
+          <p:nvPr/>
+        </p:nvSpPr>
+        <p:spPr>
+          <a:xfrm flipV="1">
+            <a:off x="1714500" y="3703320"/>
+            <a:ext cx="0" cy="274320"/>
+          </a:xfrm>
+          <a:prstGeom prst="line">
+            <a:avLst/>
+          </a:prstGeom>
+          <a:noFill/>
+          <a:ln w="22225">
+            <a:solidFill>
+              <a:srgbClr val="D64545"/>
+            </a:solidFill>
+            <a:prstDash val="solid"/>
+            <a:headEnd type="none"/>
+            <a:tailEnd type="triangle"/>
+          </a:ln>
+        </p:spPr>
+      </p:sp>
+      <p:sp>
+        <p:nvSpPr>
+          <p:cNvPr id="44" name="Shape 29"/>
+          <p:cNvSpPr/>
+          <p:nvPr/>
+        </p:nvSpPr>
+        <p:spPr>
+          <a:xfrm>
+            <a:off x="2926080" y="3840480"/>
+            <a:ext cx="3291840" cy="274320"/>
+          </a:xfrm>
+          <a:prstGeom prst="rect">
+            <a:avLst/>
+          </a:prstGeom>
+          <a:solidFill>
+            <a:srgbClr val="FFFFFF"/>
+          </a:solidFill>
+          <a:ln w="12700">
+            <a:solidFill>
+              <a:srgbClr val="FFFFFF"/>
+            </a:solidFill>
+            <a:prstDash val="solid"/>
+          </a:ln>
+        </p:spPr>
+      </p:sp>
+      <p:sp>
+        <p:nvSpPr>
+          <p:cNvPr id="45" name="Text 30"/>
+          <p:cNvSpPr txBox="1"/>
+          <p:nvPr/>
+        </p:nvSpPr>
+        <p:spPr>
+          <a:xfrm>
+            <a:off x="2926080" y="3840480"/>
+            <a:ext cx="3291840" cy="274320"/>
+          </a:xfrm>
+          <a:prstGeom prst="rect">
+            <a:avLst/>
+          </a:prstGeom>
+          <a:noFill/>
+          <a:ln/>
+        </p:spPr>
+        <p:txBody>
+          <a:bodyPr wrap="square" lIns="0" tIns="0" rIns="0" bIns="0" rtlCol="0" anchor="ctr"/>
+          <a:lstStyle/>
+          <a:p>
+            <a:pPr algn="ctr" indent="0" marL="0">
+              <a:buNone/>
+            </a:pPr>
+            <a:r>
+              <a:rPr lang="en-US" sz="1000" b="1" dirty="0">
+                <a:solidFill>
+                  <a:srgbClr val="D64545"/>
+                </a:solidFill>
+                <a:latin typeface="Calibri" pitchFamily="34" charset="0"/>
+                <a:ea typeface="Calibri" pitchFamily="34" charset="-122"/>
+                <a:cs typeface="Calibri" pitchFamily="34" charset="-120"/>
+              </a:rPr>
+              <a:t>Health check fails → automatic rollback</a:t>
+            </a:r>
+            <a:endParaRPr lang="en-US" sz="1000" dirty="0"/>
+          </a:p>
+        </p:txBody>
+      </p:sp>
+      <p:sp>
+        <p:nvSpPr>
+          <p:cNvPr id="46" name="Shape 31"/>
+          <p:cNvSpPr/>
+          <p:nvPr/>
+        </p:nvSpPr>
+        <p:spPr>
+          <a:xfrm>
+            <a:off x="457200" y="4251960"/>
+            <a:ext cx="8229600" cy="548640"/>
+          </a:xfrm>
+          <a:prstGeom prst="roundRect">
+            <a:avLst>
+              <a:gd name="adj" fmla="val 13333"/>
+            </a:avLst>
+          </a:prstGeom>
+          <a:solidFill>
+            <a:srgbClr val="DDF3E8"/>
+          </a:solidFill>
+          <a:ln w="12700">
+            <a:solidFill>
+              <a:srgbClr val="DDF3E8"/>
+            </a:solidFill>
+            <a:prstDash val="solid"/>
+          </a:ln>
+        </p:spPr>
+      </p:sp>
+      <p:pic>
+        <p:nvPicPr>
+          <p:cNvPr id="47" name="Image 13" descr="preencoded.png">    </p:cNvPr>
+          <p:cNvPicPr>
+            <a:picLocks noChangeAspect="1"/>
+          </p:cNvPicPr>
+          <p:nvPr/>
+        </p:nvPicPr>
+        <p:blipFill>
+          <a:blip r:embed="rId14"/>
+          <a:stretch>
+            <a:fillRect/>
+          </a:stretch>
+        </p:blipFill>
+        <p:spPr>
+          <a:xfrm>
+            <a:off x="658368" y="4389120"/>
+            <a:ext cx="274320" cy="274320"/>
+          </a:xfrm>
+          <a:prstGeom prst="rect">
+            <a:avLst/>
+          </a:prstGeom>
+        </p:spPr>
+      </p:pic>
+      <p:sp>
+        <p:nvSpPr>
+          <p:cNvPr id="48" name="Text 32"/>
+          <p:cNvSpPr txBox="1"/>
+          <p:nvPr/>
+        </p:nvSpPr>
+        <p:spPr>
+          <a:xfrm>
+            <a:off x="1097280" y="4251960"/>
+            <a:ext cx="7406640" cy="548640"/>
+          </a:xfrm>
+          <a:prstGeom prst="rect">
+            <a:avLst/>
+          </a:prstGeom>
+          <a:noFill/>
+          <a:ln/>
+        </p:spPr>
+        <p:txBody>
+          <a:bodyPr wrap="square" lIns="0" tIns="0" rIns="0" bIns="0" rtlCol="0" anchor="ctr"/>
+          <a:lstStyle/>
+          <a:p>
+            <a:pPr indent="0" marL="0">
+              <a:buNone/>
+            </a:pPr>
+            <a:r>
+              <a:rPr lang="en-US" sz="1150" b="1" dirty="0">
+                <a:solidFill>
+                  <a:srgbClr val="157A50"/>
+                </a:solidFill>
+                <a:latin typeface="Calibri" pitchFamily="34" charset="0"/>
+                <a:ea typeface="Calibri" pitchFamily="34" charset="-122"/>
+                <a:cs typeface="Calibri" pitchFamily="34" charset="-120"/>
+              </a:rPr>
+              <a:t>Zero-outage by design: </a:t>
+            </a:r>
+            <a:pPr indent="0" marL="0">
+              <a:buNone/>
+            </a:pPr>
+            <a:r>
+              <a:rPr lang="en-US" sz="1150" dirty="0">
+                <a:solidFill>
+                  <a:srgbClr val="1A2B3C"/>
+                </a:solidFill>
+                <a:latin typeface="Calibri" pitchFamily="34" charset="0"/>
+                <a:ea typeface="Calibri" pitchFamily="34" charset="-122"/>
+                <a:cs typeface="Calibri" pitchFamily="34" charset="-120"/>
+              </a:rPr>
+              <a:t>bad configurations are rejected in software before they can touch customer traffic.</a:t>
+            </a:r>
+            <a:endParaRPr lang="en-US" sz="1150" dirty="0"/>
+          </a:p>
+        </p:txBody>
+      </p:sp>
+    </p:spTree>
+  </p:cSld>
+  <p:clrMapOvr>
+    <a:masterClrMapping/>
+  </p:clrMapOvr>
+</p:sld>
+</file>
+
+<file path=ppt/slides/slide11.xml><?xml version="1.0" encoding="utf-8"?>
+<p:sld xmlns:a="http://schemas.openxmlformats.org/drawingml/2006/main" xmlns:r="http://schemas.openxmlformats.org/officeDocument/2006/relationships" xmlns:p="http://schemas.openxmlformats.org/presentationml/2006/main">
+  <p:cSld name="Slide 11">
+    <p:bg>
+      <p:bgPr>
+        <a:solidFill>
+          <a:srgbClr val="FFFFFF"/>
+        </a:solidFill>
+      </p:bgPr>
+    </p:bg>
+    <p:spTree>
+      <p:nvGrpSpPr>
+        <p:cNvPr id="1" name=""/>
+        <p:cNvGrpSpPr/>
+        <p:nvPr/>
+      </p:nvGrpSpPr>
+      <p:grpSpPr>
+        <a:xfrm>
+          <a:off x="0" y="0"/>
+          <a:ext cx="0" cy="0"/>
+          <a:chOff x="0" y="0"/>
+          <a:chExt cx="0" cy="0"/>
+        </a:xfrm>
+      </p:grpSpPr>
+      <p:sp>
+        <p:nvSpPr>
+          <p:cNvPr id="2" name="Text 0"/>
+          <p:cNvSpPr txBox="1"/>
+          <p:nvPr/>
+        </p:nvSpPr>
+        <p:spPr>
+          <a:xfrm>
+            <a:off x="457200" y="274320"/>
+            <a:ext cx="8229600" cy="228600"/>
+          </a:xfrm>
+          <a:prstGeom prst="rect">
+            <a:avLst/>
+          </a:prstGeom>
+          <a:noFill/>
+          <a:ln/>
+        </p:spPr>
+        <p:txBody>
+          <a:bodyPr wrap="square" lIns="0" tIns="0" rIns="0" bIns="0" rtlCol="0" anchor="ctr"/>
+          <a:lstStyle/>
+          <a:p>
+            <a:pPr indent="0" marL="0">
+              <a:buNone/>
+            </a:pPr>
+            <a:r>
+              <a:rPr lang="en-US" sz="1000" b="1" spc="200" kern="0" dirty="0">
+                <a:solidFill>
+                  <a:srgbClr val="0FA3B1"/>
+                </a:solidFill>
+                <a:latin typeface="Arial" pitchFamily="34" charset="0"/>
+                <a:ea typeface="Arial" pitchFamily="34" charset="-122"/>
+                <a:cs typeface="Arial" pitchFamily="34" charset="-120"/>
+              </a:rPr>
+              <a:t>END-TO-END</a:t>
+            </a:r>
+            <a:endParaRPr lang="en-US" sz="1000" dirty="0"/>
+          </a:p>
+        </p:txBody>
+      </p:sp>
+      <p:sp>
+        <p:nvSpPr>
+          <p:cNvPr id="3" name="Text 1"/>
+          <p:cNvSpPr txBox="1"/>
+          <p:nvPr/>
+        </p:nvSpPr>
+        <p:spPr>
+          <a:xfrm>
+            <a:off x="457200" y="502920"/>
+            <a:ext cx="8229600" cy="548640"/>
+          </a:xfrm>
+          <a:prstGeom prst="rect">
+            <a:avLst/>
+          </a:prstGeom>
+          <a:noFill/>
+          <a:ln/>
+        </p:spPr>
+        <p:txBody>
+          <a:bodyPr wrap="square" lIns="0" tIns="0" rIns="0" bIns="0" rtlCol="0" anchor="ctr"/>
+          <a:lstStyle/>
+          <a:p>
+            <a:pPr indent="0" marL="0">
+              <a:buNone/>
+            </a:pPr>
+            <a:r>
+              <a:rPr lang="en-US" sz="2400" b="1" dirty="0">
+                <a:solidFill>
+                  <a:srgbClr val="0B1D33"/>
+                </a:solidFill>
+                <a:latin typeface="Arial" pitchFamily="34" charset="0"/>
+                <a:ea typeface="Arial" pitchFamily="34" charset="-122"/>
+                <a:cs typeface="Arial" pitchFamily="34" charset="-120"/>
+              </a:rPr>
+              <a:t>One closed loop, seconds instead of hours</a:t>
+            </a:r>
+            <a:endParaRPr lang="en-US" sz="2400" dirty="0"/>
+          </a:p>
+        </p:txBody>
+      </p:sp>
+      <p:sp>
+        <p:nvSpPr>
+          <p:cNvPr id="4" name="Shape 2"/>
+          <p:cNvSpPr/>
+          <p:nvPr/>
+        </p:nvSpPr>
+        <p:spPr>
+          <a:xfrm>
+            <a:off x="1554480" y="1737360"/>
+            <a:ext cx="2560320" cy="2560320"/>
+          </a:xfrm>
+          <a:prstGeom prst="ellipse">
+            <a:avLst/>
+          </a:prstGeom>
+          <a:solidFill>
+            <a:srgbClr val="FFFFFF"/>
+          </a:solidFill>
+          <a:ln w="31750">
+            <a:solidFill>
+              <a:srgbClr val="D5DDE5"/>
+            </a:solidFill>
+            <a:prstDash val="solid"/>
+          </a:ln>
+        </p:spPr>
+      </p:sp>
+      <p:sp>
+        <p:nvSpPr>
+          <p:cNvPr id="5" name="Text 3"/>
+          <p:cNvSpPr txBox="1"/>
+          <p:nvPr/>
+        </p:nvSpPr>
+        <p:spPr>
+          <a:xfrm>
+            <a:off x="1920240" y="2651760"/>
+            <a:ext cx="1828800" cy="457200"/>
+          </a:xfrm>
+          <a:prstGeom prst="rect">
+            <a:avLst/>
+          </a:prstGeom>
+          <a:noFill/>
+          <a:ln/>
+        </p:spPr>
+        <p:txBody>
+          <a:bodyPr wrap="square" lIns="0" tIns="0" rIns="0" bIns="0" rtlCol="0" anchor="ctr"/>
+          <a:lstStyle/>
+          <a:p>
+            <a:pPr algn="ctr" indent="0" marL="0">
+              <a:buNone/>
+            </a:pPr>
+            <a:r>
+              <a:rPr lang="en-US" sz="2600" b="1" dirty="0">
+                <a:solidFill>
+                  <a:srgbClr val="0B1D33"/>
+                </a:solidFill>
+                <a:latin typeface="Arial" pitchFamily="34" charset="0"/>
+                <a:ea typeface="Arial" pitchFamily="34" charset="-122"/>
+                <a:cs typeface="Arial" pitchFamily="34" charset="-120"/>
+              </a:rPr>
+              <a:t>≈ 2 s</a:t>
+            </a:r>
+            <a:endParaRPr lang="en-US" sz="2600" dirty="0"/>
+          </a:p>
+        </p:txBody>
+      </p:sp>
+      <p:sp>
+        <p:nvSpPr>
+          <p:cNvPr id="6" name="Text 4"/>
+          <p:cNvSpPr txBox="1"/>
+          <p:nvPr/>
+        </p:nvSpPr>
+        <p:spPr>
+          <a:xfrm>
+            <a:off x="1920240" y="3108960"/>
+            <a:ext cx="1828800" cy="274320"/>
+          </a:xfrm>
+          <a:prstGeom prst="rect">
+            <a:avLst/>
+          </a:prstGeom>
+          <a:noFill/>
+          <a:ln/>
+        </p:spPr>
+        <p:txBody>
+          <a:bodyPr wrap="square" lIns="0" tIns="0" rIns="0" bIns="0" rtlCol="0" anchor="t"/>
+          <a:lstStyle/>
+          <a:p>
+            <a:pPr algn="ctr" indent="0" marL="0">
+              <a:buNone/>
+            </a:pPr>
+            <a:r>
+              <a:rPr lang="en-US" sz="1100" dirty="0">
+                <a:solidFill>
+                  <a:srgbClr val="5A6B7D"/>
+                </a:solidFill>
+                <a:latin typeface="Calibri" pitchFamily="34" charset="0"/>
+                <a:ea typeface="Calibri" pitchFamily="34" charset="-122"/>
+                <a:cs typeface="Calibri" pitchFamily="34" charset="-120"/>
+              </a:rPr>
+              <a:t>per loop</a:t>
+            </a:r>
+            <a:endParaRPr lang="en-US" sz="1100" dirty="0"/>
+          </a:p>
+        </p:txBody>
+      </p:sp>
+      <p:sp>
+        <p:nvSpPr>
+          <p:cNvPr id="7" name="Shape 5"/>
+          <p:cNvSpPr/>
+          <p:nvPr/>
+        </p:nvSpPr>
+        <p:spPr>
+          <a:xfrm>
+            <a:off x="2551176" y="1453896"/>
+            <a:ext cx="566928" cy="566928"/>
+          </a:xfrm>
+          <a:prstGeom prst="ellipse">
+            <a:avLst/>
+          </a:prstGeom>
+          <a:solidFill>
+            <a:srgbClr val="7C5CFF"/>
+          </a:solidFill>
+          <a:ln w="12700">
+            <a:solidFill>
+              <a:srgbClr val="7C5CFF"/>
+            </a:solidFill>
+            <a:prstDash val="solid"/>
+          </a:ln>
+        </p:spPr>
+      </p:sp>
+      <p:pic>
+        <p:nvPicPr>
+          <p:cNvPr id="8" name="Image 0" descr="preencoded.png">    </p:cNvPr>
+          <p:cNvPicPr>
+            <a:picLocks noChangeAspect="1"/>
+          </p:cNvPicPr>
+          <p:nvPr/>
+        </p:nvPicPr>
+        <p:blipFill>
+          <a:blip r:embed="rId1"/>
+          <a:stretch>
+            <a:fillRect/>
+          </a:stretch>
+        </p:blipFill>
+        <p:spPr>
+          <a:xfrm>
+            <a:off x="2692908" y="1595628"/>
+            <a:ext cx="283464" cy="283464"/>
+          </a:xfrm>
+          <a:prstGeom prst="rect">
+            <a:avLst/>
+          </a:prstGeom>
+        </p:spPr>
+      </p:pic>
+      <p:sp>
+        <p:nvSpPr>
+          <p:cNvPr id="9" name="Text 6"/>
+          <p:cNvSpPr txBox="1"/>
+          <p:nvPr/>
+        </p:nvSpPr>
+        <p:spPr>
+          <a:xfrm>
+            <a:off x="3209544" y="1490472"/>
+            <a:ext cx="1143000" cy="246888"/>
+          </a:xfrm>
+          <a:prstGeom prst="rect">
+            <a:avLst/>
+          </a:prstGeom>
+          <a:noFill/>
+          <a:ln/>
+        </p:spPr>
+        <p:txBody>
+          <a:bodyPr wrap="square" lIns="0" tIns="0" rIns="0" bIns="0" rtlCol="0" anchor="t"/>
+          <a:lstStyle/>
+          <a:p>
+            <a:pPr algn="l" indent="0" marL="0">
+              <a:buNone/>
+            </a:pPr>
+            <a:r>
+              <a:rPr lang="en-US" sz="1100" b="1" dirty="0">
+                <a:solidFill>
+                  <a:srgbClr val="1A2B3C"/>
+                </a:solidFill>
+                <a:latin typeface="Arial" pitchFamily="34" charset="0"/>
+                <a:ea typeface="Arial" pitchFamily="34" charset="-122"/>
+                <a:cs typeface="Arial" pitchFamily="34" charset="-120"/>
+              </a:rPr>
+              <a:t>1 Intent</a:t>
+            </a:r>
+            <a:endParaRPr lang="en-US" sz="1100" dirty="0"/>
+          </a:p>
+        </p:txBody>
+      </p:sp>
+      <p:sp>
+        <p:nvSpPr>
+          <p:cNvPr id="10" name="Text 7"/>
+          <p:cNvSpPr txBox="1"/>
+          <p:nvPr/>
+        </p:nvSpPr>
+        <p:spPr>
+          <a:xfrm>
+            <a:off x="3209544" y="1728216"/>
+            <a:ext cx="1143000" cy="228600"/>
+          </a:xfrm>
+          <a:prstGeom prst="rect">
+            <a:avLst/>
+          </a:prstGeom>
+          <a:noFill/>
+          <a:ln/>
+        </p:spPr>
+        <p:txBody>
+          <a:bodyPr wrap="square" lIns="0" tIns="0" rIns="0" bIns="0" rtlCol="0" anchor="t"/>
+          <a:lstStyle/>
+          <a:p>
+            <a:pPr algn="l" indent="0" marL="0">
+              <a:buNone/>
+            </a:pPr>
+            <a:r>
+              <a:rPr lang="en-US" sz="950" dirty="0">
+                <a:solidFill>
+                  <a:srgbClr val="5A6B7D"/>
+                </a:solidFill>
+                <a:latin typeface="Calibri" pitchFamily="34" charset="0"/>
+                <a:ea typeface="Calibri" pitchFamily="34" charset="-122"/>
+                <a:cs typeface="Calibri" pitchFamily="34" charset="-120"/>
+              </a:rPr>
+              <a:t>TMF921</a:t>
+            </a:r>
+            <a:endParaRPr lang="en-US" sz="950" dirty="0"/>
+          </a:p>
+        </p:txBody>
+      </p:sp>
+      <p:sp>
+        <p:nvSpPr>
+          <p:cNvPr id="11" name="Shape 8"/>
+          <p:cNvSpPr/>
+          <p:nvPr/>
+        </p:nvSpPr>
+        <p:spPr>
+          <a:xfrm>
+            <a:off x="3768681" y="2338465"/>
+            <a:ext cx="566928" cy="566928"/>
+          </a:xfrm>
+          <a:prstGeom prst="ellipse">
+            <a:avLst/>
+          </a:prstGeom>
+          <a:solidFill>
+            <a:srgbClr val="E8912D"/>
+          </a:solidFill>
+          <a:ln w="12700">
+            <a:solidFill>
+              <a:srgbClr val="E8912D"/>
+            </a:solidFill>
+            <a:prstDash val="solid"/>
+          </a:ln>
+        </p:spPr>
+      </p:sp>
+      <p:pic>
+        <p:nvPicPr>
+          <p:cNvPr id="12" name="Image 1" descr="preencoded.png">    </p:cNvPr>
+          <p:cNvPicPr>
+            <a:picLocks noChangeAspect="1"/>
+          </p:cNvPicPr>
+          <p:nvPr/>
+        </p:nvPicPr>
+        <p:blipFill>
+          <a:blip r:embed="rId2"/>
+          <a:stretch>
+            <a:fillRect/>
+          </a:stretch>
+        </p:blipFill>
+        <p:spPr>
+          <a:xfrm>
+            <a:off x="3910413" y="2480197"/>
+            <a:ext cx="283464" cy="283464"/>
+          </a:xfrm>
+          <a:prstGeom prst="rect">
+            <a:avLst/>
+          </a:prstGeom>
+        </p:spPr>
+      </p:pic>
+      <p:sp>
+        <p:nvSpPr>
+          <p:cNvPr id="13" name="Text 9"/>
+          <p:cNvSpPr txBox="1"/>
+          <p:nvPr/>
+        </p:nvSpPr>
+        <p:spPr>
+          <a:xfrm>
+            <a:off x="4427049" y="2375041"/>
+            <a:ext cx="1143000" cy="246888"/>
+          </a:xfrm>
+          <a:prstGeom prst="rect">
+            <a:avLst/>
+          </a:prstGeom>
+          <a:noFill/>
+          <a:ln/>
+        </p:spPr>
+        <p:txBody>
+          <a:bodyPr wrap="square" lIns="0" tIns="0" rIns="0" bIns="0" rtlCol="0" anchor="t"/>
+          <a:lstStyle/>
+          <a:p>
+            <a:pPr algn="l" indent="0" marL="0">
+              <a:buNone/>
+            </a:pPr>
+            <a:r>
+              <a:rPr lang="en-US" sz="1100" b="1" dirty="0">
+                <a:solidFill>
+                  <a:srgbClr val="1A2B3C"/>
+                </a:solidFill>
+                <a:latin typeface="Arial" pitchFamily="34" charset="0"/>
+                <a:ea typeface="Arial" pitchFamily="34" charset="-122"/>
+                <a:cs typeface="Arial" pitchFamily="34" charset="-120"/>
+              </a:rPr>
+              <a:t>2 Simulate</a:t>
+            </a:r>
+            <a:endParaRPr lang="en-US" sz="1100" dirty="0"/>
+          </a:p>
+        </p:txBody>
+      </p:sp>
+      <p:sp>
+        <p:nvSpPr>
+          <p:cNvPr id="14" name="Text 10"/>
+          <p:cNvSpPr txBox="1"/>
+          <p:nvPr/>
+        </p:nvSpPr>
+        <p:spPr>
+          <a:xfrm>
+            <a:off x="4427049" y="2612785"/>
+            <a:ext cx="1143000" cy="228600"/>
+          </a:xfrm>
+          <a:prstGeom prst="rect">
+            <a:avLst/>
+          </a:prstGeom>
+          <a:noFill/>
+          <a:ln/>
+        </p:spPr>
+        <p:txBody>
+          <a:bodyPr wrap="square" lIns="0" tIns="0" rIns="0" bIns="0" rtlCol="0" anchor="t"/>
+          <a:lstStyle/>
+          <a:p>
+            <a:pPr algn="l" indent="0" marL="0">
+              <a:buNone/>
+            </a:pPr>
+            <a:r>
+              <a:rPr lang="en-US" sz="950" dirty="0">
+                <a:solidFill>
+                  <a:srgbClr val="5A6B7D"/>
+                </a:solidFill>
+                <a:latin typeface="Calibri" pitchFamily="34" charset="0"/>
+                <a:ea typeface="Calibri" pitchFamily="34" charset="-122"/>
+                <a:cs typeface="Calibri" pitchFamily="34" charset="-120"/>
+              </a:rPr>
+              <a:t>ns-3 what-if</a:t>
+            </a:r>
+            <a:endParaRPr lang="en-US" sz="950" dirty="0"/>
+          </a:p>
+        </p:txBody>
+      </p:sp>
+      <p:sp>
+        <p:nvSpPr>
+          <p:cNvPr id="15" name="Shape 11"/>
+          <p:cNvSpPr/>
+          <p:nvPr/>
+        </p:nvSpPr>
+        <p:spPr>
+          <a:xfrm>
+            <a:off x="3303635" y="3769727"/>
+            <a:ext cx="566928" cy="566928"/>
+          </a:xfrm>
+          <a:prstGeom prst="ellipse">
+            <a:avLst/>
+          </a:prstGeom>
+          <a:solidFill>
+            <a:srgbClr val="0FA3B1"/>
+          </a:solidFill>
+          <a:ln w="12700">
+            <a:solidFill>
+              <a:srgbClr val="0FA3B1"/>
+            </a:solidFill>
+            <a:prstDash val="solid"/>
+          </a:ln>
+        </p:spPr>
+      </p:sp>
+      <p:pic>
+        <p:nvPicPr>
+          <p:cNvPr id="16" name="Image 2" descr="preencoded.png">    </p:cNvPr>
+          <p:cNvPicPr>
+            <a:picLocks noChangeAspect="1"/>
+          </p:cNvPicPr>
+          <p:nvPr/>
+        </p:nvPicPr>
+        <p:blipFill>
+          <a:blip r:embed="rId3"/>
+          <a:stretch>
+            <a:fillRect/>
+          </a:stretch>
+        </p:blipFill>
+        <p:spPr>
+          <a:xfrm>
+            <a:off x="3445367" y="3911459"/>
+            <a:ext cx="283464" cy="283464"/>
+          </a:xfrm>
+          <a:prstGeom prst="rect">
+            <a:avLst/>
+          </a:prstGeom>
+        </p:spPr>
+      </p:pic>
+      <p:sp>
+        <p:nvSpPr>
+          <p:cNvPr id="17" name="Text 12"/>
+          <p:cNvSpPr txBox="1"/>
+          <p:nvPr/>
+        </p:nvSpPr>
+        <p:spPr>
+          <a:xfrm>
+            <a:off x="3962003" y="3806303"/>
+            <a:ext cx="1143000" cy="246888"/>
+          </a:xfrm>
+          <a:prstGeom prst="rect">
+            <a:avLst/>
+          </a:prstGeom>
+          <a:noFill/>
+          <a:ln/>
+        </p:spPr>
+        <p:txBody>
+          <a:bodyPr wrap="square" lIns="0" tIns="0" rIns="0" bIns="0" rtlCol="0" anchor="t"/>
+          <a:lstStyle/>
+          <a:p>
+            <a:pPr algn="l" indent="0" marL="0">
+              <a:buNone/>
+            </a:pPr>
+            <a:r>
+              <a:rPr lang="en-US" sz="1100" b="1" dirty="0">
+                <a:solidFill>
+                  <a:srgbClr val="1A2B3C"/>
+                </a:solidFill>
+                <a:latin typeface="Arial" pitchFamily="34" charset="0"/>
+                <a:ea typeface="Arial" pitchFamily="34" charset="-122"/>
+                <a:cs typeface="Arial" pitchFamily="34" charset="-120"/>
+              </a:rPr>
+              <a:t>3 Verify</a:t>
+            </a:r>
+            <a:endParaRPr lang="en-US" sz="1100" dirty="0"/>
+          </a:p>
+        </p:txBody>
+      </p:sp>
+      <p:sp>
+        <p:nvSpPr>
+          <p:cNvPr id="18" name="Text 13"/>
+          <p:cNvSpPr txBox="1"/>
+          <p:nvPr/>
+        </p:nvSpPr>
+        <p:spPr>
+          <a:xfrm>
+            <a:off x="3962003" y="4044047"/>
+            <a:ext cx="1143000" cy="228600"/>
+          </a:xfrm>
+          <a:prstGeom prst="rect">
+            <a:avLst/>
+          </a:prstGeom>
+          <a:noFill/>
+          <a:ln/>
+        </p:spPr>
+        <p:txBody>
+          <a:bodyPr wrap="square" lIns="0" tIns="0" rIns="0" bIns="0" rtlCol="0" anchor="t"/>
+          <a:lstStyle/>
+          <a:p>
+            <a:pPr algn="l" indent="0" marL="0">
+              <a:buNone/>
+            </a:pPr>
+            <a:r>
+              <a:rPr lang="en-US" sz="950" dirty="0">
+                <a:solidFill>
+                  <a:srgbClr val="5A6B7D"/>
+                </a:solidFill>
+                <a:latin typeface="Calibri" pitchFamily="34" charset="0"/>
+                <a:ea typeface="Calibri" pitchFamily="34" charset="-122"/>
+                <a:cs typeface="Calibri" pitchFamily="34" charset="-120"/>
+              </a:rPr>
+              <a:t>TS 28.561 gates</a:t>
+            </a:r>
+            <a:endParaRPr lang="en-US" sz="950" dirty="0"/>
+          </a:p>
+        </p:txBody>
+      </p:sp>
+      <p:sp>
+        <p:nvSpPr>
+          <p:cNvPr id="19" name="Shape 14"/>
+          <p:cNvSpPr/>
+          <p:nvPr/>
+        </p:nvSpPr>
+        <p:spPr>
+          <a:xfrm>
+            <a:off x="1798717" y="3769727"/>
+            <a:ext cx="566928" cy="566928"/>
+          </a:xfrm>
+          <a:prstGeom prst="ellipse">
+            <a:avLst/>
+          </a:prstGeom>
+          <a:solidFill>
+            <a:srgbClr val="22A06B"/>
+          </a:solidFill>
+          <a:ln w="12700">
+            <a:solidFill>
+              <a:srgbClr val="22A06B"/>
+            </a:solidFill>
+            <a:prstDash val="solid"/>
+          </a:ln>
+        </p:spPr>
+      </p:sp>
+      <p:pic>
+        <p:nvPicPr>
+          <p:cNvPr id="20" name="Image 3" descr="preencoded.png">    </p:cNvPr>
+          <p:cNvPicPr>
+            <a:picLocks noChangeAspect="1"/>
+          </p:cNvPicPr>
+          <p:nvPr/>
+        </p:nvPicPr>
+        <p:blipFill>
+          <a:blip r:embed="rId4"/>
+          <a:stretch>
+            <a:fillRect/>
+          </a:stretch>
+        </p:blipFill>
+        <p:spPr>
+          <a:xfrm>
+            <a:off x="1940449" y="3911459"/>
+            <a:ext cx="283464" cy="283464"/>
+          </a:xfrm>
+          <a:prstGeom prst="rect">
+            <a:avLst/>
+          </a:prstGeom>
+        </p:spPr>
+      </p:pic>
+      <p:sp>
+        <p:nvSpPr>
+          <p:cNvPr id="21" name="Text 15"/>
+          <p:cNvSpPr txBox="1"/>
+          <p:nvPr/>
+        </p:nvSpPr>
+        <p:spPr>
+          <a:xfrm>
+            <a:off x="756301" y="3806303"/>
+            <a:ext cx="950976" cy="246888"/>
+          </a:xfrm>
+          <a:prstGeom prst="rect">
+            <a:avLst/>
+          </a:prstGeom>
+          <a:noFill/>
+          <a:ln/>
+        </p:spPr>
+        <p:txBody>
+          <a:bodyPr wrap="square" lIns="0" tIns="0" rIns="0" bIns="0" rtlCol="0" anchor="t"/>
+          <a:lstStyle/>
+          <a:p>
+            <a:pPr algn="r" indent="0" marL="0">
+              <a:buNone/>
+            </a:pPr>
+            <a:r>
+              <a:rPr lang="en-US" sz="1100" b="1" dirty="0">
+                <a:solidFill>
+                  <a:srgbClr val="1A2B3C"/>
+                </a:solidFill>
+                <a:latin typeface="Arial" pitchFamily="34" charset="0"/>
+                <a:ea typeface="Arial" pitchFamily="34" charset="-122"/>
+                <a:cs typeface="Arial" pitchFamily="34" charset="-120"/>
+              </a:rPr>
+              <a:t>4 Actuate</a:t>
+            </a:r>
+            <a:endParaRPr lang="en-US" sz="1100" dirty="0"/>
+          </a:p>
+        </p:txBody>
+      </p:sp>
+      <p:sp>
+        <p:nvSpPr>
+          <p:cNvPr id="22" name="Text 16"/>
+          <p:cNvSpPr txBox="1"/>
+          <p:nvPr/>
+        </p:nvSpPr>
+        <p:spPr>
+          <a:xfrm>
+            <a:off x="756301" y="4044047"/>
+            <a:ext cx="950976" cy="228600"/>
+          </a:xfrm>
+          <a:prstGeom prst="rect">
+            <a:avLst/>
+          </a:prstGeom>
+          <a:noFill/>
+          <a:ln/>
+        </p:spPr>
+        <p:txBody>
+          <a:bodyPr wrap="square" lIns="0" tIns="0" rIns="0" bIns="0" rtlCol="0" anchor="t"/>
+          <a:lstStyle/>
+          <a:p>
+            <a:pPr algn="r" indent="0" marL="0">
+              <a:buNone/>
+            </a:pPr>
+            <a:r>
+              <a:rPr lang="en-US" sz="950" dirty="0">
+                <a:solidFill>
+                  <a:srgbClr val="5A6B7D"/>
+                </a:solidFill>
+                <a:latin typeface="Calibri" pitchFamily="34" charset="0"/>
+                <a:ea typeface="Calibri" pitchFamily="34" charset="-122"/>
+                <a:cs typeface="Calibri" pitchFamily="34" charset="-120"/>
+              </a:rPr>
+              <a:t>RESTCONF 2PC</a:t>
+            </a:r>
+            <a:endParaRPr lang="en-US" sz="950" dirty="0"/>
+          </a:p>
+        </p:txBody>
+      </p:sp>
+      <p:sp>
+        <p:nvSpPr>
+          <p:cNvPr id="23" name="Shape 17"/>
+          <p:cNvSpPr/>
+          <p:nvPr/>
+        </p:nvSpPr>
+        <p:spPr>
+          <a:xfrm>
+            <a:off x="1333671" y="2338465"/>
+            <a:ext cx="566928" cy="566928"/>
+          </a:xfrm>
+          <a:prstGeom prst="ellipse">
+            <a:avLst/>
+          </a:prstGeom>
+          <a:solidFill>
+            <a:srgbClr val="14304F"/>
+          </a:solidFill>
+          <a:ln w="12700">
+            <a:solidFill>
+              <a:srgbClr val="14304F"/>
+            </a:solidFill>
+            <a:prstDash val="solid"/>
+          </a:ln>
+        </p:spPr>
+      </p:sp>
+      <p:pic>
+        <p:nvPicPr>
+          <p:cNvPr id="24" name="Image 4" descr="preencoded.png">    </p:cNvPr>
+          <p:cNvPicPr>
+            <a:picLocks noChangeAspect="1"/>
+          </p:cNvPicPr>
+          <p:nvPr/>
+        </p:nvPicPr>
+        <p:blipFill>
+          <a:blip r:embed="rId5"/>
+          <a:stretch>
+            <a:fillRect/>
+          </a:stretch>
+        </p:blipFill>
+        <p:spPr>
+          <a:xfrm>
+            <a:off x="1475403" y="2480197"/>
+            <a:ext cx="283464" cy="283464"/>
+          </a:xfrm>
+          <a:prstGeom prst="rect">
+            <a:avLst/>
+          </a:prstGeom>
+        </p:spPr>
+      </p:pic>
+      <p:sp>
+        <p:nvSpPr>
+          <p:cNvPr id="25" name="Text 18"/>
+          <p:cNvSpPr txBox="1"/>
+          <p:nvPr/>
+        </p:nvSpPr>
+        <p:spPr>
+          <a:xfrm>
+            <a:off x="291255" y="2375041"/>
+            <a:ext cx="950976" cy="246888"/>
+          </a:xfrm>
+          <a:prstGeom prst="rect">
+            <a:avLst/>
+          </a:prstGeom>
+          <a:noFill/>
+          <a:ln/>
+        </p:spPr>
+        <p:txBody>
+          <a:bodyPr wrap="square" lIns="0" tIns="0" rIns="0" bIns="0" rtlCol="0" anchor="t"/>
+          <a:lstStyle/>
+          <a:p>
+            <a:pPr algn="r" indent="0" marL="0">
+              <a:buNone/>
+            </a:pPr>
+            <a:r>
+              <a:rPr lang="en-US" sz="1100" b="1" dirty="0">
+                <a:solidFill>
+                  <a:srgbClr val="1A2B3C"/>
+                </a:solidFill>
+                <a:latin typeface="Arial" pitchFamily="34" charset="0"/>
+                <a:ea typeface="Arial" pitchFamily="34" charset="-122"/>
+                <a:cs typeface="Arial" pitchFamily="34" charset="-120"/>
+              </a:rPr>
+              <a:t>5 Monitor</a:t>
+            </a:r>
+            <a:endParaRPr lang="en-US" sz="1100" dirty="0"/>
+          </a:p>
+        </p:txBody>
+      </p:sp>
+      <p:sp>
+        <p:nvSpPr>
+          <p:cNvPr id="26" name="Text 19"/>
+          <p:cNvSpPr txBox="1"/>
+          <p:nvPr/>
+        </p:nvSpPr>
+        <p:spPr>
+          <a:xfrm>
+            <a:off x="291255" y="2612785"/>
+            <a:ext cx="950976" cy="228600"/>
+          </a:xfrm>
+          <a:prstGeom prst="rect">
+            <a:avLst/>
+          </a:prstGeom>
+          <a:noFill/>
+          <a:ln/>
+        </p:spPr>
+        <p:txBody>
+          <a:bodyPr wrap="square" lIns="0" tIns="0" rIns="0" bIns="0" rtlCol="0" anchor="t"/>
+          <a:lstStyle/>
+          <a:p>
+            <a:pPr algn="r" indent="0" marL="0">
+              <a:buNone/>
+            </a:pPr>
+            <a:r>
+              <a:rPr lang="en-US" sz="950" dirty="0">
+                <a:solidFill>
+                  <a:srgbClr val="5A6B7D"/>
+                </a:solidFill>
+                <a:latin typeface="Calibri" pitchFamily="34" charset="0"/>
+                <a:ea typeface="Calibri" pitchFamily="34" charset="-122"/>
+                <a:cs typeface="Calibri" pitchFamily="34" charset="-120"/>
+              </a:rPr>
+              <a:t>live telemetry</a:t>
+            </a:r>
+            <a:endParaRPr lang="en-US" sz="950" dirty="0"/>
+          </a:p>
+        </p:txBody>
+      </p:sp>
+      <p:sp>
+        <p:nvSpPr>
+          <p:cNvPr id="27" name="Text 20"/>
+          <p:cNvSpPr txBox="1"/>
+          <p:nvPr/>
+        </p:nvSpPr>
+        <p:spPr>
+          <a:xfrm>
+            <a:off x="5394960" y="1234440"/>
+            <a:ext cx="3291840" cy="274320"/>
+          </a:xfrm>
+          <a:prstGeom prst="rect">
+            <a:avLst/>
+          </a:prstGeom>
+          <a:noFill/>
+          <a:ln/>
+        </p:spPr>
+        <p:txBody>
+          <a:bodyPr wrap="square" lIns="0" tIns="0" rIns="0" bIns="0" rtlCol="0" anchor="t"/>
+          <a:lstStyle/>
+          <a:p>
+            <a:pPr indent="0" marL="0">
+              <a:buNone/>
+            </a:pPr>
+            <a:r>
+              <a:rPr lang="en-US" sz="1250" b="1" dirty="0">
+                <a:solidFill>
+                  <a:srgbClr val="0B1D33"/>
+                </a:solidFill>
+                <a:latin typeface="Arial" pitchFamily="34" charset="0"/>
+                <a:ea typeface="Arial" pitchFamily="34" charset="-122"/>
+                <a:cs typeface="Arial" pitchFamily="34" charset="-120"/>
+              </a:rPr>
+              <a:t>Where the ~2 s go</a:t>
+            </a:r>
+            <a:endParaRPr lang="en-US" sz="1250" dirty="0"/>
+          </a:p>
+        </p:txBody>
+      </p:sp>
+      <p:sp>
+        <p:nvSpPr>
+          <p:cNvPr id="28" name="Shape 21"/>
+          <p:cNvSpPr/>
+          <p:nvPr/>
+        </p:nvSpPr>
+        <p:spPr>
+          <a:xfrm>
+            <a:off x="5394960" y="1645920"/>
+            <a:ext cx="1720735" cy="384048"/>
+          </a:xfrm>
+          <a:prstGeom prst="rect">
+            <a:avLst/>
+          </a:prstGeom>
+          <a:solidFill>
+            <a:srgbClr val="E8912D"/>
+          </a:solidFill>
+          <a:ln w="12700">
+            <a:solidFill>
+              <a:srgbClr val="FFFFFF"/>
+            </a:solidFill>
+            <a:prstDash val="solid"/>
+          </a:ln>
+        </p:spPr>
+      </p:sp>
+      <p:sp>
+        <p:nvSpPr>
+          <p:cNvPr id="29" name="Shape 22"/>
+          <p:cNvSpPr/>
+          <p:nvPr/>
+        </p:nvSpPr>
+        <p:spPr>
+          <a:xfrm>
+            <a:off x="7115695" y="1645920"/>
+            <a:ext cx="1122218" cy="384048"/>
+          </a:xfrm>
+          <a:prstGeom prst="rect">
+            <a:avLst/>
+          </a:prstGeom>
+          <a:solidFill>
+            <a:srgbClr val="0FA3B1"/>
+          </a:solidFill>
+          <a:ln w="12700">
+            <a:solidFill>
+              <a:srgbClr val="0FA3B1"/>
+            </a:solidFill>
+            <a:prstDash val="solid"/>
+          </a:ln>
+        </p:spPr>
+      </p:sp>
+      <p:sp>
+        <p:nvSpPr>
+          <p:cNvPr id="30" name="Shape 23"/>
+          <p:cNvSpPr/>
+          <p:nvPr/>
+        </p:nvSpPr>
+        <p:spPr>
+          <a:xfrm>
+            <a:off x="8237913" y="1645920"/>
+            <a:ext cx="448887" cy="384048"/>
+          </a:xfrm>
+          <a:prstGeom prst="rect">
+            <a:avLst/>
+          </a:prstGeom>
+          <a:solidFill>
+            <a:srgbClr val="7CCAD2"/>
+          </a:solidFill>
+          <a:ln w="12700">
+            <a:solidFill>
+              <a:srgbClr val="7CCAD2"/>
+            </a:solidFill>
+            <a:prstDash val="solid"/>
+          </a:ln>
+        </p:spPr>
+      </p:sp>
+      <p:sp>
+        <p:nvSpPr>
+          <p:cNvPr id="31" name="Text 24"/>
+          <p:cNvSpPr txBox="1"/>
+          <p:nvPr/>
+        </p:nvSpPr>
+        <p:spPr>
+          <a:xfrm>
+            <a:off x="5394960" y="1645920"/>
+            <a:ext cx="1720735" cy="384048"/>
+          </a:xfrm>
+          <a:prstGeom prst="rect">
+            <a:avLst/>
+          </a:prstGeom>
+          <a:noFill/>
+          <a:ln/>
+        </p:spPr>
+        <p:txBody>
+          <a:bodyPr wrap="square" lIns="0" tIns="0" rIns="0" bIns="0" rtlCol="0" anchor="ctr"/>
+          <a:lstStyle/>
+          <a:p>
+            <a:pPr algn="ctr" indent="0" marL="0">
+              <a:buNone/>
+            </a:pPr>
+            <a:r>
+              <a:rPr lang="en-US" sz="1100" b="1" dirty="0">
+                <a:solidFill>
+                  <a:srgbClr val="FFFFFF"/>
+                </a:solidFill>
+                <a:latin typeface="Calibri" pitchFamily="34" charset="0"/>
+                <a:ea typeface="Calibri" pitchFamily="34" charset="-122"/>
+                <a:cs typeface="Calibri" pitchFamily="34" charset="-120"/>
+              </a:rPr>
+              <a:t>1.15 s</a:t>
+            </a:r>
+            <a:endParaRPr lang="en-US" sz="1100" dirty="0"/>
+          </a:p>
+        </p:txBody>
+      </p:sp>
+      <p:sp>
+        <p:nvSpPr>
+          <p:cNvPr id="32" name="Text 25"/>
+          <p:cNvSpPr txBox="1"/>
+          <p:nvPr/>
+        </p:nvSpPr>
+        <p:spPr>
+          <a:xfrm>
+            <a:off x="8237913" y="1645920"/>
+            <a:ext cx="448887" cy="384048"/>
+          </a:xfrm>
+          <a:prstGeom prst="rect">
+            <a:avLst/>
+          </a:prstGeom>
+          <a:noFill/>
+          <a:ln/>
+        </p:spPr>
+        <p:txBody>
+          <a:bodyPr wrap="square" lIns="0" tIns="0" rIns="0" bIns="0" rtlCol="0" anchor="ctr"/>
+          <a:lstStyle/>
+          <a:p>
+            <a:pPr algn="ctr" indent="0" marL="0">
+              <a:buNone/>
+            </a:pPr>
+            <a:r>
+              <a:rPr lang="en-US" sz="900" b="1" dirty="0">
+                <a:solidFill>
+                  <a:srgbClr val="FFFFFF"/>
+                </a:solidFill>
+                <a:latin typeface="Calibri" pitchFamily="34" charset="0"/>
+                <a:ea typeface="Calibri" pitchFamily="34" charset="-122"/>
+                <a:cs typeface="Calibri" pitchFamily="34" charset="-120"/>
+              </a:rPr>
+              <a:t>+0.3</a:t>
+            </a:r>
+            <a:endParaRPr lang="en-US" sz="900" dirty="0"/>
+          </a:p>
+        </p:txBody>
+      </p:sp>
+      <p:sp>
+        <p:nvSpPr>
+          <p:cNvPr id="33" name="Text 26"/>
+          <p:cNvSpPr txBox="1"/>
+          <p:nvPr/>
+        </p:nvSpPr>
+        <p:spPr>
+          <a:xfrm>
+            <a:off x="7115695" y="1645920"/>
+            <a:ext cx="1122218" cy="384048"/>
+          </a:xfrm>
+          <a:prstGeom prst="rect">
+            <a:avLst/>
+          </a:prstGeom>
+          <a:noFill/>
+          <a:ln/>
+        </p:spPr>
+        <p:txBody>
+          <a:bodyPr wrap="square" lIns="0" tIns="0" rIns="0" bIns="0" rtlCol="0" anchor="ctr"/>
+          <a:lstStyle/>
+          <a:p>
+            <a:pPr algn="ctr" indent="0" marL="0">
+              <a:buNone/>
+            </a:pPr>
+            <a:r>
+              <a:rPr lang="en-US" sz="1050" b="1" dirty="0">
+                <a:solidFill>
+                  <a:srgbClr val="FFFFFF"/>
+                </a:solidFill>
+                <a:latin typeface="Calibri" pitchFamily="34" charset="0"/>
+                <a:ea typeface="Calibri" pitchFamily="34" charset="-122"/>
+                <a:cs typeface="Calibri" pitchFamily="34" charset="-120"/>
+              </a:rPr>
+              <a:t>0.75 s</a:t>
+            </a:r>
+            <a:endParaRPr lang="en-US" sz="1050" dirty="0"/>
+          </a:p>
+        </p:txBody>
+      </p:sp>
+      <p:sp>
+        <p:nvSpPr>
+          <p:cNvPr id="34" name="Text 27"/>
+          <p:cNvSpPr txBox="1"/>
+          <p:nvPr/>
+        </p:nvSpPr>
+        <p:spPr>
+          <a:xfrm>
+            <a:off x="5394960" y="2084832"/>
+            <a:ext cx="1720735" cy="228600"/>
+          </a:xfrm>
+          <a:prstGeom prst="rect">
+            <a:avLst/>
+          </a:prstGeom>
+          <a:noFill/>
+          <a:ln/>
+        </p:spPr>
+        <p:txBody>
+          <a:bodyPr wrap="square" lIns="0" tIns="0" rIns="0" bIns="0" rtlCol="0" anchor="t"/>
+          <a:lstStyle/>
+          <a:p>
+            <a:pPr indent="0" marL="0">
+              <a:buNone/>
+            </a:pPr>
+            <a:r>
+              <a:rPr lang="en-US" sz="950" dirty="0">
+                <a:solidFill>
+                  <a:srgbClr val="5A6B7D"/>
+                </a:solidFill>
+                <a:latin typeface="Calibri" pitchFamily="34" charset="0"/>
+                <a:ea typeface="Calibri" pitchFamily="34" charset="-122"/>
+                <a:cs typeface="Calibri" pitchFamily="34" charset="-120"/>
+              </a:rPr>
+              <a:t>ns-3 what-if (Tier 4)</a:t>
+            </a:r>
+            <a:endParaRPr lang="en-US" sz="950" dirty="0"/>
+          </a:p>
+        </p:txBody>
+      </p:sp>
+      <p:sp>
+        <p:nvSpPr>
+          <p:cNvPr id="35" name="Text 28"/>
+          <p:cNvSpPr txBox="1"/>
+          <p:nvPr/>
+        </p:nvSpPr>
+        <p:spPr>
+          <a:xfrm>
+            <a:off x="7115695" y="2084832"/>
+            <a:ext cx="1571105" cy="228600"/>
+          </a:xfrm>
+          <a:prstGeom prst="rect">
+            <a:avLst/>
+          </a:prstGeom>
+          <a:noFill/>
+          <a:ln/>
+        </p:spPr>
+        <p:txBody>
+          <a:bodyPr wrap="square" lIns="0" tIns="0" rIns="0" bIns="0" rtlCol="0" anchor="t"/>
+          <a:lstStyle/>
+          <a:p>
+            <a:pPr algn="r" indent="0" marL="0">
+              <a:buNone/>
+            </a:pPr>
+            <a:r>
+              <a:rPr lang="en-US" sz="950" dirty="0">
+                <a:solidFill>
+                  <a:srgbClr val="5A6B7D"/>
+                </a:solidFill>
+                <a:latin typeface="Calibri" pitchFamily="34" charset="0"/>
+                <a:ea typeface="Calibri" pitchFamily="34" charset="-122"/>
+                <a:cs typeface="Calibri" pitchFamily="34" charset="-120"/>
+              </a:rPr>
+              <a:t>reconcile · verify · commit</a:t>
+            </a:r>
+            <a:endParaRPr lang="en-US" sz="950" dirty="0"/>
+          </a:p>
+        </p:txBody>
+      </p:sp>
+      <p:sp>
+        <p:nvSpPr>
+          <p:cNvPr id="36" name="Shape 29"/>
+          <p:cNvSpPr/>
+          <p:nvPr/>
+        </p:nvSpPr>
+        <p:spPr>
+          <a:xfrm>
+            <a:off x="5394960" y="2697480"/>
+            <a:ext cx="3291840" cy="960120"/>
+          </a:xfrm>
+          <a:prstGeom prst="roundRect">
+            <a:avLst>
+              <a:gd name="adj" fmla="val 7619"/>
+            </a:avLst>
+          </a:prstGeom>
+          <a:solidFill>
+            <a:srgbClr val="F2F5F8"/>
+          </a:solidFill>
+          <a:ln w="12700">
+            <a:solidFill>
+              <a:srgbClr val="F2F5F8"/>
+            </a:solidFill>
+            <a:prstDash val="solid"/>
+          </a:ln>
+        </p:spPr>
+      </p:sp>
+      <p:sp>
+        <p:nvSpPr>
+          <p:cNvPr id="37" name="Text 30"/>
+          <p:cNvSpPr txBox="1"/>
+          <p:nvPr/>
+        </p:nvSpPr>
+        <p:spPr>
+          <a:xfrm>
+            <a:off x="5577840" y="2770632"/>
+            <a:ext cx="2926080" cy="502920"/>
+          </a:xfrm>
+          <a:prstGeom prst="rect">
+            <a:avLst/>
+          </a:prstGeom>
+          <a:noFill/>
+          <a:ln/>
+        </p:spPr>
+        <p:txBody>
+          <a:bodyPr wrap="square" lIns="0" tIns="0" rIns="0" bIns="0" rtlCol="0" anchor="ctr"/>
+          <a:lstStyle/>
+          <a:p>
+            <a:pPr indent="0" marL="0">
+              <a:buNone/>
+            </a:pPr>
+            <a:r>
+              <a:rPr lang="en-US" sz="2600" b="1" dirty="0">
+                <a:solidFill>
+                  <a:srgbClr val="9AA7B4"/>
+                </a:solidFill>
+                <a:latin typeface="Arial" pitchFamily="34" charset="0"/>
+                <a:ea typeface="Arial" pitchFamily="34" charset="-122"/>
+                <a:cs typeface="Arial" pitchFamily="34" charset="-120"/>
+              </a:rPr>
+              <a:t>hours</a:t>
+            </a:r>
+            <a:endParaRPr lang="en-US" sz="2600" dirty="0"/>
+          </a:p>
+        </p:txBody>
+      </p:sp>
+      <p:sp>
+        <p:nvSpPr>
+          <p:cNvPr id="38" name="Text 31"/>
+          <p:cNvSpPr txBox="1"/>
+          <p:nvPr/>
+        </p:nvSpPr>
+        <p:spPr>
+          <a:xfrm>
+            <a:off x="5577840" y="3291840"/>
+            <a:ext cx="2926080" cy="274320"/>
+          </a:xfrm>
+          <a:prstGeom prst="rect">
+            <a:avLst/>
+          </a:prstGeom>
+          <a:noFill/>
+          <a:ln/>
+        </p:spPr>
+        <p:txBody>
+          <a:bodyPr wrap="square" lIns="0" tIns="0" rIns="0" bIns="0" rtlCol="0" anchor="t"/>
+          <a:lstStyle/>
+          <a:p>
+            <a:pPr indent="0" marL="0">
+              <a:buNone/>
+            </a:pPr>
+            <a:r>
+              <a:rPr lang="en-US" sz="1100" dirty="0">
+                <a:solidFill>
+                  <a:srgbClr val="1A2B3C"/>
+                </a:solidFill>
+                <a:latin typeface="Calibri" pitchFamily="34" charset="0"/>
+                <a:ea typeface="Calibri" pitchFamily="34" charset="-122"/>
+                <a:cs typeface="Calibri" pitchFamily="34" charset="-120"/>
+              </a:rPr>
+              <a:t>manual CLI troubleshooting</a:t>
+            </a:r>
+            <a:endParaRPr lang="en-US" sz="1100" dirty="0"/>
+          </a:p>
+        </p:txBody>
+      </p:sp>
+      <p:sp>
+        <p:nvSpPr>
+          <p:cNvPr id="39" name="Shape 32"/>
+          <p:cNvSpPr/>
+          <p:nvPr/>
+        </p:nvSpPr>
+        <p:spPr>
+          <a:xfrm>
+            <a:off x="5394960" y="3794760"/>
+            <a:ext cx="3291840" cy="960120"/>
+          </a:xfrm>
+          <a:prstGeom prst="roundRect">
+            <a:avLst>
+              <a:gd name="adj" fmla="val 7619"/>
+            </a:avLst>
+          </a:prstGeom>
+          <a:solidFill>
+            <a:srgbClr val="F2F5F8"/>
+          </a:solidFill>
+          <a:ln w="12700">
+            <a:solidFill>
+              <a:srgbClr val="F2F5F8"/>
+            </a:solidFill>
+            <a:prstDash val="solid"/>
+          </a:ln>
+        </p:spPr>
+      </p:sp>
+      <p:sp>
+        <p:nvSpPr>
+          <p:cNvPr id="40" name="Text 33"/>
+          <p:cNvSpPr txBox="1"/>
+          <p:nvPr/>
+        </p:nvSpPr>
+        <p:spPr>
+          <a:xfrm>
+            <a:off x="5577840" y="3867912"/>
+            <a:ext cx="2926080" cy="502920"/>
+          </a:xfrm>
+          <a:prstGeom prst="rect">
+            <a:avLst/>
+          </a:prstGeom>
+          <a:noFill/>
+          <a:ln/>
+        </p:spPr>
+        <p:txBody>
+          <a:bodyPr wrap="square" lIns="0" tIns="0" rIns="0" bIns="0" rtlCol="0" anchor="ctr"/>
+          <a:lstStyle/>
+          <a:p>
+            <a:pPr indent="0" marL="0">
+              <a:buNone/>
+            </a:pPr>
+            <a:r>
+              <a:rPr lang="en-US" sz="2600" b="1" dirty="0">
+                <a:solidFill>
+                  <a:srgbClr val="0FA3B1"/>
+                </a:solidFill>
+                <a:latin typeface="Arial" pitchFamily="34" charset="0"/>
+                <a:ea typeface="Arial" pitchFamily="34" charset="-122"/>
+                <a:cs typeface="Arial" pitchFamily="34" charset="-120"/>
+              </a:rPr>
+              <a:t>1.9–2.2 s</a:t>
+            </a:r>
+            <a:endParaRPr lang="en-US" sz="2600" dirty="0"/>
+          </a:p>
+        </p:txBody>
+      </p:sp>
+      <p:sp>
+        <p:nvSpPr>
+          <p:cNvPr id="41" name="Text 34"/>
+          <p:cNvSpPr txBox="1"/>
+          <p:nvPr/>
+        </p:nvSpPr>
+        <p:spPr>
+          <a:xfrm>
+            <a:off x="5577840" y="4389120"/>
+            <a:ext cx="2926080" cy="274320"/>
+          </a:xfrm>
+          <a:prstGeom prst="rect">
+            <a:avLst/>
+          </a:prstGeom>
+          <a:noFill/>
+          <a:ln/>
+        </p:spPr>
+        <p:txBody>
+          <a:bodyPr wrap="square" lIns="0" tIns="0" rIns="0" bIns="0" rtlCol="0" anchor="t"/>
+          <a:lstStyle/>
+          <a:p>
+            <a:pPr indent="0" marL="0">
+              <a:buNone/>
+            </a:pPr>
+            <a:r>
+              <a:rPr lang="en-US" sz="1100" dirty="0">
+                <a:solidFill>
+                  <a:srgbClr val="1A2B3C"/>
+                </a:solidFill>
+                <a:latin typeface="Calibri" pitchFamily="34" charset="0"/>
+                <a:ea typeface="Calibri" pitchFamily="34" charset="-122"/>
+                <a:cs typeface="Calibri" pitchFamily="34" charset="-120"/>
+              </a:rPr>
+              <a:t>autonomous closed loop</a:t>
+            </a:r>
+            <a:endParaRPr lang="en-US" sz="1100" dirty="0"/>
+          </a:p>
+        </p:txBody>
+      </p:sp>
+    </p:spTree>
+  </p:cSld>
+  <p:clrMapOvr>
+    <a:masterClrMapping/>
+  </p:clrMapOvr>
+</p:sld>
+</file>
+
+<file path=ppt/slides/slide12.xml><?xml version="1.0" encoding="utf-8"?>
+<p:sld xmlns:a="http://schemas.openxmlformats.org/drawingml/2006/main" xmlns:r="http://schemas.openxmlformats.org/officeDocument/2006/relationships" xmlns:p="http://schemas.openxmlformats.org/presentationml/2006/main">
+  <p:cSld name="Slide 12">
+    <p:bg>
+      <p:bgPr>
+        <a:solidFill>
           <a:srgbClr val="0B1D33"/>
         </a:solidFill>
       </p:bgPr>
@@ -3504,7 +6549,7 @@
       </p:sp>
       <p:graphicFrame>
         <p:nvGraphicFramePr>
-          <p:cNvPr id="11" name="Table 0"/>
+          <p:cNvPr id="13" name="Table 0"/>
           <p:cNvGraphicFramePr>
             <a:graphicFrameLocks noGrp="1"/>
           </p:cNvGraphicFramePr>
@@ -11152,7 +14197,7 @@
                 <a:ea typeface="Arial" pitchFamily="34" charset="-122"/>
                 <a:cs typeface="Arial" pitchFamily="34" charset="-120"/>
               </a:rPr>
-              <a:t>WHAT-IF IN PRACTICE</a:t>
+              <a:t>ADAPTER ② · CONNECTIVITY OPTIONS</a:t>
             </a:r>
             <a:endParaRPr lang="en-US" sz="1000" dirty="0"/>
           </a:p>
@@ -11191,38 +14236,22 @@
                 <a:ea typeface="Arial" pitchFamily="34" charset="-122"/>
                 <a:cs typeface="Arial" pitchFamily="34" charset="-120"/>
               </a:rPr>
-              <a:t>A storm on the V-band link, tested before it happens</a:t>
+              <a:t>TFS ↔ ns-3: what exists today, what is coming</a:t>
             </a:r>
             <a:endParaRPr lang="en-US" sz="2400" dirty="0"/>
           </a:p>
         </p:txBody>
       </p:sp>
-      <p:graphicFrame>
-        <p:nvGraphicFramePr>
-          <p:cNvPr id="4" name="Chart 0" descr=""/>
-          <p:cNvGraphicFramePr/>
-          <p:nvPr/>
-        </p:nvGraphicFramePr>
-        <p:xfrm>
-          <a:off x="365760" y="1143000"/>
-          <a:ext cx="4480560" cy="3611880"/>
-        </p:xfrm>
-        <a:graphic xmlns:a="http://schemas.openxmlformats.org/drawingml/2006/main">
-          <a:graphicData uri="http://schemas.openxmlformats.org/drawingml/2006/chart">
-            <c:chart xmlns:c="http://schemas.openxmlformats.org/drawingml/2006/chart" r:id="rId1"/>
-          </a:graphicData>
-        </a:graphic>
-      </p:graphicFrame>
-      <p:sp>
-        <p:nvSpPr>
-          <p:cNvPr id="5" name="Text 2"/>
-          <p:cNvSpPr txBox="1"/>
-          <p:nvPr/>
-        </p:nvSpPr>
-        <p:spPr>
-          <a:xfrm>
-            <a:off x="5212080" y="1188720"/>
-            <a:ext cx="3474720" cy="274320"/>
+      <p:sp>
+        <p:nvSpPr>
+          <p:cNvPr id="4" name="Text 2"/>
+          <p:cNvSpPr txBox="1"/>
+          <p:nvPr/>
+        </p:nvSpPr>
+        <p:spPr>
+          <a:xfrm>
+            <a:off x="2377440" y="1188720"/>
+            <a:ext cx="3520440" cy="201168"/>
           </a:xfrm>
           <a:prstGeom prst="rect">
             <a:avLst/>
@@ -11238,164 +14267,200 @@
               <a:buNone/>
             </a:pPr>
             <a:r>
-              <a:rPr lang="en-US" sz="1250" b="1" dirty="0">
-                <a:solidFill>
-                  <a:srgbClr val="0B1D33"/>
+              <a:rPr lang="en-US" sz="900" b="1" spc="150" kern="0" dirty="0">
+                <a:solidFill>
+                  <a:srgbClr val="22A06B"/>
+                </a:solidFill>
+                <a:latin typeface="Calibri" pitchFamily="34" charset="0"/>
+                <a:ea typeface="Calibri" pitchFamily="34" charset="-122"/>
+                <a:cs typeface="Calibri" pitchFamily="34" charset="-120"/>
+              </a:rPr>
+              <a:t>AVAILABLE NOW</a:t>
+            </a:r>
+            <a:endParaRPr lang="en-US" sz="900" dirty="0"/>
+          </a:p>
+        </p:txBody>
+      </p:sp>
+      <p:sp>
+        <p:nvSpPr>
+          <p:cNvPr id="5" name="Text 3"/>
+          <p:cNvSpPr txBox="1"/>
+          <p:nvPr/>
+        </p:nvSpPr>
+        <p:spPr>
+          <a:xfrm>
+            <a:off x="6035040" y="1188720"/>
+            <a:ext cx="2651760" cy="201168"/>
+          </a:xfrm>
+          <a:prstGeom prst="rect">
+            <a:avLst/>
+          </a:prstGeom>
+          <a:noFill/>
+          <a:ln/>
+        </p:spPr>
+        <p:txBody>
+          <a:bodyPr wrap="square" lIns="0" tIns="0" rIns="0" bIns="0" rtlCol="0" anchor="t"/>
+          <a:lstStyle/>
+          <a:p>
+            <a:pPr indent="0" marL="0">
+              <a:buNone/>
+            </a:pPr>
+            <a:r>
+              <a:rPr lang="en-US" sz="900" b="1" spc="150" kern="0" dirty="0">
+                <a:solidFill>
+                  <a:srgbClr val="E8912D"/>
+                </a:solidFill>
+                <a:latin typeface="Calibri" pitchFamily="34" charset="0"/>
+                <a:ea typeface="Calibri" pitchFamily="34" charset="-122"/>
+                <a:cs typeface="Calibri" pitchFamily="34" charset="-120"/>
+              </a:rPr>
+              <a:t>EMERGING · 2026–28</a:t>
+            </a:r>
+            <a:endParaRPr lang="en-US" sz="900" dirty="0"/>
+          </a:p>
+        </p:txBody>
+      </p:sp>
+      <p:sp>
+        <p:nvSpPr>
+          <p:cNvPr id="6" name="Shape 4"/>
+          <p:cNvSpPr/>
+          <p:nvPr/>
+        </p:nvSpPr>
+        <p:spPr>
+          <a:xfrm>
+            <a:off x="457200" y="1618488"/>
+            <a:ext cx="420624" cy="420624"/>
+          </a:xfrm>
+          <a:prstGeom prst="ellipse">
+            <a:avLst/>
+          </a:prstGeom>
+          <a:solidFill>
+            <a:srgbClr val="14304F"/>
+          </a:solidFill>
+          <a:ln w="12700">
+            <a:solidFill>
+              <a:srgbClr val="14304F"/>
+            </a:solidFill>
+            <a:prstDash val="solid"/>
+          </a:ln>
+        </p:spPr>
+      </p:sp>
+      <p:pic>
+        <p:nvPicPr>
+          <p:cNvPr id="7" name="Image 0" descr="preencoded.png">    </p:cNvPr>
+          <p:cNvPicPr>
+            <a:picLocks noChangeAspect="1"/>
+          </p:cNvPicPr>
+          <p:nvPr/>
+        </p:nvPicPr>
+        <p:blipFill>
+          <a:blip r:embed="rId1"/>
+          <a:stretch>
+            <a:fillRect/>
+          </a:stretch>
+        </p:blipFill>
+        <p:spPr>
+          <a:xfrm>
+            <a:off x="562356" y="1723644"/>
+            <a:ext cx="210312" cy="210312"/>
+          </a:xfrm>
+          <a:prstGeom prst="rect">
+            <a:avLst/>
+          </a:prstGeom>
+        </p:spPr>
+      </p:pic>
+      <p:sp>
+        <p:nvSpPr>
+          <p:cNvPr id="8" name="Text 5"/>
+          <p:cNvSpPr txBox="1"/>
+          <p:nvPr/>
+        </p:nvSpPr>
+        <p:spPr>
+          <a:xfrm>
+            <a:off x="987552" y="1581912"/>
+            <a:ext cx="1325880" cy="246888"/>
+          </a:xfrm>
+          <a:prstGeom prst="rect">
+            <a:avLst/>
+          </a:prstGeom>
+          <a:noFill/>
+          <a:ln/>
+        </p:spPr>
+        <p:txBody>
+          <a:bodyPr wrap="square" lIns="0" tIns="0" rIns="0" bIns="0" rtlCol="0" anchor="t"/>
+          <a:lstStyle/>
+          <a:p>
+            <a:pPr indent="0" marL="0">
+              <a:buNone/>
+            </a:pPr>
+            <a:r>
+              <a:rPr lang="en-US" sz="1150" b="1" dirty="0">
+                <a:solidFill>
+                  <a:srgbClr val="1A2B3C"/>
                 </a:solidFill>
                 <a:latin typeface="Arial" pitchFamily="34" charset="0"/>
                 <a:ea typeface="Arial" pitchFamily="34" charset="-122"/>
                 <a:cs typeface="Arial" pitchFamily="34" charset="-120"/>
               </a:rPr>
-              <a:t>Change the twin recommends</a:t>
-            </a:r>
-            <a:endParaRPr lang="en-US" sz="1250" dirty="0"/>
-          </a:p>
-        </p:txBody>
-      </p:sp>
-      <p:sp>
-        <p:nvSpPr>
-          <p:cNvPr id="6" name="Text 3"/>
-          <p:cNvSpPr txBox="1"/>
-          <p:nvPr/>
-        </p:nvSpPr>
-        <p:spPr>
-          <a:xfrm>
-            <a:off x="5212080" y="1572768"/>
-            <a:ext cx="1005840" cy="347472"/>
-          </a:xfrm>
-          <a:prstGeom prst="rect">
-            <a:avLst/>
-          </a:prstGeom>
-          <a:noFill/>
-          <a:ln/>
-        </p:spPr>
-        <p:txBody>
-          <a:bodyPr wrap="square" lIns="0" tIns="0" rIns="0" bIns="0" rtlCol="0" anchor="ctr"/>
+              <a:t>Job control</a:t>
+            </a:r>
+            <a:endParaRPr lang="en-US" sz="1150" dirty="0"/>
+          </a:p>
+        </p:txBody>
+      </p:sp>
+      <p:sp>
+        <p:nvSpPr>
+          <p:cNvPr id="9" name="Text 6"/>
+          <p:cNvSpPr txBox="1"/>
+          <p:nvPr/>
+        </p:nvSpPr>
+        <p:spPr>
+          <a:xfrm>
+            <a:off x="987552" y="1828800"/>
+            <a:ext cx="1325880" cy="365760"/>
+          </a:xfrm>
+          <a:prstGeom prst="rect">
+            <a:avLst/>
+          </a:prstGeom>
+          <a:noFill/>
+          <a:ln/>
+        </p:spPr>
+        <p:txBody>
+          <a:bodyPr wrap="square" lIns="0" tIns="0" rIns="0" bIns="0" rtlCol="0" anchor="t"/>
           <a:lstStyle/>
           <a:p>
             <a:pPr indent="0" marL="0">
               <a:buNone/>
             </a:pPr>
             <a:r>
-              <a:rPr lang="en-US" sz="1100" b="1" dirty="0">
-                <a:solidFill>
-                  <a:srgbClr val="1A2B3C"/>
+              <a:rPr lang="en-US" sz="900" dirty="0">
+                <a:solidFill>
+                  <a:srgbClr val="5A6B7D"/>
                 </a:solidFill>
                 <a:latin typeface="Calibri" pitchFamily="34" charset="0"/>
                 <a:ea typeface="Calibri" pitchFamily="34" charset="-122"/>
                 <a:cs typeface="Calibri" pitchFamily="34" charset="-120"/>
               </a:rPr>
-              <a:t>ACM floor</a:t>
-            </a:r>
-            <a:endParaRPr lang="en-US" sz="1100" dirty="0"/>
-          </a:p>
-        </p:txBody>
-      </p:sp>
-      <p:sp>
-        <p:nvSpPr>
-          <p:cNvPr id="7" name="Shape 4"/>
+              <a:t>start, steer, stop what-if runs</a:t>
+            </a:r>
+            <a:endParaRPr lang="en-US" sz="900" dirty="0"/>
+          </a:p>
+        </p:txBody>
+      </p:sp>
+      <p:sp>
+        <p:nvSpPr>
+          <p:cNvPr id="10" name="Shape 7"/>
           <p:cNvSpPr/>
           <p:nvPr/>
         </p:nvSpPr>
         <p:spPr>
           <a:xfrm>
-            <a:off x="6263640" y="1572768"/>
-            <a:ext cx="960120" cy="347472"/>
+            <a:off x="2377440" y="1463040"/>
+            <a:ext cx="3520440" cy="329184"/>
           </a:xfrm>
           <a:prstGeom prst="roundRect">
             <a:avLst>
-              <a:gd name="adj" fmla="val 15789"/>
-            </a:avLst>
-          </a:prstGeom>
-          <a:solidFill>
-            <a:srgbClr val="ECEFF2"/>
-          </a:solidFill>
-          <a:ln w="12700">
-            <a:solidFill>
-              <a:srgbClr val="ECEFF2"/>
-            </a:solidFill>
-            <a:prstDash val="solid"/>
-          </a:ln>
-        </p:spPr>
-      </p:sp>
-      <p:sp>
-        <p:nvSpPr>
-          <p:cNvPr id="8" name="Text 5"/>
-          <p:cNvSpPr txBox="1"/>
-          <p:nvPr/>
-        </p:nvSpPr>
-        <p:spPr>
-          <a:xfrm>
-            <a:off x="6263640" y="1572768"/>
-            <a:ext cx="960120" cy="347472"/>
-          </a:xfrm>
-          <a:prstGeom prst="rect">
-            <a:avLst/>
-          </a:prstGeom>
-          <a:noFill/>
-          <a:ln/>
-        </p:spPr>
-        <p:txBody>
-          <a:bodyPr wrap="square" lIns="0" tIns="0" rIns="0" bIns="0" rtlCol="0" anchor="ctr"/>
-          <a:lstStyle/>
-          <a:p>
-            <a:pPr algn="ctr" indent="0" marL="0">
-              <a:buNone/>
-            </a:pPr>
-            <a:r>
-              <a:rPr lang="en-US" sz="1050" dirty="0">
-                <a:solidFill>
-                  <a:srgbClr val="5A6B7D"/>
-                </a:solidFill>
-                <a:latin typeface="Calibri" pitchFamily="34" charset="0"/>
-                <a:ea typeface="Calibri" pitchFamily="34" charset="-122"/>
-                <a:cs typeface="Calibri" pitchFamily="34" charset="-120"/>
-              </a:rPr>
-              <a:t>MCS 0</a:t>
-            </a:r>
-            <a:endParaRPr lang="en-US" sz="1050" dirty="0"/>
-          </a:p>
-        </p:txBody>
-      </p:sp>
-      <p:sp>
-        <p:nvSpPr>
-          <p:cNvPr id="9" name="Shape 6"/>
-          <p:cNvSpPr/>
-          <p:nvPr/>
-        </p:nvSpPr>
-        <p:spPr>
-          <a:xfrm>
-            <a:off x="7269480" y="1746504"/>
-            <a:ext cx="320040" cy="0"/>
-          </a:xfrm>
-          <a:prstGeom prst="line">
-            <a:avLst/>
-          </a:prstGeom>
-          <a:noFill/>
-          <a:ln w="22225">
-            <a:solidFill>
-              <a:srgbClr val="5A6B7D"/>
-            </a:solidFill>
-            <a:prstDash val="solid"/>
-            <a:headEnd type="none"/>
-            <a:tailEnd type="triangle"/>
-          </a:ln>
-        </p:spPr>
-      </p:sp>
-      <p:sp>
-        <p:nvSpPr>
-          <p:cNvPr id="10" name="Shape 7"/>
-          <p:cNvSpPr/>
-          <p:nvPr/>
-        </p:nvSpPr>
-        <p:spPr>
-          <a:xfrm>
-            <a:off x="7635240" y="1572768"/>
-            <a:ext cx="1051560" cy="347472"/>
-          </a:xfrm>
-          <a:prstGeom prst="roundRect">
-            <a:avLst>
-              <a:gd name="adj" fmla="val 15789"/>
+              <a:gd name="adj" fmla="val 16667"/>
             </a:avLst>
           </a:prstGeom>
           <a:solidFill>
@@ -11417,8 +14482,8 @@
         </p:nvSpPr>
         <p:spPr>
           <a:xfrm>
-            <a:off x="7635240" y="1572768"/>
-            <a:ext cx="1051560" cy="347472"/>
+            <a:off x="2468880" y="1463040"/>
+            <a:ext cx="3383280" cy="329184"/>
           </a:xfrm>
           <a:prstGeom prst="rect">
             <a:avLst/>
@@ -11430,11 +14495,11 @@
           <a:bodyPr wrap="square" lIns="0" tIns="0" rIns="0" bIns="0" rtlCol="0" anchor="ctr"/>
           <a:lstStyle/>
           <a:p>
-            <a:pPr algn="ctr" indent="0" marL="0">
-              <a:buNone/>
-            </a:pPr>
-            <a:r>
-              <a:rPr lang="en-US" sz="1050" b="1" dirty="0">
+            <a:pPr indent="0" marL="0">
+              <a:buNone/>
+            </a:pPr>
+            <a:r>
+              <a:rPr lang="en-US" sz="950" b="1" dirty="0">
                 <a:solidFill>
                   <a:srgbClr val="157A50"/>
                 </a:solidFill>
@@ -11442,22 +14507,49 @@
                 <a:ea typeface="Calibri" pitchFamily="34" charset="-122"/>
                 <a:cs typeface="Calibri" pitchFamily="34" charset="-120"/>
               </a:rPr>
-              <a:t>MCS 4</a:t>
-            </a:r>
-            <a:endParaRPr lang="en-US" sz="1050" dirty="0"/>
-          </a:p>
-        </p:txBody>
-      </p:sp>
-      <p:sp>
-        <p:nvSpPr>
-          <p:cNvPr id="12" name="Text 9"/>
-          <p:cNvSpPr txBox="1"/>
-          <p:nvPr/>
-        </p:nvSpPr>
-        <p:spPr>
-          <a:xfrm>
-            <a:off x="5212080" y="2048256"/>
-            <a:ext cx="1005840" cy="347472"/>
+              <a:t>★ 3GPP TS 28.561 NDTJob over TS 28.532 REST</a:t>
+            </a:r>
+            <a:endParaRPr lang="en-US" sz="950" dirty="0"/>
+          </a:p>
+        </p:txBody>
+      </p:sp>
+      <p:sp>
+        <p:nvSpPr>
+          <p:cNvPr id="12" name="Shape 9"/>
+          <p:cNvSpPr/>
+          <p:nvPr/>
+        </p:nvSpPr>
+        <p:spPr>
+          <a:xfrm>
+            <a:off x="6035040" y="1463040"/>
+            <a:ext cx="2651760" cy="329184"/>
+          </a:xfrm>
+          <a:prstGeom prst="roundRect">
+            <a:avLst>
+              <a:gd name="adj" fmla="val 16667"/>
+            </a:avLst>
+          </a:prstGeom>
+          <a:solidFill>
+            <a:srgbClr val="FFFFFF"/>
+          </a:solidFill>
+          <a:ln w="12700">
+            <a:solidFill>
+              <a:srgbClr val="E8912D"/>
+            </a:solidFill>
+            <a:prstDash val="dash"/>
+          </a:ln>
+        </p:spPr>
+      </p:sp>
+      <p:sp>
+        <p:nvSpPr>
+          <p:cNvPr id="13" name="Text 10"/>
+          <p:cNvSpPr txBox="1"/>
+          <p:nvPr/>
+        </p:nvSpPr>
+        <p:spPr>
+          <a:xfrm>
+            <a:off x="6126480" y="1463040"/>
+            <a:ext cx="2514600" cy="329184"/>
           </a:xfrm>
           <a:prstGeom prst="rect">
             <a:avLst/>
@@ -11473,7 +14565,7 @@
               <a:buNone/>
             </a:pPr>
             <a:r>
-              <a:rPr lang="en-US" sz="1100" b="1" dirty="0">
+              <a:rPr lang="en-US" sz="950" dirty="0">
                 <a:solidFill>
                   <a:srgbClr val="1A2B3C"/>
                 </a:solidFill>
@@ -11481,34 +14573,34 @@
                 <a:ea typeface="Calibri" pitchFamily="34" charset="-122"/>
                 <a:cs typeface="Calibri" pitchFamily="34" charset="-120"/>
               </a:rPr>
-              <a:t>QoS queue</a:t>
-            </a:r>
-            <a:endParaRPr lang="en-US" sz="1100" dirty="0"/>
-          </a:p>
-        </p:txBody>
-      </p:sp>
-      <p:sp>
-        <p:nvSpPr>
-          <p:cNvPr id="13" name="Shape 10"/>
+              <a:t>3GPP Rel-20 NDT phase 2 (TR 28.883)</a:t>
+            </a:r>
+            <a:endParaRPr lang="en-US" sz="950" dirty="0"/>
+          </a:p>
+        </p:txBody>
+      </p:sp>
+      <p:sp>
+        <p:nvSpPr>
+          <p:cNvPr id="14" name="Shape 11"/>
           <p:cNvSpPr/>
           <p:nvPr/>
         </p:nvSpPr>
         <p:spPr>
           <a:xfrm>
-            <a:off x="6263640" y="2048256"/>
-            <a:ext cx="960120" cy="347472"/>
+            <a:off x="2377440" y="1856232"/>
+            <a:ext cx="3520440" cy="329184"/>
           </a:xfrm>
           <a:prstGeom prst="roundRect">
             <a:avLst>
-              <a:gd name="adj" fmla="val 15789"/>
+              <a:gd name="adj" fmla="val 16667"/>
             </a:avLst>
           </a:prstGeom>
           <a:solidFill>
-            <a:srgbClr val="ECEFF2"/>
+            <a:srgbClr val="F2F5F8"/>
           </a:solidFill>
           <a:ln w="12700">
             <a:solidFill>
-              <a:srgbClr val="ECEFF2"/>
+              <a:srgbClr val="F2F5F8"/>
             </a:solidFill>
             <a:prstDash val="solid"/>
           </a:ln>
@@ -11516,14 +14608,14 @@
       </p:sp>
       <p:sp>
         <p:nvSpPr>
-          <p:cNvPr id="14" name="Text 11"/>
-          <p:cNvSpPr txBox="1"/>
-          <p:nvPr/>
-        </p:nvSpPr>
-        <p:spPr>
-          <a:xfrm>
-            <a:off x="6263640" y="2048256"/>
-            <a:ext cx="960120" cy="347472"/>
+          <p:cNvPr id="15" name="Text 12"/>
+          <p:cNvSpPr txBox="1"/>
+          <p:nvPr/>
+        </p:nvSpPr>
+        <p:spPr>
+          <a:xfrm>
+            <a:off x="2468880" y="1856232"/>
+            <a:ext cx="3383280" cy="329184"/>
           </a:xfrm>
           <a:prstGeom prst="rect">
             <a:avLst/>
@@ -11535,63 +14627,254 @@
           <a:bodyPr wrap="square" lIns="0" tIns="0" rIns="0" bIns="0" rtlCol="0" anchor="ctr"/>
           <a:lstStyle/>
           <a:p>
-            <a:pPr algn="ctr" indent="0" marL="0">
-              <a:buNone/>
-            </a:pPr>
-            <a:r>
-              <a:rPr lang="en-US" sz="1050" dirty="0">
-                <a:solidFill>
-                  <a:srgbClr val="5A6B7D"/>
+            <a:pPr indent="0" marL="0">
+              <a:buNone/>
+            </a:pPr>
+            <a:r>
+              <a:rPr lang="en-US" sz="950" dirty="0">
+                <a:solidFill>
+                  <a:srgbClr val="1A2B3C"/>
                 </a:solidFill>
                 <a:latin typeface="Calibri" pitchFamily="34" charset="0"/>
                 <a:ea typeface="Calibri" pitchFamily="34" charset="-122"/>
                 <a:cs typeface="Calibri" pitchFamily="34" charset="-120"/>
               </a:rPr>
-              <a:t>FIFO</a:t>
-            </a:r>
-            <a:endParaRPr lang="en-US" sz="1050" dirty="0"/>
-          </a:p>
-        </p:txBody>
-      </p:sp>
-      <p:sp>
-        <p:nvSpPr>
-          <p:cNvPr id="15" name="Shape 12"/>
+              <a:t>ITU-T Y.3092 NDT-m interface</a:t>
+            </a:r>
+            <a:endParaRPr lang="en-US" sz="950" dirty="0"/>
+          </a:p>
+        </p:txBody>
+      </p:sp>
+      <p:sp>
+        <p:nvSpPr>
+          <p:cNvPr id="16" name="Shape 13"/>
           <p:cNvSpPr/>
           <p:nvPr/>
         </p:nvSpPr>
         <p:spPr>
           <a:xfrm>
-            <a:off x="7269480" y="2221992"/>
-            <a:ext cx="320040" cy="0"/>
+            <a:off x="6035040" y="1856232"/>
+            <a:ext cx="2651760" cy="329184"/>
+          </a:xfrm>
+          <a:prstGeom prst="roundRect">
+            <a:avLst>
+              <a:gd name="adj" fmla="val 16667"/>
+            </a:avLst>
+          </a:prstGeom>
+          <a:solidFill>
+            <a:srgbClr val="FFFFFF"/>
+          </a:solidFill>
+          <a:ln w="12700">
+            <a:solidFill>
+              <a:srgbClr val="E8912D"/>
+            </a:solidFill>
+            <a:prstDash val="dash"/>
+          </a:ln>
+        </p:spPr>
+      </p:sp>
+      <p:sp>
+        <p:nvSpPr>
+          <p:cNvPr id="17" name="Text 14"/>
+          <p:cNvSpPr txBox="1"/>
+          <p:nvPr/>
+        </p:nvSpPr>
+        <p:spPr>
+          <a:xfrm>
+            <a:off x="6126480" y="1856232"/>
+            <a:ext cx="2514600" cy="329184"/>
+          </a:xfrm>
+          <a:prstGeom prst="rect">
+            <a:avLst/>
+          </a:prstGeom>
+          <a:noFill/>
+          <a:ln/>
+        </p:spPr>
+        <p:txBody>
+          <a:bodyPr wrap="square" lIns="0" tIns="0" rIns="0" bIns="0" rtlCol="0" anchor="ctr"/>
+          <a:lstStyle/>
+          <a:p>
+            <a:pPr indent="0" marL="0">
+              <a:buNone/>
+            </a:pPr>
+            <a:r>
+              <a:rPr lang="en-US" sz="950" dirty="0">
+                <a:solidFill>
+                  <a:srgbClr val="1A2B3C"/>
+                </a:solidFill>
+                <a:latin typeface="Calibri" pitchFamily="34" charset="0"/>
+                <a:ea typeface="Calibri" pitchFamily="34" charset="-122"/>
+                <a:cs typeface="Calibri" pitchFamily="34" charset="-120"/>
+              </a:rPr>
+              <a:t>ITU-T Q.SDTN twin signalling protocol</a:t>
+            </a:r>
+            <a:endParaRPr lang="en-US" sz="950" dirty="0"/>
+          </a:p>
+        </p:txBody>
+      </p:sp>
+      <p:sp>
+        <p:nvSpPr>
+          <p:cNvPr id="18" name="Shape 15"/>
+          <p:cNvSpPr/>
+          <p:nvPr/>
+        </p:nvSpPr>
+        <p:spPr>
+          <a:xfrm>
+            <a:off x="457200" y="2295144"/>
+            <a:ext cx="8229600" cy="0"/>
           </a:xfrm>
           <a:prstGeom prst="line">
             <a:avLst/>
           </a:prstGeom>
           <a:noFill/>
-          <a:ln w="22225">
+          <a:ln w="9525">
             <a:solidFill>
-              <a:srgbClr val="5A6B7D"/>
+              <a:srgbClr val="D5DDE5"/>
             </a:solidFill>
             <a:prstDash val="solid"/>
-            <a:headEnd type="none"/>
-            <a:tailEnd type="triangle"/>
           </a:ln>
         </p:spPr>
       </p:sp>
       <p:sp>
         <p:nvSpPr>
-          <p:cNvPr id="16" name="Shape 13"/>
+          <p:cNvPr id="19" name="Shape 16"/>
           <p:cNvSpPr/>
           <p:nvPr/>
         </p:nvSpPr>
         <p:spPr>
           <a:xfrm>
-            <a:off x="7635240" y="2048256"/>
-            <a:ext cx="1051560" cy="347472"/>
+            <a:off x="457200" y="2532888"/>
+            <a:ext cx="420624" cy="420624"/>
+          </a:xfrm>
+          <a:prstGeom prst="ellipse">
+            <a:avLst/>
+          </a:prstGeom>
+          <a:solidFill>
+            <a:srgbClr val="22A06B"/>
+          </a:solidFill>
+          <a:ln w="12700">
+            <a:solidFill>
+              <a:srgbClr val="22A06B"/>
+            </a:solidFill>
+            <a:prstDash val="solid"/>
+          </a:ln>
+        </p:spPr>
+      </p:sp>
+      <p:pic>
+        <p:nvPicPr>
+          <p:cNvPr id="20" name="Image 1" descr="preencoded.png">    </p:cNvPr>
+          <p:cNvPicPr>
+            <a:picLocks noChangeAspect="1"/>
+          </p:cNvPicPr>
+          <p:nvPr/>
+        </p:nvPicPr>
+        <p:blipFill>
+          <a:blip r:embed="rId2"/>
+          <a:stretch>
+            <a:fillRect/>
+          </a:stretch>
+        </p:blipFill>
+        <p:spPr>
+          <a:xfrm>
+            <a:off x="562356" y="2638044"/>
+            <a:ext cx="210312" cy="210312"/>
+          </a:xfrm>
+          <a:prstGeom prst="rect">
+            <a:avLst/>
+          </a:prstGeom>
+        </p:spPr>
+      </p:pic>
+      <p:sp>
+        <p:nvSpPr>
+          <p:cNvPr id="21" name="Text 17"/>
+          <p:cNvSpPr txBox="1"/>
+          <p:nvPr/>
+        </p:nvSpPr>
+        <p:spPr>
+          <a:xfrm>
+            <a:off x="987552" y="2496312"/>
+            <a:ext cx="1325880" cy="246888"/>
+          </a:xfrm>
+          <a:prstGeom prst="rect">
+            <a:avLst/>
+          </a:prstGeom>
+          <a:noFill/>
+          <a:ln/>
+        </p:spPr>
+        <p:txBody>
+          <a:bodyPr wrap="square" lIns="0" tIns="0" rIns="0" bIns="0" rtlCol="0" anchor="t"/>
+          <a:lstStyle/>
+          <a:p>
+            <a:pPr indent="0" marL="0">
+              <a:buNone/>
+            </a:pPr>
+            <a:r>
+              <a:rPr lang="en-US" sz="1150" b="1" dirty="0">
+                <a:solidFill>
+                  <a:srgbClr val="1A2B3C"/>
+                </a:solidFill>
+                <a:latin typeface="Arial" pitchFamily="34" charset="0"/>
+                <a:ea typeface="Arial" pitchFamily="34" charset="-122"/>
+                <a:cs typeface="Arial" pitchFamily="34" charset="-120"/>
+              </a:rPr>
+              <a:t>State sync</a:t>
+            </a:r>
+            <a:endParaRPr lang="en-US" sz="1150" dirty="0"/>
+          </a:p>
+        </p:txBody>
+      </p:sp>
+      <p:sp>
+        <p:nvSpPr>
+          <p:cNvPr id="22" name="Text 18"/>
+          <p:cNvSpPr txBox="1"/>
+          <p:nvPr/>
+        </p:nvSpPr>
+        <p:spPr>
+          <a:xfrm>
+            <a:off x="987552" y="2743200"/>
+            <a:ext cx="1325880" cy="365760"/>
+          </a:xfrm>
+          <a:prstGeom prst="rect">
+            <a:avLst/>
+          </a:prstGeom>
+          <a:noFill/>
+          <a:ln/>
+        </p:spPr>
+        <p:txBody>
+          <a:bodyPr wrap="square" lIns="0" tIns="0" rIns="0" bIns="0" rtlCol="0" anchor="t"/>
+          <a:lstStyle/>
+          <a:p>
+            <a:pPr indent="0" marL="0">
+              <a:buNone/>
+            </a:pPr>
+            <a:r>
+              <a:rPr lang="en-US" sz="900" dirty="0">
+                <a:solidFill>
+                  <a:srgbClr val="5A6B7D"/>
+                </a:solidFill>
+                <a:latin typeface="Calibri" pitchFamily="34" charset="0"/>
+                <a:ea typeface="Calibri" pitchFamily="34" charset="-122"/>
+                <a:cs typeface="Calibri" pitchFamily="34" charset="-120"/>
+              </a:rPr>
+              <a:t>live topology, RF state, KPIs</a:t>
+            </a:r>
+            <a:endParaRPr lang="en-US" sz="900" dirty="0"/>
+          </a:p>
+        </p:txBody>
+      </p:sp>
+      <p:sp>
+        <p:nvSpPr>
+          <p:cNvPr id="23" name="Shape 19"/>
+          <p:cNvSpPr/>
+          <p:nvPr/>
+        </p:nvSpPr>
+        <p:spPr>
+          <a:xfrm>
+            <a:off x="2377440" y="2377440"/>
+            <a:ext cx="3520440" cy="329184"/>
           </a:xfrm>
           <a:prstGeom prst="roundRect">
             <a:avLst>
-              <a:gd name="adj" fmla="val 15789"/>
+              <a:gd name="adj" fmla="val 16667"/>
             </a:avLst>
           </a:prstGeom>
           <a:solidFill>
@@ -11607,14 +14890,14 @@
       </p:sp>
       <p:sp>
         <p:nvSpPr>
-          <p:cNvPr id="17" name="Text 14"/>
-          <p:cNvSpPr txBox="1"/>
-          <p:nvPr/>
-        </p:nvSpPr>
-        <p:spPr>
-          <a:xfrm>
-            <a:off x="7635240" y="2048256"/>
-            <a:ext cx="1051560" cy="347472"/>
+          <p:cNvPr id="24" name="Text 20"/>
+          <p:cNvSpPr txBox="1"/>
+          <p:nvPr/>
+        </p:nvSpPr>
+        <p:spPr>
+          <a:xfrm>
+            <a:off x="2468880" y="2377440"/>
+            <a:ext cx="3383280" cy="329184"/>
           </a:xfrm>
           <a:prstGeom prst="rect">
             <a:avLst/>
@@ -11626,11 +14909,11 @@
           <a:bodyPr wrap="square" lIns="0" tIns="0" rIns="0" bIns="0" rtlCol="0" anchor="ctr"/>
           <a:lstStyle/>
           <a:p>
-            <a:pPr algn="ctr" indent="0" marL="0">
-              <a:buNone/>
-            </a:pPr>
-            <a:r>
-              <a:rPr lang="en-US" sz="1050" b="1" dirty="0">
+            <a:pPr indent="0" marL="0">
+              <a:buNone/>
+            </a:pPr>
+            <a:r>
+              <a:rPr lang="en-US" sz="950" b="1" dirty="0">
                 <a:solidFill>
                   <a:srgbClr val="157A50"/>
                 </a:solidFill>
@@ -11638,22 +14921,49 @@
                 <a:ea typeface="Calibri" pitchFamily="34" charset="-122"/>
                 <a:cs typeface="Calibri" pitchFamily="34" charset="-120"/>
               </a:rPr>
-              <a:t>PCP 6</a:t>
-            </a:r>
-            <a:endParaRPr lang="en-US" sz="1050" dirty="0"/>
-          </a:p>
-        </p:txBody>
-      </p:sp>
-      <p:sp>
-        <p:nvSpPr>
-          <p:cNvPr id="18" name="Text 15"/>
-          <p:cNvSpPr txBox="1"/>
-          <p:nvPr/>
-        </p:nvSpPr>
-        <p:spPr>
-          <a:xfrm>
-            <a:off x="5212080" y="2523744"/>
-            <a:ext cx="1005840" cy="347472"/>
+              <a:t>★ TFS Context / Monitoring gRPC</a:t>
+            </a:r>
+            <a:endParaRPr lang="en-US" sz="950" dirty="0"/>
+          </a:p>
+        </p:txBody>
+      </p:sp>
+      <p:sp>
+        <p:nvSpPr>
+          <p:cNvPr id="25" name="Shape 21"/>
+          <p:cNvSpPr/>
+          <p:nvPr/>
+        </p:nvSpPr>
+        <p:spPr>
+          <a:xfrm>
+            <a:off x="6035040" y="2377440"/>
+            <a:ext cx="2651760" cy="329184"/>
+          </a:xfrm>
+          <a:prstGeom prst="roundRect">
+            <a:avLst>
+              <a:gd name="adj" fmla="val 16667"/>
+            </a:avLst>
+          </a:prstGeom>
+          <a:solidFill>
+            <a:srgbClr val="FFFFFF"/>
+          </a:solidFill>
+          <a:ln w="12700">
+            <a:solidFill>
+              <a:srgbClr val="E8912D"/>
+            </a:solidFill>
+            <a:prstDash val="dash"/>
+          </a:ln>
+        </p:spPr>
+      </p:sp>
+      <p:sp>
+        <p:nvSpPr>
+          <p:cNvPr id="26" name="Text 22"/>
+          <p:cNvSpPr txBox="1"/>
+          <p:nvPr/>
+        </p:nvSpPr>
+        <p:spPr>
+          <a:xfrm>
+            <a:off x="6126480" y="2377440"/>
+            <a:ext cx="2514600" cy="329184"/>
           </a:xfrm>
           <a:prstGeom prst="rect">
             <a:avLst/>
@@ -11669,7 +14979,7 @@
               <a:buNone/>
             </a:pPr>
             <a:r>
-              <a:rPr lang="en-US" sz="1100" b="1" dirty="0">
+              <a:rPr lang="en-US" sz="950" dirty="0">
                 <a:solidFill>
                   <a:srgbClr val="1A2B3C"/>
                 </a:solidFill>
@@ -11677,34 +14987,34 @@
                 <a:ea typeface="Calibri" pitchFamily="34" charset="-122"/>
                 <a:cs typeface="Calibri" pitchFamily="34" charset="-120"/>
               </a:rPr>
-              <a:t>Carrier</a:t>
-            </a:r>
-            <a:endParaRPr lang="en-US" sz="1100" dirty="0"/>
-          </a:p>
-        </p:txBody>
-      </p:sp>
-      <p:sp>
-        <p:nvSpPr>
-          <p:cNvPr id="19" name="Shape 16"/>
+              <a:t>Rel-20 NDT data collection</a:t>
+            </a:r>
+            <a:endParaRPr lang="en-US" sz="950" dirty="0"/>
+          </a:p>
+        </p:txBody>
+      </p:sp>
+      <p:sp>
+        <p:nvSpPr>
+          <p:cNvPr id="27" name="Shape 23"/>
           <p:cNvSpPr/>
           <p:nvPr/>
         </p:nvSpPr>
         <p:spPr>
           <a:xfrm>
-            <a:off x="6263640" y="2523744"/>
-            <a:ext cx="960120" cy="347472"/>
+            <a:off x="2377440" y="2770632"/>
+            <a:ext cx="3520440" cy="329184"/>
           </a:xfrm>
           <a:prstGeom prst="roundRect">
             <a:avLst>
-              <a:gd name="adj" fmla="val 15789"/>
+              <a:gd name="adj" fmla="val 16667"/>
             </a:avLst>
           </a:prstGeom>
           <a:solidFill>
-            <a:srgbClr val="ECEFF2"/>
+            <a:srgbClr val="F2F5F8"/>
           </a:solidFill>
           <a:ln w="12700">
             <a:solidFill>
-              <a:srgbClr val="ECEFF2"/>
+              <a:srgbClr val="F2F5F8"/>
             </a:solidFill>
             <a:prstDash val="solid"/>
           </a:ln>
@@ -11712,14 +15022,14 @@
       </p:sp>
       <p:sp>
         <p:nvSpPr>
-          <p:cNvPr id="20" name="Text 17"/>
-          <p:cNvSpPr txBox="1"/>
-          <p:nvPr/>
-        </p:nvSpPr>
-        <p:spPr>
-          <a:xfrm>
-            <a:off x="6263640" y="2523744"/>
-            <a:ext cx="960120" cy="347472"/>
+          <p:cNvPr id="28" name="Text 24"/>
+          <p:cNvSpPr txBox="1"/>
+          <p:nvPr/>
+        </p:nvSpPr>
+        <p:spPr>
+          <a:xfrm>
+            <a:off x="2468880" y="2770632"/>
+            <a:ext cx="3383280" cy="329184"/>
           </a:xfrm>
           <a:prstGeom prst="rect">
             <a:avLst/>
@@ -11731,63 +15041,254 @@
           <a:bodyPr wrap="square" lIns="0" tIns="0" rIns="0" bIns="0" rtlCol="0" anchor="ctr"/>
           <a:lstStyle/>
           <a:p>
-            <a:pPr algn="ctr" indent="0" marL="0">
-              <a:buNone/>
-            </a:pPr>
-            <a:r>
-              <a:rPr lang="en-US" sz="1050" dirty="0">
-                <a:solidFill>
-                  <a:srgbClr val="5A6B7D"/>
+            <a:pPr indent="0" marL="0">
+              <a:buNone/>
+            </a:pPr>
+            <a:r>
+              <a:rPr lang="en-US" sz="950" dirty="0">
+                <a:solidFill>
+                  <a:srgbClr val="1A2B3C"/>
                 </a:solidFill>
                 <a:latin typeface="Calibri" pitchFamily="34" charset="0"/>
                 <a:ea typeface="Calibri" pitchFamily="34" charset="-122"/>
                 <a:cs typeface="Calibri" pitchFamily="34" charset="-120"/>
               </a:rPr>
-              <a:t>60.48 GHz</a:t>
-            </a:r>
-            <a:endParaRPr lang="en-US" sz="1050" dirty="0"/>
-          </a:p>
-        </p:txBody>
-      </p:sp>
-      <p:sp>
-        <p:nvSpPr>
-          <p:cNvPr id="21" name="Shape 18"/>
+              <a:t>YANG-Push (RFC 8641) · gNMI · Y.3092 NDT-p</a:t>
+            </a:r>
+            <a:endParaRPr lang="en-US" sz="950" dirty="0"/>
+          </a:p>
+        </p:txBody>
+      </p:sp>
+      <p:sp>
+        <p:nvSpPr>
+          <p:cNvPr id="29" name="Shape 25"/>
           <p:cNvSpPr/>
           <p:nvPr/>
         </p:nvSpPr>
         <p:spPr>
           <a:xfrm>
-            <a:off x="7269480" y="2697480"/>
-            <a:ext cx="320040" cy="0"/>
+            <a:off x="6035040" y="2770632"/>
+            <a:ext cx="2651760" cy="329184"/>
+          </a:xfrm>
+          <a:prstGeom prst="roundRect">
+            <a:avLst>
+              <a:gd name="adj" fmla="val 16667"/>
+            </a:avLst>
+          </a:prstGeom>
+          <a:solidFill>
+            <a:srgbClr val="FFFFFF"/>
+          </a:solidFill>
+          <a:ln w="12700">
+            <a:solidFill>
+              <a:srgbClr val="E8912D"/>
+            </a:solidFill>
+            <a:prstDash val="dash"/>
+          </a:ln>
+        </p:spPr>
+      </p:sp>
+      <p:sp>
+        <p:nvSpPr>
+          <p:cNvPr id="30" name="Text 26"/>
+          <p:cNvSpPr txBox="1"/>
+          <p:nvPr/>
+        </p:nvSpPr>
+        <p:spPr>
+          <a:xfrm>
+            <a:off x="6126480" y="2770632"/>
+            <a:ext cx="2514600" cy="329184"/>
+          </a:xfrm>
+          <a:prstGeom prst="rect">
+            <a:avLst/>
+          </a:prstGeom>
+          <a:noFill/>
+          <a:ln/>
+        </p:spPr>
+        <p:txBody>
+          <a:bodyPr wrap="square" lIns="0" tIns="0" rIns="0" bIns="0" rtlCol="0" anchor="ctr"/>
+          <a:lstStyle/>
+          <a:p>
+            <a:pPr indent="0" marL="0">
+              <a:buNone/>
+            </a:pPr>
+            <a:r>
+              <a:rPr lang="en-US" sz="950" dirty="0">
+                <a:solidFill>
+                  <a:srgbClr val="1A2B3C"/>
+                </a:solidFill>
+                <a:latin typeface="Calibri" pitchFamily="34" charset="0"/>
+                <a:ea typeface="Calibri" pitchFamily="34" charset="-122"/>
+                <a:cs typeface="Calibri" pitchFamily="34" charset="-120"/>
+              </a:rPr>
+              <a:t>IRTF NMRG twin interface drafts</a:t>
+            </a:r>
+            <a:endParaRPr lang="en-US" sz="950" dirty="0"/>
+          </a:p>
+        </p:txBody>
+      </p:sp>
+      <p:sp>
+        <p:nvSpPr>
+          <p:cNvPr id="31" name="Shape 27"/>
+          <p:cNvSpPr/>
+          <p:nvPr/>
+        </p:nvSpPr>
+        <p:spPr>
+          <a:xfrm>
+            <a:off x="457200" y="3209544"/>
+            <a:ext cx="8229600" cy="0"/>
           </a:xfrm>
           <a:prstGeom prst="line">
             <a:avLst/>
           </a:prstGeom>
           <a:noFill/>
-          <a:ln w="22225">
+          <a:ln w="9525">
             <a:solidFill>
-              <a:srgbClr val="5A6B7D"/>
+              <a:srgbClr val="D5DDE5"/>
             </a:solidFill>
             <a:prstDash val="solid"/>
-            <a:headEnd type="none"/>
-            <a:tailEnd type="triangle"/>
           </a:ln>
         </p:spPr>
       </p:sp>
       <p:sp>
         <p:nvSpPr>
-          <p:cNvPr id="22" name="Shape 19"/>
+          <p:cNvPr id="32" name="Shape 28"/>
           <p:cNvSpPr/>
           <p:nvPr/>
         </p:nvSpPr>
         <p:spPr>
           <a:xfrm>
-            <a:off x="7635240" y="2523744"/>
-            <a:ext cx="1051560" cy="347472"/>
+            <a:off x="457200" y="3447288"/>
+            <a:ext cx="420624" cy="420624"/>
+          </a:xfrm>
+          <a:prstGeom prst="ellipse">
+            <a:avLst/>
+          </a:prstGeom>
+          <a:solidFill>
+            <a:srgbClr val="0FA3B1"/>
+          </a:solidFill>
+          <a:ln w="12700">
+            <a:solidFill>
+              <a:srgbClr val="0FA3B1"/>
+            </a:solidFill>
+            <a:prstDash val="solid"/>
+          </a:ln>
+        </p:spPr>
+      </p:sp>
+      <p:pic>
+        <p:nvPicPr>
+          <p:cNvPr id="33" name="Image 2" descr="preencoded.png">    </p:cNvPr>
+          <p:cNvPicPr>
+            <a:picLocks noChangeAspect="1"/>
+          </p:cNvPicPr>
+          <p:nvPr/>
+        </p:nvPicPr>
+        <p:blipFill>
+          <a:blip r:embed="rId3"/>
+          <a:stretch>
+            <a:fillRect/>
+          </a:stretch>
+        </p:blipFill>
+        <p:spPr>
+          <a:xfrm>
+            <a:off x="562356" y="3552444"/>
+            <a:ext cx="210312" cy="210312"/>
+          </a:xfrm>
+          <a:prstGeom prst="rect">
+            <a:avLst/>
+          </a:prstGeom>
+        </p:spPr>
+      </p:pic>
+      <p:sp>
+        <p:nvSpPr>
+          <p:cNvPr id="34" name="Text 29"/>
+          <p:cNvSpPr txBox="1"/>
+          <p:nvPr/>
+        </p:nvSpPr>
+        <p:spPr>
+          <a:xfrm>
+            <a:off x="987552" y="3410712"/>
+            <a:ext cx="1325880" cy="246888"/>
+          </a:xfrm>
+          <a:prstGeom prst="rect">
+            <a:avLst/>
+          </a:prstGeom>
+          <a:noFill/>
+          <a:ln/>
+        </p:spPr>
+        <p:txBody>
+          <a:bodyPr wrap="square" lIns="0" tIns="0" rIns="0" bIns="0" rtlCol="0" anchor="t"/>
+          <a:lstStyle/>
+          <a:p>
+            <a:pPr indent="0" marL="0">
+              <a:buNone/>
+            </a:pPr>
+            <a:r>
+              <a:rPr lang="en-US" sz="1150" b="1" dirty="0">
+                <a:solidFill>
+                  <a:srgbClr val="1A2B3C"/>
+                </a:solidFill>
+                <a:latin typeface="Arial" pitchFamily="34" charset="0"/>
+                <a:ea typeface="Arial" pitchFamily="34" charset="-122"/>
+                <a:cs typeface="Arial" pitchFamily="34" charset="-120"/>
+              </a:rPr>
+              <a:t>Shared models</a:t>
+            </a:r>
+            <a:endParaRPr lang="en-US" sz="1150" dirty="0"/>
+          </a:p>
+        </p:txBody>
+      </p:sp>
+      <p:sp>
+        <p:nvSpPr>
+          <p:cNvPr id="35" name="Text 30"/>
+          <p:cNvSpPr txBox="1"/>
+          <p:nvPr/>
+        </p:nvSpPr>
+        <p:spPr>
+          <a:xfrm>
+            <a:off x="987552" y="3657600"/>
+            <a:ext cx="1325880" cy="365760"/>
+          </a:xfrm>
+          <a:prstGeom prst="rect">
+            <a:avLst/>
+          </a:prstGeom>
+          <a:noFill/>
+          <a:ln/>
+        </p:spPr>
+        <p:txBody>
+          <a:bodyPr wrap="square" lIns="0" tIns="0" rIns="0" bIns="0" rtlCol="0" anchor="t"/>
+          <a:lstStyle/>
+          <a:p>
+            <a:pPr indent="0" marL="0">
+              <a:buNone/>
+            </a:pPr>
+            <a:r>
+              <a:rPr lang="en-US" sz="900" dirty="0">
+                <a:solidFill>
+                  <a:srgbClr val="5A6B7D"/>
+                </a:solidFill>
+                <a:latin typeface="Calibri" pitchFamily="34" charset="0"/>
+                <a:ea typeface="Calibri" pitchFamily="34" charset="-122"/>
+                <a:cs typeface="Calibri" pitchFamily="34" charset="-120"/>
+              </a:rPr>
+              <a:t>what the graph and data mean</a:t>
+            </a:r>
+            <a:endParaRPr lang="en-US" sz="900" dirty="0"/>
+          </a:p>
+        </p:txBody>
+      </p:sp>
+      <p:sp>
+        <p:nvSpPr>
+          <p:cNvPr id="36" name="Shape 31"/>
+          <p:cNvSpPr/>
+          <p:nvPr/>
+        </p:nvSpPr>
+        <p:spPr>
+          <a:xfrm>
+            <a:off x="2377440" y="3291840"/>
+            <a:ext cx="3520440" cy="329184"/>
           </a:xfrm>
           <a:prstGeom prst="roundRect">
             <a:avLst>
-              <a:gd name="adj" fmla="val 15789"/>
+              <a:gd name="adj" fmla="val 16667"/>
             </a:avLst>
           </a:prstGeom>
           <a:solidFill>
@@ -11803,14 +15304,14 @@
       </p:sp>
       <p:sp>
         <p:nvSpPr>
-          <p:cNvPr id="23" name="Text 20"/>
-          <p:cNvSpPr txBox="1"/>
-          <p:nvPr/>
-        </p:nvSpPr>
-        <p:spPr>
-          <a:xfrm>
-            <a:off x="7635240" y="2523744"/>
-            <a:ext cx="1051560" cy="347472"/>
+          <p:cNvPr id="37" name="Text 32"/>
+          <p:cNvSpPr txBox="1"/>
+          <p:nvPr/>
+        </p:nvSpPr>
+        <p:spPr>
+          <a:xfrm>
+            <a:off x="2468880" y="3291840"/>
+            <a:ext cx="3383280" cy="329184"/>
           </a:xfrm>
           <a:prstGeom prst="rect">
             <a:avLst/>
@@ -11822,11 +15323,11 @@
           <a:bodyPr wrap="square" lIns="0" tIns="0" rIns="0" bIns="0" rtlCol="0" anchor="ctr"/>
           <a:lstStyle/>
           <a:p>
-            <a:pPr algn="ctr" indent="0" marL="0">
-              <a:buNone/>
-            </a:pPr>
-            <a:r>
-              <a:rPr lang="en-US" sz="1050" b="1" dirty="0">
+            <a:pPr indent="0" marL="0">
+              <a:buNone/>
+            </a:pPr>
+            <a:r>
+              <a:rPr lang="en-US" sz="950" b="1" dirty="0">
                 <a:solidFill>
                   <a:srgbClr val="157A50"/>
                 </a:solidFill>
@@ -11834,26 +15335,92 @@
                 <a:ea typeface="Calibri" pitchFamily="34" charset="-122"/>
                 <a:cs typeface="Calibri" pitchFamily="34" charset="-120"/>
               </a:rPr>
-              <a:t>64.80 GHz</a:t>
-            </a:r>
-            <a:endParaRPr lang="en-US" sz="1050" dirty="0"/>
-          </a:p>
-        </p:txBody>
-      </p:sp>
-      <p:sp>
-        <p:nvSpPr>
-          <p:cNvPr id="24" name="Shape 21"/>
+              <a:t>★ IETF RFC 8345 network topology YANG</a:t>
+            </a:r>
+            <a:endParaRPr lang="en-US" sz="950" dirty="0"/>
+          </a:p>
+        </p:txBody>
+      </p:sp>
+      <p:sp>
+        <p:nvSpPr>
+          <p:cNvPr id="38" name="Shape 33"/>
           <p:cNvSpPr/>
           <p:nvPr/>
         </p:nvSpPr>
         <p:spPr>
           <a:xfrm>
-            <a:off x="5212080" y="3154680"/>
-            <a:ext cx="3474720" cy="1600200"/>
+            <a:off x="6035040" y="3291840"/>
+            <a:ext cx="2651760" cy="329184"/>
           </a:xfrm>
           <a:prstGeom prst="roundRect">
             <a:avLst>
-              <a:gd name="adj" fmla="val 4571"/>
+              <a:gd name="adj" fmla="val 16667"/>
+            </a:avLst>
+          </a:prstGeom>
+          <a:solidFill>
+            <a:srgbClr val="FFFFFF"/>
+          </a:solidFill>
+          <a:ln w="12700">
+            <a:solidFill>
+              <a:srgbClr val="E8912D"/>
+            </a:solidFill>
+            <a:prstDash val="dash"/>
+          </a:ln>
+        </p:spPr>
+      </p:sp>
+      <p:sp>
+        <p:nvSpPr>
+          <p:cNvPr id="39" name="Text 34"/>
+          <p:cNvSpPr txBox="1"/>
+          <p:nvPr/>
+        </p:nvSpPr>
+        <p:spPr>
+          <a:xfrm>
+            <a:off x="6126480" y="3291840"/>
+            <a:ext cx="2514600" cy="329184"/>
+          </a:xfrm>
+          <a:prstGeom prst="rect">
+            <a:avLst/>
+          </a:prstGeom>
+          <a:noFill/>
+          <a:ln/>
+        </p:spPr>
+        <p:txBody>
+          <a:bodyPr wrap="square" lIns="0" tIns="0" rIns="0" bIns="0" rtlCol="0" anchor="ctr"/>
+          <a:lstStyle/>
+          <a:p>
+            <a:pPr indent="0" marL="0">
+              <a:buNone/>
+            </a:pPr>
+            <a:r>
+              <a:rPr lang="en-US" sz="950" dirty="0">
+                <a:solidFill>
+                  <a:srgbClr val="1A2B3C"/>
+                </a:solidFill>
+                <a:latin typeface="Calibri" pitchFamily="34" charset="0"/>
+                <a:ea typeface="Calibri" pitchFamily="34" charset="-122"/>
+                <a:cs typeface="Calibri" pitchFamily="34" charset="-120"/>
+              </a:rPr>
+              <a:t>Multi-twin collaboration (TR 28.883)</a:t>
+            </a:r>
+            <a:endParaRPr lang="en-US" sz="950" dirty="0"/>
+          </a:p>
+        </p:txBody>
+      </p:sp>
+      <p:sp>
+        <p:nvSpPr>
+          <p:cNvPr id="40" name="Shape 35"/>
+          <p:cNvSpPr/>
+          <p:nvPr/>
+        </p:nvSpPr>
+        <p:spPr>
+          <a:xfrm>
+            <a:off x="2377440" y="3685032"/>
+            <a:ext cx="3520440" cy="329184"/>
+          </a:xfrm>
+          <a:prstGeom prst="roundRect">
+            <a:avLst>
+              <a:gd name="adj" fmla="val 16667"/>
             </a:avLst>
           </a:prstGeom>
           <a:solidFill>
@@ -11869,30 +15436,30 @@
       </p:sp>
       <p:sp>
         <p:nvSpPr>
-          <p:cNvPr id="25" name="Text 22"/>
-          <p:cNvSpPr txBox="1"/>
-          <p:nvPr/>
-        </p:nvSpPr>
-        <p:spPr>
-          <a:xfrm>
-            <a:off x="5394960" y="3291840"/>
-            <a:ext cx="3108960" cy="228600"/>
-          </a:xfrm>
-          <a:prstGeom prst="rect">
-            <a:avLst/>
-          </a:prstGeom>
-          <a:noFill/>
-          <a:ln/>
-        </p:spPr>
-        <p:txBody>
-          <a:bodyPr wrap="square" lIns="0" tIns="0" rIns="0" bIns="0" rtlCol="0" anchor="t"/>
+          <p:cNvPr id="41" name="Text 36"/>
+          <p:cNvSpPr txBox="1"/>
+          <p:nvPr/>
+        </p:nvSpPr>
+        <p:spPr>
+          <a:xfrm>
+            <a:off x="2468880" y="3685032"/>
+            <a:ext cx="3383280" cy="329184"/>
+          </a:xfrm>
+          <a:prstGeom prst="rect">
+            <a:avLst/>
+          </a:prstGeom>
+          <a:noFill/>
+          <a:ln/>
+        </p:spPr>
+        <p:txBody>
+          <a:bodyPr wrap="square" lIns="0" tIns="0" rIns="0" bIns="0" rtlCol="0" anchor="ctr"/>
           <a:lstStyle/>
           <a:p>
             <a:pPr indent="0" marL="0">
               <a:buNone/>
             </a:pPr>
             <a:r>
-              <a:rPr lang="en-US" sz="1100" b="1" dirty="0">
+              <a:rPr lang="en-US" sz="950" dirty="0">
                 <a:solidFill>
                   <a:srgbClr val="1A2B3C"/>
                 </a:solidFill>
@@ -11900,85 +15467,100 @@
                 <a:ea typeface="Calibri" pitchFamily="34" charset="-122"/>
                 <a:cs typeface="Calibri" pitchFamily="34" charset="-120"/>
               </a:rPr>
-              <a:t>Predicted URLLC latency</a:t>
-            </a:r>
-            <a:endParaRPr lang="en-US" sz="1100" dirty="0"/>
-          </a:p>
-        </p:txBody>
-      </p:sp>
-      <p:sp>
-        <p:nvSpPr>
-          <p:cNvPr id="26" name="Text 23"/>
-          <p:cNvSpPr txBox="1"/>
-          <p:nvPr/>
-        </p:nvSpPr>
-        <p:spPr>
-          <a:xfrm>
-            <a:off x="5394960" y="3538728"/>
-            <a:ext cx="3108960" cy="457200"/>
-          </a:xfrm>
-          <a:prstGeom prst="rect">
-            <a:avLst/>
-          </a:prstGeom>
-          <a:noFill/>
-          <a:ln/>
-        </p:spPr>
-        <p:txBody>
-          <a:bodyPr wrap="square" lIns="0" tIns="0" rIns="0" bIns="0" rtlCol="0" anchor="ctr"/>
-          <a:lstStyle/>
-          <a:p>
-            <a:pPr indent="0" marL="0">
-              <a:buNone/>
-            </a:pPr>
-            <a:r>
-              <a:rPr lang="en-US" sz="2400" b="1" dirty="0">
-                <a:solidFill>
-                  <a:srgbClr val="0FA3B1"/>
-                </a:solidFill>
-                <a:latin typeface="Arial" pitchFamily="34" charset="0"/>
-                <a:ea typeface="Arial" pitchFamily="34" charset="-122"/>
-                <a:cs typeface="Arial" pitchFamily="34" charset="-120"/>
-              </a:rPr>
-              <a:t>1.12 ms</a:t>
-            </a:r>
-            <a:pPr indent="0" marL="0">
-              <a:buNone/>
-            </a:pPr>
-            <a:r>
-              <a:rPr lang="en-US" sz="1100" dirty="0">
-                <a:solidFill>
-                  <a:srgbClr val="5A6B7D"/>
-                </a:solidFill>
-                <a:latin typeface="Arial" pitchFamily="34" charset="0"/>
-                <a:ea typeface="Arial" pitchFamily="34" charset="-122"/>
-                <a:cs typeface="Arial" pitchFamily="34" charset="-120"/>
-              </a:rPr>
-              <a:t>  of a 1.5 ms SLA</a:t>
-            </a:r>
-            <a:endParaRPr lang="en-US" sz="1100" dirty="0"/>
-          </a:p>
-        </p:txBody>
-      </p:sp>
-      <p:sp>
-        <p:nvSpPr>
-          <p:cNvPr id="27" name="Shape 24"/>
+              <a:t>ITU-T Y.3093 data · Y.3094 model domain</a:t>
+            </a:r>
+            <a:endParaRPr lang="en-US" sz="950" dirty="0"/>
+          </a:p>
+        </p:txBody>
+      </p:sp>
+      <p:sp>
+        <p:nvSpPr>
+          <p:cNvPr id="42" name="Shape 37"/>
           <p:cNvSpPr/>
           <p:nvPr/>
         </p:nvSpPr>
         <p:spPr>
           <a:xfrm>
-            <a:off x="5394960" y="4114800"/>
-            <a:ext cx="3108960" cy="146304"/>
-          </a:xfrm>
-          <a:prstGeom prst="rect">
-            <a:avLst/>
+            <a:off x="6035040" y="3685032"/>
+            <a:ext cx="2651760" cy="329184"/>
+          </a:xfrm>
+          <a:prstGeom prst="roundRect">
+            <a:avLst>
+              <a:gd name="adj" fmla="val 16667"/>
+            </a:avLst>
           </a:prstGeom>
           <a:solidFill>
-            <a:srgbClr val="D5DDE5"/>
+            <a:srgbClr val="FFFFFF"/>
           </a:solidFill>
           <a:ln w="12700">
             <a:solidFill>
-              <a:srgbClr val="D5DDE5"/>
+              <a:srgbClr val="E8912D"/>
+            </a:solidFill>
+            <a:prstDash val="dash"/>
+          </a:ln>
+        </p:spPr>
+      </p:sp>
+      <p:sp>
+        <p:nvSpPr>
+          <p:cNvPr id="43" name="Text 38"/>
+          <p:cNvSpPr txBox="1"/>
+          <p:nvPr/>
+        </p:nvSpPr>
+        <p:spPr>
+          <a:xfrm>
+            <a:off x="6126480" y="3685032"/>
+            <a:ext cx="2514600" cy="329184"/>
+          </a:xfrm>
+          <a:prstGeom prst="rect">
+            <a:avLst/>
+          </a:prstGeom>
+          <a:noFill/>
+          <a:ln/>
+        </p:spPr>
+        <p:txBody>
+          <a:bodyPr wrap="square" lIns="0" tIns="0" rIns="0" bIns="0" rtlCol="0" anchor="ctr"/>
+          <a:lstStyle/>
+          <a:p>
+            <a:pPr indent="0" marL="0">
+              <a:buNone/>
+            </a:pPr>
+            <a:r>
+              <a:rPr lang="en-US" sz="950" dirty="0">
+                <a:solidFill>
+                  <a:srgbClr val="1A2B3C"/>
+                </a:solidFill>
+                <a:latin typeface="Calibri" pitchFamily="34" charset="0"/>
+                <a:ea typeface="Calibri" pitchFamily="34" charset="-122"/>
+                <a:cs typeface="Calibri" pitchFamily="34" charset="-120"/>
+              </a:rPr>
+              <a:t>O-RAN nGRG digital-twin research</a:t>
+            </a:r>
+            <a:endParaRPr lang="en-US" sz="950" dirty="0"/>
+          </a:p>
+        </p:txBody>
+      </p:sp>
+      <p:sp>
+        <p:nvSpPr>
+          <p:cNvPr id="44" name="Shape 39"/>
+          <p:cNvSpPr/>
+          <p:nvPr/>
+        </p:nvSpPr>
+        <p:spPr>
+          <a:xfrm>
+            <a:off x="457200" y="4224528"/>
+            <a:ext cx="8229600" cy="548640"/>
+          </a:xfrm>
+          <a:prstGeom prst="roundRect">
+            <a:avLst>
+              <a:gd name="adj" fmla="val 13333"/>
+            </a:avLst>
+          </a:prstGeom>
+          <a:solidFill>
+            <a:srgbClr val="0B1D33"/>
+          </a:solidFill>
+          <a:ln w="12700">
+            <a:solidFill>
+              <a:srgbClr val="0B1D33"/>
             </a:solidFill>
             <a:prstDash val="solid"/>
           </a:ln>
@@ -11986,65 +15568,68 @@
       </p:sp>
       <p:sp>
         <p:nvSpPr>
-          <p:cNvPr id="28" name="Shape 25"/>
-          <p:cNvSpPr/>
-          <p:nvPr/>
-        </p:nvSpPr>
-        <p:spPr>
-          <a:xfrm>
-            <a:off x="5394960" y="4114800"/>
-            <a:ext cx="2321357" cy="146304"/>
-          </a:xfrm>
-          <a:prstGeom prst="rect">
-            <a:avLst/>
-          </a:prstGeom>
-          <a:solidFill>
-            <a:srgbClr val="0FA3B1"/>
-          </a:solidFill>
-          <a:ln w="12700">
-            <a:solidFill>
-              <a:srgbClr val="0FA3B1"/>
-            </a:solidFill>
-            <a:prstDash val="solid"/>
-          </a:ln>
-        </p:spPr>
-      </p:sp>
-      <p:sp>
-        <p:nvSpPr>
-          <p:cNvPr id="29" name="Text 26"/>
-          <p:cNvSpPr txBox="1"/>
-          <p:nvPr/>
-        </p:nvSpPr>
-        <p:spPr>
-          <a:xfrm>
-            <a:off x="5394960" y="4343400"/>
-            <a:ext cx="3108960" cy="228600"/>
-          </a:xfrm>
-          <a:prstGeom prst="rect">
-            <a:avLst/>
-          </a:prstGeom>
-          <a:noFill/>
-          <a:ln/>
-        </p:spPr>
-        <p:txBody>
-          <a:bodyPr wrap="square" lIns="0" tIns="0" rIns="0" bIns="0" rtlCol="0" anchor="t"/>
+          <p:cNvPr id="45" name="Text 40"/>
+          <p:cNvSpPr txBox="1"/>
+          <p:nvPr/>
+        </p:nvSpPr>
+        <p:spPr>
+          <a:xfrm>
+            <a:off x="640080" y="4224528"/>
+            <a:ext cx="7955280" cy="548640"/>
+          </a:xfrm>
+          <a:prstGeom prst="rect">
+            <a:avLst/>
+          </a:prstGeom>
+          <a:noFill/>
+          <a:ln/>
+        </p:spPr>
+        <p:txBody>
+          <a:bodyPr wrap="square" lIns="0" tIns="0" rIns="0" bIns="0" rtlCol="0" anchor="ctr"/>
           <a:lstStyle/>
           <a:p>
             <a:pPr indent="0" marL="0">
               <a:buNone/>
             </a:pPr>
             <a:r>
-              <a:rPr lang="en-US" sz="950" dirty="0">
-                <a:solidFill>
-                  <a:srgbClr val="5A6B7D"/>
+              <a:rPr lang="en-US" sz="1050" b="1" dirty="0">
+                <a:solidFill>
+                  <a:srgbClr val="8FA3B8"/>
                 </a:solidFill>
                 <a:latin typeface="Calibri" pitchFamily="34" charset="0"/>
                 <a:ea typeface="Calibri" pitchFamily="34" charset="-122"/>
                 <a:cs typeface="Calibri" pitchFamily="34" charset="-120"/>
               </a:rPr>
-              <a:t>25% headroom → change passes the latency gate</a:t>
-            </a:r>
-            <a:endParaRPr lang="en-US" sz="950" dirty="0"/>
+              <a:t>Frameworks: </a:t>
+            </a:r>
+            <a:pPr indent="0" marL="0">
+              <a:buNone/>
+            </a:pPr>
+            <a:r>
+              <a:rPr lang="en-US" sz="1050" dirty="0">
+                <a:solidFill>
+                  <a:srgbClr val="FFFFFF"/>
+                </a:solidFill>
+                <a:latin typeface="Calibri" pitchFamily="34" charset="0"/>
+                <a:ea typeface="Calibri" pitchFamily="34" charset="-122"/>
+                <a:cs typeface="Calibri" pitchFamily="34" charset="-120"/>
+              </a:rPr>
+              <a:t>ITU-T Y.3090  ·  ETSI GR ZSM 015  ·  IRTF NMRG twin architecture</a:t>
+            </a:r>
+            <a:pPr indent="0" marL="0">
+              <a:buNone/>
+            </a:pPr>
+            <a:r>
+              <a:rPr lang="en-US" sz="1050" b="1" dirty="0">
+                <a:solidFill>
+                  <a:srgbClr val="6FD3A4"/>
+                </a:solidFill>
+                <a:latin typeface="Calibri" pitchFamily="34" charset="0"/>
+                <a:ea typeface="Calibri" pitchFamily="34" charset="-122"/>
+                <a:cs typeface="Calibri" pitchFamily="34" charset="-120"/>
+              </a:rPr>
+              <a:t>      ★ = our recommended stack</a:t>
+            </a:r>
+            <a:endParaRPr lang="en-US" sz="1050" dirty="0"/>
           </a:p>
         </p:txBody>
       </p:sp>
@@ -12113,7 +15698,7 @@
                 <a:ea typeface="Arial" pitchFamily="34" charset="-122"/>
                 <a:cs typeface="Arial" pitchFamily="34" charset="-120"/>
               </a:rPr>
-              <a:t>ADAPTER ③ · TFS → HARDWARE</a:t>
+              <a:t>AI/ML IN THE LOOP</a:t>
             </a:r>
             <a:endParaRPr lang="en-US" sz="1000" dirty="0"/>
           </a:p>
@@ -12152,7 +15737,7 @@
                 <a:ea typeface="Arial" pitchFamily="34" charset="-122"/>
                 <a:cs typeface="Arial" pitchFamily="34" charset="-120"/>
               </a:rPr>
-              <a:t>Stage → verify → commit, with automatic rollback</a:t>
+              <a:t>Python AI/ML inside simulation runs</a:t>
             </a:r>
             <a:endParaRPr lang="en-US" sz="2400" dirty="0"/>
           </a:p>
@@ -12166,12 +15751,602 @@
         </p:nvSpPr>
         <p:spPr>
           <a:xfrm>
-            <a:off x="457200" y="1188720"/>
-            <a:ext cx="2514600" cy="2514600"/>
+            <a:off x="457200" y="1234440"/>
+            <a:ext cx="1920240" cy="777240"/>
           </a:xfrm>
           <a:prstGeom prst="roundRect">
             <a:avLst>
-              <a:gd name="adj" fmla="val 3636"/>
+              <a:gd name="adj" fmla="val 9412"/>
+            </a:avLst>
+          </a:prstGeom>
+          <a:solidFill>
+            <a:srgbClr val="FFFFFF"/>
+          </a:solidFill>
+          <a:ln w="19050">
+            <a:solidFill>
+              <a:srgbClr val="E8912D"/>
+            </a:solidFill>
+            <a:prstDash val="solid"/>
+          </a:ln>
+        </p:spPr>
+      </p:sp>
+      <p:sp>
+        <p:nvSpPr>
+          <p:cNvPr id="5" name="Shape 3"/>
+          <p:cNvSpPr/>
+          <p:nvPr/>
+        </p:nvSpPr>
+        <p:spPr>
+          <a:xfrm>
+            <a:off x="566928" y="1399032"/>
+            <a:ext cx="420624" cy="420624"/>
+          </a:xfrm>
+          <a:prstGeom prst="ellipse">
+            <a:avLst/>
+          </a:prstGeom>
+          <a:solidFill>
+            <a:srgbClr val="E8912D"/>
+          </a:solidFill>
+          <a:ln w="12700">
+            <a:solidFill>
+              <a:srgbClr val="E8912D"/>
+            </a:solidFill>
+            <a:prstDash val="solid"/>
+          </a:ln>
+        </p:spPr>
+      </p:sp>
+      <p:pic>
+        <p:nvPicPr>
+          <p:cNvPr id="6" name="Image 0" descr="preencoded.png">    </p:cNvPr>
+          <p:cNvPicPr>
+            <a:picLocks noChangeAspect="1"/>
+          </p:cNvPicPr>
+          <p:nvPr/>
+        </p:nvPicPr>
+        <p:blipFill>
+          <a:blip r:embed="rId1"/>
+          <a:stretch>
+            <a:fillRect/>
+          </a:stretch>
+        </p:blipFill>
+        <p:spPr>
+          <a:xfrm>
+            <a:off x="672084" y="1504188"/>
+            <a:ext cx="210312" cy="210312"/>
+          </a:xfrm>
+          <a:prstGeom prst="rect">
+            <a:avLst/>
+          </a:prstGeom>
+        </p:spPr>
+      </p:pic>
+      <p:sp>
+        <p:nvSpPr>
+          <p:cNvPr id="7" name="Text 4"/>
+          <p:cNvSpPr txBox="1"/>
+          <p:nvPr/>
+        </p:nvSpPr>
+        <p:spPr>
+          <a:xfrm>
+            <a:off x="1060704" y="1316736"/>
+            <a:ext cx="1261872" cy="274320"/>
+          </a:xfrm>
+          <a:prstGeom prst="rect">
+            <a:avLst/>
+          </a:prstGeom>
+          <a:noFill/>
+          <a:ln/>
+        </p:spPr>
+        <p:txBody>
+          <a:bodyPr wrap="square" lIns="0" tIns="0" rIns="0" bIns="0" rtlCol="0" anchor="t"/>
+          <a:lstStyle/>
+          <a:p>
+            <a:pPr indent="0" marL="0">
+              <a:buNone/>
+            </a:pPr>
+            <a:r>
+              <a:rPr lang="en-US" sz="1100" b="1" dirty="0">
+                <a:solidFill>
+                  <a:srgbClr val="1A2B3C"/>
+                </a:solidFill>
+                <a:latin typeface="Arial" pitchFamily="34" charset="0"/>
+                <a:ea typeface="Arial" pitchFamily="34" charset="-122"/>
+                <a:cs typeface="Arial" pitchFamily="34" charset="-120"/>
+              </a:rPr>
+              <a:t>ns-3 run</a:t>
+            </a:r>
+            <a:endParaRPr lang="en-US" sz="1100" dirty="0"/>
+          </a:p>
+        </p:txBody>
+      </p:sp>
+      <p:sp>
+        <p:nvSpPr>
+          <p:cNvPr id="8" name="Text 5"/>
+          <p:cNvSpPr txBox="1"/>
+          <p:nvPr/>
+        </p:nvSpPr>
+        <p:spPr>
+          <a:xfrm>
+            <a:off x="1060704" y="1591056"/>
+            <a:ext cx="1261872" cy="347472"/>
+          </a:xfrm>
+          <a:prstGeom prst="rect">
+            <a:avLst/>
+          </a:prstGeom>
+          <a:noFill/>
+          <a:ln/>
+        </p:spPr>
+        <p:txBody>
+          <a:bodyPr wrap="square" lIns="0" tIns="0" rIns="0" bIns="0" rtlCol="0" anchor="t"/>
+          <a:lstStyle/>
+          <a:p>
+            <a:pPr indent="0" marL="0">
+              <a:buNone/>
+            </a:pPr>
+            <a:r>
+              <a:rPr lang="en-US" sz="900" dirty="0">
+                <a:solidFill>
+                  <a:srgbClr val="5A6B7D"/>
+                </a:solidFill>
+                <a:latin typeface="Calibri" pitchFamily="34" charset="0"/>
+                <a:ea typeface="Calibri" pitchFamily="34" charset="-122"/>
+                <a:cs typeface="Calibri" pitchFamily="34" charset="-120"/>
+              </a:rPr>
+              <a:t>twin scenario, µs events</a:t>
+            </a:r>
+            <a:endParaRPr lang="en-US" sz="900" dirty="0"/>
+          </a:p>
+        </p:txBody>
+      </p:sp>
+      <p:sp>
+        <p:nvSpPr>
+          <p:cNvPr id="9" name="Shape 6"/>
+          <p:cNvSpPr/>
+          <p:nvPr/>
+        </p:nvSpPr>
+        <p:spPr>
+          <a:xfrm>
+            <a:off x="3611880" y="1234440"/>
+            <a:ext cx="1920240" cy="777240"/>
+          </a:xfrm>
+          <a:prstGeom prst="roundRect">
+            <a:avLst>
+              <a:gd name="adj" fmla="val 9412"/>
+            </a:avLst>
+          </a:prstGeom>
+          <a:solidFill>
+            <a:srgbClr val="FFFFFF"/>
+          </a:solidFill>
+          <a:ln w="19050">
+            <a:solidFill>
+              <a:srgbClr val="7C5CFF"/>
+            </a:solidFill>
+            <a:prstDash val="solid"/>
+          </a:ln>
+        </p:spPr>
+      </p:sp>
+      <p:sp>
+        <p:nvSpPr>
+          <p:cNvPr id="10" name="Shape 7"/>
+          <p:cNvSpPr/>
+          <p:nvPr/>
+        </p:nvSpPr>
+        <p:spPr>
+          <a:xfrm>
+            <a:off x="3721608" y="1399032"/>
+            <a:ext cx="420624" cy="420624"/>
+          </a:xfrm>
+          <a:prstGeom prst="ellipse">
+            <a:avLst/>
+          </a:prstGeom>
+          <a:solidFill>
+            <a:srgbClr val="7C5CFF"/>
+          </a:solidFill>
+          <a:ln w="12700">
+            <a:solidFill>
+              <a:srgbClr val="7C5CFF"/>
+            </a:solidFill>
+            <a:prstDash val="solid"/>
+          </a:ln>
+        </p:spPr>
+      </p:sp>
+      <p:pic>
+        <p:nvPicPr>
+          <p:cNvPr id="11" name="Image 1" descr="preencoded.png">    </p:cNvPr>
+          <p:cNvPicPr>
+            <a:picLocks noChangeAspect="1"/>
+          </p:cNvPicPr>
+          <p:nvPr/>
+        </p:nvPicPr>
+        <p:blipFill>
+          <a:blip r:embed="rId2"/>
+          <a:stretch>
+            <a:fillRect/>
+          </a:stretch>
+        </p:blipFill>
+        <p:spPr>
+          <a:xfrm>
+            <a:off x="3826764" y="1504188"/>
+            <a:ext cx="210312" cy="210312"/>
+          </a:xfrm>
+          <a:prstGeom prst="rect">
+            <a:avLst/>
+          </a:prstGeom>
+        </p:spPr>
+      </p:pic>
+      <p:sp>
+        <p:nvSpPr>
+          <p:cNvPr id="12" name="Text 8"/>
+          <p:cNvSpPr txBox="1"/>
+          <p:nvPr/>
+        </p:nvSpPr>
+        <p:spPr>
+          <a:xfrm>
+            <a:off x="4215384" y="1316736"/>
+            <a:ext cx="1261872" cy="274320"/>
+          </a:xfrm>
+          <a:prstGeom prst="rect">
+            <a:avLst/>
+          </a:prstGeom>
+          <a:noFill/>
+          <a:ln/>
+        </p:spPr>
+        <p:txBody>
+          <a:bodyPr wrap="square" lIns="0" tIns="0" rIns="0" bIns="0" rtlCol="0" anchor="t"/>
+          <a:lstStyle/>
+          <a:p>
+            <a:pPr indent="0" marL="0">
+              <a:buNone/>
+            </a:pPr>
+            <a:r>
+              <a:rPr lang="en-US" sz="1100" b="1" dirty="0">
+                <a:solidFill>
+                  <a:srgbClr val="1A2B3C"/>
+                </a:solidFill>
+                <a:latin typeface="Arial" pitchFamily="34" charset="0"/>
+                <a:ea typeface="Arial" pitchFamily="34" charset="-122"/>
+                <a:cs typeface="Arial" pitchFamily="34" charset="-120"/>
+              </a:rPr>
+              <a:t>Python agent</a:t>
+            </a:r>
+            <a:endParaRPr lang="en-US" sz="1100" dirty="0"/>
+          </a:p>
+        </p:txBody>
+      </p:sp>
+      <p:sp>
+        <p:nvSpPr>
+          <p:cNvPr id="13" name="Text 9"/>
+          <p:cNvSpPr txBox="1"/>
+          <p:nvPr/>
+        </p:nvSpPr>
+        <p:spPr>
+          <a:xfrm>
+            <a:off x="4215384" y="1591056"/>
+            <a:ext cx="1261872" cy="347472"/>
+          </a:xfrm>
+          <a:prstGeom prst="rect">
+            <a:avLst/>
+          </a:prstGeom>
+          <a:noFill/>
+          <a:ln/>
+        </p:spPr>
+        <p:txBody>
+          <a:bodyPr wrap="square" lIns="0" tIns="0" rIns="0" bIns="0" rtlCol="0" anchor="t"/>
+          <a:lstStyle/>
+          <a:p>
+            <a:pPr indent="0" marL="0">
+              <a:buNone/>
+            </a:pPr>
+            <a:r>
+              <a:rPr lang="en-US" sz="900" dirty="0">
+                <a:solidFill>
+                  <a:srgbClr val="5A6B7D"/>
+                </a:solidFill>
+                <a:latin typeface="Calibri" pitchFamily="34" charset="0"/>
+                <a:ea typeface="Calibri" pitchFamily="34" charset="-122"/>
+                <a:cs typeface="Calibri" pitchFamily="34" charset="-120"/>
+              </a:rPr>
+              <a:t>PyTorch / RL policy</a:t>
+            </a:r>
+            <a:endParaRPr lang="en-US" sz="900" dirty="0"/>
+          </a:p>
+        </p:txBody>
+      </p:sp>
+      <p:sp>
+        <p:nvSpPr>
+          <p:cNvPr id="14" name="Shape 10"/>
+          <p:cNvSpPr/>
+          <p:nvPr/>
+        </p:nvSpPr>
+        <p:spPr>
+          <a:xfrm>
+            <a:off x="6766560" y="1234440"/>
+            <a:ext cx="1920240" cy="777240"/>
+          </a:xfrm>
+          <a:prstGeom prst="roundRect">
+            <a:avLst>
+              <a:gd name="adj" fmla="val 9412"/>
+            </a:avLst>
+          </a:prstGeom>
+          <a:solidFill>
+            <a:srgbClr val="FFFFFF"/>
+          </a:solidFill>
+          <a:ln w="19050">
+            <a:solidFill>
+              <a:srgbClr val="14304F"/>
+            </a:solidFill>
+            <a:prstDash val="solid"/>
+          </a:ln>
+        </p:spPr>
+      </p:sp>
+      <p:sp>
+        <p:nvSpPr>
+          <p:cNvPr id="15" name="Shape 11"/>
+          <p:cNvSpPr/>
+          <p:nvPr/>
+        </p:nvSpPr>
+        <p:spPr>
+          <a:xfrm>
+            <a:off x="6876288" y="1399032"/>
+            <a:ext cx="420624" cy="420624"/>
+          </a:xfrm>
+          <a:prstGeom prst="ellipse">
+            <a:avLst/>
+          </a:prstGeom>
+          <a:solidFill>
+            <a:srgbClr val="14304F"/>
+          </a:solidFill>
+          <a:ln w="12700">
+            <a:solidFill>
+              <a:srgbClr val="14304F"/>
+            </a:solidFill>
+            <a:prstDash val="solid"/>
+          </a:ln>
+        </p:spPr>
+      </p:sp>
+      <p:pic>
+        <p:nvPicPr>
+          <p:cNvPr id="16" name="Image 2" descr="preencoded.png">    </p:cNvPr>
+          <p:cNvPicPr>
+            <a:picLocks noChangeAspect="1"/>
+          </p:cNvPicPr>
+          <p:nvPr/>
+        </p:nvPicPr>
+        <p:blipFill>
+          <a:blip r:embed="rId3"/>
+          <a:stretch>
+            <a:fillRect/>
+          </a:stretch>
+        </p:blipFill>
+        <p:spPr>
+          <a:xfrm>
+            <a:off x="6981444" y="1504188"/>
+            <a:ext cx="210312" cy="210312"/>
+          </a:xfrm>
+          <a:prstGeom prst="rect">
+            <a:avLst/>
+          </a:prstGeom>
+        </p:spPr>
+      </p:pic>
+      <p:sp>
+        <p:nvSpPr>
+          <p:cNvPr id="17" name="Text 12"/>
+          <p:cNvSpPr txBox="1"/>
+          <p:nvPr/>
+        </p:nvSpPr>
+        <p:spPr>
+          <a:xfrm>
+            <a:off x="7370064" y="1316736"/>
+            <a:ext cx="1261872" cy="274320"/>
+          </a:xfrm>
+          <a:prstGeom prst="rect">
+            <a:avLst/>
+          </a:prstGeom>
+          <a:noFill/>
+          <a:ln/>
+        </p:spPr>
+        <p:txBody>
+          <a:bodyPr wrap="square" lIns="0" tIns="0" rIns="0" bIns="0" rtlCol="0" anchor="t"/>
+          <a:lstStyle/>
+          <a:p>
+            <a:pPr indent="0" marL="0">
+              <a:buNone/>
+            </a:pPr>
+            <a:r>
+              <a:rPr lang="en-US" sz="1100" b="1" dirty="0">
+                <a:solidFill>
+                  <a:srgbClr val="1A2B3C"/>
+                </a:solidFill>
+                <a:latin typeface="Arial" pitchFamily="34" charset="0"/>
+                <a:ea typeface="Arial" pitchFamily="34" charset="-122"/>
+                <a:cs typeface="Arial" pitchFamily="34" charset="-120"/>
+              </a:rPr>
+              <a:t>ML registry</a:t>
+            </a:r>
+            <a:endParaRPr lang="en-US" sz="1100" dirty="0"/>
+          </a:p>
+        </p:txBody>
+      </p:sp>
+      <p:sp>
+        <p:nvSpPr>
+          <p:cNvPr id="18" name="Text 13"/>
+          <p:cNvSpPr txBox="1"/>
+          <p:nvPr/>
+        </p:nvSpPr>
+        <p:spPr>
+          <a:xfrm>
+            <a:off x="7370064" y="1591056"/>
+            <a:ext cx="1261872" cy="347472"/>
+          </a:xfrm>
+          <a:prstGeom prst="rect">
+            <a:avLst/>
+          </a:prstGeom>
+          <a:noFill/>
+          <a:ln/>
+        </p:spPr>
+        <p:txBody>
+          <a:bodyPr wrap="square" lIns="0" tIns="0" rIns="0" bIns="0" rtlCol="0" anchor="t"/>
+          <a:lstStyle/>
+          <a:p>
+            <a:pPr indent="0" marL="0">
+              <a:buNone/>
+            </a:pPr>
+            <a:r>
+              <a:rPr lang="en-US" sz="900" dirty="0">
+                <a:solidFill>
+                  <a:srgbClr val="5A6B7D"/>
+                </a:solidFill>
+                <a:latin typeface="Calibri" pitchFamily="34" charset="0"/>
+                <a:ea typeface="Calibri" pitchFamily="34" charset="-122"/>
+                <a:cs typeface="Calibri" pitchFamily="34" charset="-120"/>
+              </a:rPr>
+              <a:t>versioned models, results</a:t>
+            </a:r>
+            <a:endParaRPr lang="en-US" sz="900" dirty="0"/>
+          </a:p>
+        </p:txBody>
+      </p:sp>
+      <p:sp>
+        <p:nvSpPr>
+          <p:cNvPr id="19" name="Shape 14"/>
+          <p:cNvSpPr/>
+          <p:nvPr/>
+        </p:nvSpPr>
+        <p:spPr>
+          <a:xfrm>
+            <a:off x="2423160" y="1627632"/>
+            <a:ext cx="1143000" cy="0"/>
+          </a:xfrm>
+          <a:prstGeom prst="line">
+            <a:avLst/>
+          </a:prstGeom>
+          <a:noFill/>
+          <a:ln w="22225">
+            <a:solidFill>
+              <a:srgbClr val="0B1D33"/>
+            </a:solidFill>
+            <a:prstDash val="solid"/>
+            <a:headEnd type="triangle"/>
+            <a:tailEnd type="triangle"/>
+          </a:ln>
+        </p:spPr>
+      </p:sp>
+      <p:sp>
+        <p:nvSpPr>
+          <p:cNvPr id="20" name="Text 15"/>
+          <p:cNvSpPr txBox="1"/>
+          <p:nvPr/>
+        </p:nvSpPr>
+        <p:spPr>
+          <a:xfrm>
+            <a:off x="2377440" y="1316736"/>
+            <a:ext cx="1234440" cy="274320"/>
+          </a:xfrm>
+          <a:prstGeom prst="rect">
+            <a:avLst/>
+          </a:prstGeom>
+          <a:noFill/>
+          <a:ln/>
+        </p:spPr>
+        <p:txBody>
+          <a:bodyPr wrap="square" lIns="0" tIns="0" rIns="0" bIns="0" rtlCol="0" anchor="t"/>
+          <a:lstStyle/>
+          <a:p>
+            <a:pPr algn="ctr" indent="0" marL="0">
+              <a:buNone/>
+            </a:pPr>
+            <a:r>
+              <a:rPr lang="en-US" sz="850" b="1" dirty="0">
+                <a:solidFill>
+                  <a:srgbClr val="0B1D33"/>
+                </a:solidFill>
+                <a:latin typeface="Calibri" pitchFamily="34" charset="0"/>
+                <a:ea typeface="Calibri" pitchFamily="34" charset="-122"/>
+                <a:cs typeface="Calibri" pitchFamily="34" charset="-120"/>
+              </a:rPr>
+              <a:t>obs · reward ⇄ action</a:t>
+            </a:r>
+            <a:endParaRPr lang="en-US" sz="850" dirty="0"/>
+          </a:p>
+        </p:txBody>
+      </p:sp>
+      <p:sp>
+        <p:nvSpPr>
+          <p:cNvPr id="21" name="Shape 16"/>
+          <p:cNvSpPr/>
+          <p:nvPr/>
+        </p:nvSpPr>
+        <p:spPr>
+          <a:xfrm>
+            <a:off x="5577840" y="1627632"/>
+            <a:ext cx="1143000" cy="0"/>
+          </a:xfrm>
+          <a:prstGeom prst="line">
+            <a:avLst/>
+          </a:prstGeom>
+          <a:noFill/>
+          <a:ln w="22225">
+            <a:solidFill>
+              <a:srgbClr val="0B1D33"/>
+            </a:solidFill>
+            <a:prstDash val="solid"/>
+            <a:headEnd type="triangle"/>
+            <a:tailEnd type="triangle"/>
+          </a:ln>
+        </p:spPr>
+      </p:sp>
+      <p:sp>
+        <p:nvSpPr>
+          <p:cNvPr id="22" name="Text 17"/>
+          <p:cNvSpPr txBox="1"/>
+          <p:nvPr/>
+        </p:nvSpPr>
+        <p:spPr>
+          <a:xfrm>
+            <a:off x="5532120" y="1316736"/>
+            <a:ext cx="1234440" cy="274320"/>
+          </a:xfrm>
+          <a:prstGeom prst="rect">
+            <a:avLst/>
+          </a:prstGeom>
+          <a:noFill/>
+          <a:ln/>
+        </p:spPr>
+        <p:txBody>
+          <a:bodyPr wrap="square" lIns="0" tIns="0" rIns="0" bIns="0" rtlCol="0" anchor="t"/>
+          <a:lstStyle/>
+          <a:p>
+            <a:pPr algn="ctr" indent="0" marL="0">
+              <a:buNone/>
+            </a:pPr>
+            <a:r>
+              <a:rPr lang="en-US" sz="850" b="1" dirty="0">
+                <a:solidFill>
+                  <a:srgbClr val="0B1D33"/>
+                </a:solidFill>
+                <a:latin typeface="Calibri" pitchFamily="34" charset="0"/>
+                <a:ea typeface="Calibri" pitchFamily="34" charset="-122"/>
+                <a:cs typeface="Calibri" pitchFamily="34" charset="-120"/>
+              </a:rPr>
+              <a:t>ONNX · metrics</a:t>
+            </a:r>
+            <a:endParaRPr lang="en-US" sz="850" dirty="0"/>
+          </a:p>
+        </p:txBody>
+      </p:sp>
+      <p:sp>
+        <p:nvSpPr>
+          <p:cNvPr id="23" name="Shape 18"/>
+          <p:cNvSpPr/>
+          <p:nvPr/>
+        </p:nvSpPr>
+        <p:spPr>
+          <a:xfrm>
+            <a:off x="457200" y="2286000"/>
+            <a:ext cx="2651760" cy="2487168"/>
+          </a:xfrm>
+          <a:prstGeom prst="roundRect">
+            <a:avLst>
+              <a:gd name="adj" fmla="val 2941"/>
             </a:avLst>
           </a:prstGeom>
           <a:solidFill>
@@ -12187,181 +16362,201 @@
       </p:sp>
       <p:sp>
         <p:nvSpPr>
-          <p:cNvPr id="5" name="Shape 3"/>
+          <p:cNvPr id="24" name="Text 19"/>
+          <p:cNvSpPr txBox="1"/>
+          <p:nvPr/>
+        </p:nvSpPr>
+        <p:spPr>
+          <a:xfrm>
+            <a:off x="621792" y="2432304"/>
+            <a:ext cx="2377440" cy="182880"/>
+          </a:xfrm>
+          <a:prstGeom prst="rect">
+            <a:avLst/>
+          </a:prstGeom>
+          <a:noFill/>
+          <a:ln/>
+        </p:spPr>
+        <p:txBody>
+          <a:bodyPr wrap="square" lIns="0" tIns="0" rIns="0" bIns="0" rtlCol="0" anchor="t"/>
+          <a:lstStyle/>
+          <a:p>
+            <a:pPr indent="0" marL="0">
+              <a:buNone/>
+            </a:pPr>
+            <a:r>
+              <a:rPr lang="en-US" sz="900" b="1" spc="100" kern="0" dirty="0">
+                <a:solidFill>
+                  <a:srgbClr val="E8912D"/>
+                </a:solidFill>
+                <a:latin typeface="Calibri" pitchFamily="34" charset="0"/>
+                <a:ea typeface="Calibri" pitchFamily="34" charset="-122"/>
+                <a:cs typeface="Calibri" pitchFamily="34" charset="-120"/>
+              </a:rPr>
+              <a:t>1  COUPLE IN-RUN</a:t>
+            </a:r>
+            <a:endParaRPr lang="en-US" sz="900" dirty="0"/>
+          </a:p>
+        </p:txBody>
+      </p:sp>
+      <p:sp>
+        <p:nvSpPr>
+          <p:cNvPr id="25" name="Text 20"/>
+          <p:cNvSpPr txBox="1"/>
+          <p:nvPr/>
+        </p:nvSpPr>
+        <p:spPr>
+          <a:xfrm>
+            <a:off x="621792" y="2651760"/>
+            <a:ext cx="2377440" cy="274320"/>
+          </a:xfrm>
+          <a:prstGeom prst="rect">
+            <a:avLst/>
+          </a:prstGeom>
+          <a:noFill/>
+          <a:ln/>
+        </p:spPr>
+        <p:txBody>
+          <a:bodyPr wrap="square" lIns="0" tIns="0" rIns="0" bIns="0" rtlCol="0" anchor="t"/>
+          <a:lstStyle/>
+          <a:p>
+            <a:pPr indent="0" marL="0">
+              <a:buNone/>
+            </a:pPr>
+            <a:r>
+              <a:rPr lang="en-US" sz="1150" b="1" dirty="0">
+                <a:solidFill>
+                  <a:srgbClr val="0B1D33"/>
+                </a:solidFill>
+                <a:latin typeface="Arial" pitchFamily="34" charset="0"/>
+                <a:ea typeface="Arial" pitchFamily="34" charset="-122"/>
+                <a:cs typeface="Arial" pitchFamily="34" charset="-120"/>
+              </a:rPr>
+              <a:t>Step the agent in-run</a:t>
+            </a:r>
+            <a:endParaRPr lang="en-US" sz="1150" dirty="0"/>
+          </a:p>
+        </p:txBody>
+      </p:sp>
+      <p:sp>
+        <p:nvSpPr>
+          <p:cNvPr id="26" name="Shape 21"/>
           <p:cNvSpPr/>
           <p:nvPr/>
         </p:nvSpPr>
         <p:spPr>
           <a:xfrm>
-            <a:off x="640080" y="1371600"/>
-            <a:ext cx="457200" cy="457200"/>
-          </a:xfrm>
-          <a:prstGeom prst="ellipse">
-            <a:avLst/>
+            <a:off x="594360" y="3063240"/>
+            <a:ext cx="2377440" cy="475488"/>
+          </a:xfrm>
+          <a:prstGeom prst="roundRect">
+            <a:avLst>
+              <a:gd name="adj" fmla="val 11538"/>
+            </a:avLst>
           </a:prstGeom>
           <a:solidFill>
-            <a:srgbClr val="7C5CFF"/>
+            <a:srgbClr val="DDF3E8"/>
           </a:solidFill>
           <a:ln w="12700">
             <a:solidFill>
-              <a:srgbClr val="7C5CFF"/>
+              <a:srgbClr val="DDF3E8"/>
             </a:solidFill>
             <a:prstDash val="solid"/>
           </a:ln>
         </p:spPr>
       </p:sp>
-      <p:pic>
-        <p:nvPicPr>
-          <p:cNvPr id="6" name="Image 0" descr="preencoded.png">    </p:cNvPr>
-          <p:cNvPicPr>
-            <a:picLocks noChangeAspect="1"/>
-          </p:cNvPicPr>
-          <p:nvPr/>
-        </p:nvPicPr>
-        <p:blipFill>
-          <a:blip r:embed="rId1"/>
-          <a:stretch>
-            <a:fillRect/>
-          </a:stretch>
-        </p:blipFill>
-        <p:spPr>
-          <a:xfrm>
-            <a:off x="754380" y="1485900"/>
-            <a:ext cx="228600" cy="228600"/>
-          </a:xfrm>
-          <a:prstGeom prst="rect">
-            <a:avLst/>
-          </a:prstGeom>
-        </p:spPr>
-      </p:pic>
-      <p:sp>
-        <p:nvSpPr>
-          <p:cNvPr id="7" name="Text 4"/>
-          <p:cNvSpPr txBox="1"/>
-          <p:nvPr/>
-        </p:nvSpPr>
-        <p:spPr>
-          <a:xfrm>
-            <a:off x="1234440" y="1389888"/>
-            <a:ext cx="1645920" cy="182880"/>
-          </a:xfrm>
-          <a:prstGeom prst="rect">
-            <a:avLst/>
-          </a:prstGeom>
-          <a:noFill/>
-          <a:ln/>
-        </p:spPr>
-        <p:txBody>
-          <a:bodyPr wrap="square" lIns="0" tIns="0" rIns="0" bIns="0" rtlCol="0" anchor="t"/>
+      <p:sp>
+        <p:nvSpPr>
+          <p:cNvPr id="27" name="Text 22"/>
+          <p:cNvSpPr txBox="1"/>
+          <p:nvPr/>
+        </p:nvSpPr>
+        <p:spPr>
+          <a:xfrm>
+            <a:off x="685800" y="3063240"/>
+            <a:ext cx="2240280" cy="475488"/>
+          </a:xfrm>
+          <a:prstGeom prst="rect">
+            <a:avLst/>
+          </a:prstGeom>
+          <a:noFill/>
+          <a:ln/>
+        </p:spPr>
+        <p:txBody>
+          <a:bodyPr wrap="square" lIns="0" tIns="0" rIns="0" bIns="0" rtlCol="0" anchor="ctr"/>
           <a:lstStyle/>
           <a:p>
             <a:pPr indent="0" marL="0">
               <a:buNone/>
             </a:pPr>
             <a:r>
-              <a:rPr lang="en-US" sz="900" b="1" spc="50" kern="0" dirty="0">
-                <a:solidFill>
-                  <a:srgbClr val="7C5CFF"/>
+              <a:rPr lang="en-US" sz="950" b="1" dirty="0">
+                <a:solidFill>
+                  <a:srgbClr val="157A50"/>
                 </a:solidFill>
                 <a:latin typeface="Calibri" pitchFamily="34" charset="0"/>
                 <a:ea typeface="Calibri" pitchFamily="34" charset="-122"/>
                 <a:cs typeface="Calibri" pitchFamily="34" charset="-120"/>
               </a:rPr>
-              <a:t>STAGE 1</a:t>
-            </a:r>
-            <a:endParaRPr lang="en-US" sz="900" dirty="0"/>
-          </a:p>
-        </p:txBody>
-      </p:sp>
-      <p:sp>
-        <p:nvSpPr>
-          <p:cNvPr id="8" name="Text 5"/>
-          <p:cNvSpPr txBox="1"/>
-          <p:nvPr/>
-        </p:nvSpPr>
-        <p:spPr>
-          <a:xfrm>
-            <a:off x="1234440" y="1572768"/>
-            <a:ext cx="1645920" cy="274320"/>
-          </a:xfrm>
-          <a:prstGeom prst="rect">
-            <a:avLst/>
-          </a:prstGeom>
-          <a:noFill/>
-          <a:ln/>
-        </p:spPr>
-        <p:txBody>
-          <a:bodyPr wrap="square" lIns="0" tIns="0" rIns="0" bIns="0" rtlCol="0" anchor="t"/>
+              <a:t>★ ns3-ai shared memory (≈100× faster IPC)</a:t>
+            </a:r>
+            <a:endParaRPr lang="en-US" sz="950" dirty="0"/>
+          </a:p>
+        </p:txBody>
+      </p:sp>
+      <p:sp>
+        <p:nvSpPr>
+          <p:cNvPr id="28" name="Shape 23"/>
+          <p:cNvSpPr/>
+          <p:nvPr/>
+        </p:nvSpPr>
+        <p:spPr>
+          <a:xfrm>
+            <a:off x="594360" y="3630168"/>
+            <a:ext cx="2377440" cy="475488"/>
+          </a:xfrm>
+          <a:prstGeom prst="roundRect">
+            <a:avLst>
+              <a:gd name="adj" fmla="val 11538"/>
+            </a:avLst>
+          </a:prstGeom>
+          <a:solidFill>
+            <a:srgbClr val="FFFFFF"/>
+          </a:solidFill>
+          <a:ln w="12700">
+            <a:solidFill>
+              <a:srgbClr val="FFFFFF"/>
+            </a:solidFill>
+            <a:prstDash val="solid"/>
+          </a:ln>
+        </p:spPr>
+      </p:sp>
+      <p:sp>
+        <p:nvSpPr>
+          <p:cNvPr id="29" name="Text 24"/>
+          <p:cNvSpPr txBox="1"/>
+          <p:nvPr/>
+        </p:nvSpPr>
+        <p:spPr>
+          <a:xfrm>
+            <a:off x="685800" y="3630168"/>
+            <a:ext cx="2240280" cy="475488"/>
+          </a:xfrm>
+          <a:prstGeom prst="rect">
+            <a:avLst/>
+          </a:prstGeom>
+          <a:noFill/>
+          <a:ln/>
+        </p:spPr>
+        <p:txBody>
+          <a:bodyPr wrap="square" lIns="0" tIns="0" rIns="0" bIns="0" rtlCol="0" anchor="ctr"/>
           <a:lstStyle/>
           <a:p>
             <a:pPr indent="0" marL="0">
               <a:buNone/>
             </a:pPr>
             <a:r>
-              <a:rPr lang="en-US" sz="1150" b="1" dirty="0">
-                <a:solidFill>
-                  <a:srgbClr val="0B1D33"/>
-                </a:solidFill>
-                <a:latin typeface="Arial" pitchFamily="34" charset="0"/>
-                <a:ea typeface="Arial" pitchFamily="34" charset="-122"/>
-                <a:cs typeface="Arial" pitchFamily="34" charset="-120"/>
-              </a:rPr>
-              <a:t>Stage the candidate</a:t>
-            </a:r>
-            <a:endParaRPr lang="en-US" sz="1150" dirty="0"/>
-          </a:p>
-        </p:txBody>
-      </p:sp>
-      <p:pic>
-        <p:nvPicPr>
-          <p:cNvPr id="9" name="Image 1" descr="preencoded.png">    </p:cNvPr>
-          <p:cNvPicPr>
-            <a:picLocks noChangeAspect="1"/>
-          </p:cNvPicPr>
-          <p:nvPr/>
-        </p:nvPicPr>
-        <p:blipFill>
-          <a:blip r:embed="rId2"/>
-          <a:stretch>
-            <a:fillRect/>
-          </a:stretch>
-        </p:blipFill>
-        <p:spPr>
-          <a:xfrm>
-            <a:off x="658368" y="2112264"/>
-            <a:ext cx="164592" cy="164592"/>
-          </a:xfrm>
-          <a:prstGeom prst="rect">
-            <a:avLst/>
-          </a:prstGeom>
-        </p:spPr>
-      </p:pic>
-      <p:sp>
-        <p:nvSpPr>
-          <p:cNvPr id="10" name="Text 6"/>
-          <p:cNvSpPr txBox="1"/>
-          <p:nvPr/>
-        </p:nvSpPr>
-        <p:spPr>
-          <a:xfrm>
-            <a:off x="914400" y="2057400"/>
-            <a:ext cx="1920240" cy="329184"/>
-          </a:xfrm>
-          <a:prstGeom prst="rect">
-            <a:avLst/>
-          </a:prstGeom>
-          <a:noFill/>
-          <a:ln/>
-        </p:spPr>
-        <p:txBody>
-          <a:bodyPr wrap="square" lIns="0" tIns="0" rIns="0" bIns="0" rtlCol="0" anchor="t"/>
-          <a:lstStyle/>
-          <a:p>
-            <a:pPr indent="0" marL="0">
-              <a:buNone/>
-            </a:pPr>
-            <a:r>
-              <a:rPr lang="en-US" sz="1050" dirty="0">
+              <a:rPr lang="en-US" sz="950" dirty="0">
                 <a:solidFill>
                   <a:srgbClr val="1A2B3C"/>
                 </a:solidFill>
@@ -12369,177 +16564,65 @@
                 <a:ea typeface="Calibri" pitchFamily="34" charset="-122"/>
                 <a:cs typeface="Calibri" pitchFamily="34" charset="-120"/>
               </a:rPr>
-              <a:t>Decision engine output becomes YANG config</a:t>
-            </a:r>
-            <a:endParaRPr lang="en-US" sz="1050" dirty="0"/>
-          </a:p>
-        </p:txBody>
-      </p:sp>
-      <p:pic>
-        <p:nvPicPr>
-          <p:cNvPr id="11" name="Image 2" descr="preencoded.png">    </p:cNvPr>
-          <p:cNvPicPr>
-            <a:picLocks noChangeAspect="1"/>
-          </p:cNvPicPr>
-          <p:nvPr/>
-        </p:nvPicPr>
-        <p:blipFill>
-          <a:blip r:embed="rId3"/>
-          <a:stretch>
-            <a:fillRect/>
-          </a:stretch>
-        </p:blipFill>
-        <p:spPr>
-          <a:xfrm>
-            <a:off x="658368" y="2496312"/>
-            <a:ext cx="164592" cy="164592"/>
-          </a:xfrm>
-          <a:prstGeom prst="rect">
-            <a:avLst/>
-          </a:prstGeom>
-        </p:spPr>
-      </p:pic>
-      <p:sp>
-        <p:nvSpPr>
-          <p:cNvPr id="12" name="Text 7"/>
-          <p:cNvSpPr txBox="1"/>
-          <p:nvPr/>
-        </p:nvSpPr>
-        <p:spPr>
-          <a:xfrm>
-            <a:off x="914400" y="2441448"/>
-            <a:ext cx="1920240" cy="329184"/>
-          </a:xfrm>
-          <a:prstGeom prst="rect">
-            <a:avLst/>
-          </a:prstGeom>
-          <a:noFill/>
-          <a:ln/>
-        </p:spPr>
-        <p:txBody>
-          <a:bodyPr wrap="square" lIns="0" tIns="0" rIns="0" bIns="0" rtlCol="0" anchor="t"/>
+              <a:t>Gymnasium env API · ns3-gym (ZMQ)</a:t>
+            </a:r>
+            <a:endParaRPr lang="en-US" sz="950" dirty="0"/>
+          </a:p>
+        </p:txBody>
+      </p:sp>
+      <p:sp>
+        <p:nvSpPr>
+          <p:cNvPr id="30" name="Text 25"/>
+          <p:cNvSpPr txBox="1"/>
+          <p:nvPr/>
+        </p:nvSpPr>
+        <p:spPr>
+          <a:xfrm>
+            <a:off x="621792" y="4297680"/>
+            <a:ext cx="2377440" cy="320040"/>
+          </a:xfrm>
+          <a:prstGeom prst="rect">
+            <a:avLst/>
+          </a:prstGeom>
+          <a:noFill/>
+          <a:ln/>
+        </p:spPr>
+        <p:txBody>
+          <a:bodyPr wrap="square" lIns="0" tIns="0" rIns="0" bIns="0" rtlCol="0" anchor="ctr"/>
           <a:lstStyle/>
           <a:p>
             <a:pPr indent="0" marL="0">
               <a:buNone/>
             </a:pPr>
             <a:r>
-              <a:rPr lang="en-US" sz="1050" dirty="0">
-                <a:solidFill>
-                  <a:srgbClr val="1A2B3C"/>
+              <a:rPr lang="en-US" sz="900" i="1" dirty="0">
+                <a:solidFill>
+                  <a:srgbClr val="5A6B7D"/>
                 </a:solidFill>
                 <a:latin typeface="Calibri" pitchFamily="34" charset="0"/>
                 <a:ea typeface="Calibri" pitchFamily="34" charset="-122"/>
                 <a:cs typeface="Calibri" pitchFamily="34" charset="-120"/>
               </a:rPr>
-              <a:t>Held in the TFS candidate datastore, not live</a:t>
-            </a:r>
-            <a:endParaRPr lang="en-US" sz="1050" dirty="0"/>
-          </a:p>
-        </p:txBody>
-      </p:sp>
-      <p:pic>
-        <p:nvPicPr>
-          <p:cNvPr id="13" name="Image 3" descr="preencoded.png">    </p:cNvPr>
-          <p:cNvPicPr>
-            <a:picLocks noChangeAspect="1"/>
-          </p:cNvPicPr>
-          <p:nvPr/>
-        </p:nvPicPr>
-        <p:blipFill>
-          <a:blip r:embed="rId4"/>
-          <a:stretch>
-            <a:fillRect/>
-          </a:stretch>
-        </p:blipFill>
-        <p:spPr>
-          <a:xfrm>
-            <a:off x="658368" y="2880360"/>
-            <a:ext cx="164592" cy="164592"/>
-          </a:xfrm>
-          <a:prstGeom prst="rect">
-            <a:avLst/>
-          </a:prstGeom>
-        </p:spPr>
-      </p:pic>
-      <p:sp>
-        <p:nvSpPr>
-          <p:cNvPr id="14" name="Text 8"/>
-          <p:cNvSpPr txBox="1"/>
-          <p:nvPr/>
-        </p:nvSpPr>
-        <p:spPr>
-          <a:xfrm>
-            <a:off x="914400" y="2825496"/>
-            <a:ext cx="1920240" cy="329184"/>
-          </a:xfrm>
-          <a:prstGeom prst="rect">
-            <a:avLst/>
-          </a:prstGeom>
-          <a:noFill/>
-          <a:ln/>
-        </p:spPr>
-        <p:txBody>
-          <a:bodyPr wrap="square" lIns="0" tIns="0" rIns="0" bIns="0" rtlCol="0" anchor="t"/>
-          <a:lstStyle/>
-          <a:p>
-            <a:pPr indent="0" marL="0">
-              <a:buNone/>
-            </a:pPr>
-            <a:r>
-              <a:rPr lang="en-US" sz="1050" dirty="0">
-                <a:solidFill>
-                  <a:srgbClr val="1A2B3C"/>
-                </a:solidFill>
-                <a:latin typeface="Calibri" pitchFamily="34" charset="0"/>
-                <a:ea typeface="Calibri" pitchFamily="34" charset="-122"/>
-                <a:cs typeface="Calibri" pitchFamily="34" charset="-120"/>
-              </a:rPr>
-              <a:t>Diff checked against the running config</a:t>
-            </a:r>
-            <a:endParaRPr lang="en-US" sz="1050" dirty="0"/>
-          </a:p>
-        </p:txBody>
-      </p:sp>
-      <p:sp>
-        <p:nvSpPr>
-          <p:cNvPr id="15" name="Shape 9"/>
+              <a:t>Open-source, de facto: no SDO standard</a:t>
+            </a:r>
+            <a:endParaRPr lang="en-US" sz="900" dirty="0"/>
+          </a:p>
+        </p:txBody>
+      </p:sp>
+      <p:sp>
+        <p:nvSpPr>
+          <p:cNvPr id="31" name="Shape 26"/>
           <p:cNvSpPr/>
           <p:nvPr/>
         </p:nvSpPr>
         <p:spPr>
           <a:xfrm>
-            <a:off x="3017520" y="2446020"/>
-            <a:ext cx="251460" cy="0"/>
-          </a:xfrm>
-          <a:prstGeom prst="line">
-            <a:avLst/>
-          </a:prstGeom>
-          <a:noFill/>
-          <a:ln w="22225">
-            <a:solidFill>
-              <a:srgbClr val="0B1D33"/>
-            </a:solidFill>
-            <a:prstDash val="solid"/>
-            <a:headEnd type="none"/>
-            <a:tailEnd type="triangle"/>
-          </a:ln>
-        </p:spPr>
-      </p:sp>
-      <p:sp>
-        <p:nvSpPr>
-          <p:cNvPr id="16" name="Shape 10"/>
-          <p:cNvSpPr/>
-          <p:nvPr/>
-        </p:nvSpPr>
-        <p:spPr>
-          <a:xfrm>
-            <a:off x="3314700" y="1188720"/>
-            <a:ext cx="2514600" cy="2514600"/>
+            <a:off x="3246120" y="2286000"/>
+            <a:ext cx="2651760" cy="2487168"/>
           </a:xfrm>
           <a:prstGeom prst="roundRect">
             <a:avLst>
-              <a:gd name="adj" fmla="val 3636"/>
+              <a:gd name="adj" fmla="val 2941"/>
             </a:avLst>
           </a:prstGeom>
           <a:solidFill>
@@ -12555,181 +16638,201 @@
       </p:sp>
       <p:sp>
         <p:nvSpPr>
-          <p:cNvPr id="17" name="Shape 11"/>
+          <p:cNvPr id="32" name="Text 27"/>
+          <p:cNvSpPr txBox="1"/>
+          <p:nvPr/>
+        </p:nvSpPr>
+        <p:spPr>
+          <a:xfrm>
+            <a:off x="3410712" y="2432304"/>
+            <a:ext cx="2377440" cy="182880"/>
+          </a:xfrm>
+          <a:prstGeom prst="rect">
+            <a:avLst/>
+          </a:prstGeom>
+          <a:noFill/>
+          <a:ln/>
+        </p:spPr>
+        <p:txBody>
+          <a:bodyPr wrap="square" lIns="0" tIns="0" rIns="0" bIns="0" rtlCol="0" anchor="t"/>
+          <a:lstStyle/>
+          <a:p>
+            <a:pPr indent="0" marL="0">
+              <a:buNone/>
+            </a:pPr>
+            <a:r>
+              <a:rPr lang="en-US" sz="900" b="1" spc="100" kern="0" dirty="0">
+                <a:solidFill>
+                  <a:srgbClr val="7C5CFF"/>
+                </a:solidFill>
+                <a:latin typeface="Calibri" pitchFamily="34" charset="0"/>
+                <a:ea typeface="Calibri" pitchFamily="34" charset="-122"/>
+                <a:cs typeface="Calibri" pitchFamily="34" charset="-120"/>
+              </a:rPr>
+              <a:t>2  PACKAGE &amp; SERVE</a:t>
+            </a:r>
+            <a:endParaRPr lang="en-US" sz="900" dirty="0"/>
+          </a:p>
+        </p:txBody>
+      </p:sp>
+      <p:sp>
+        <p:nvSpPr>
+          <p:cNvPr id="33" name="Text 28"/>
+          <p:cNvSpPr txBox="1"/>
+          <p:nvPr/>
+        </p:nvSpPr>
+        <p:spPr>
+          <a:xfrm>
+            <a:off x="3410712" y="2651760"/>
+            <a:ext cx="2377440" cy="274320"/>
+          </a:xfrm>
+          <a:prstGeom prst="rect">
+            <a:avLst/>
+          </a:prstGeom>
+          <a:noFill/>
+          <a:ln/>
+        </p:spPr>
+        <p:txBody>
+          <a:bodyPr wrap="square" lIns="0" tIns="0" rIns="0" bIns="0" rtlCol="0" anchor="t"/>
+          <a:lstStyle/>
+          <a:p>
+            <a:pPr indent="0" marL="0">
+              <a:buNone/>
+            </a:pPr>
+            <a:r>
+              <a:rPr lang="en-US" sz="1150" b="1" dirty="0">
+                <a:solidFill>
+                  <a:srgbClr val="0B1D33"/>
+                </a:solidFill>
+                <a:latin typeface="Arial" pitchFamily="34" charset="0"/>
+                <a:ea typeface="Arial" pitchFamily="34" charset="-122"/>
+                <a:cs typeface="Arial" pitchFamily="34" charset="-120"/>
+              </a:rPr>
+              <a:t>Same model in twin and network</a:t>
+            </a:r>
+            <a:endParaRPr lang="en-US" sz="1150" dirty="0"/>
+          </a:p>
+        </p:txBody>
+      </p:sp>
+      <p:sp>
+        <p:nvSpPr>
+          <p:cNvPr id="34" name="Shape 29"/>
           <p:cNvSpPr/>
           <p:nvPr/>
         </p:nvSpPr>
         <p:spPr>
           <a:xfrm>
-            <a:off x="3497580" y="1371600"/>
-            <a:ext cx="457200" cy="457200"/>
-          </a:xfrm>
-          <a:prstGeom prst="ellipse">
-            <a:avLst/>
+            <a:off x="3383280" y="3063240"/>
+            <a:ext cx="2377440" cy="475488"/>
+          </a:xfrm>
+          <a:prstGeom prst="roundRect">
+            <a:avLst>
+              <a:gd name="adj" fmla="val 11538"/>
+            </a:avLst>
           </a:prstGeom>
           <a:solidFill>
-            <a:srgbClr val="0FA3B1"/>
+            <a:srgbClr val="DDF3E8"/>
           </a:solidFill>
           <a:ln w="12700">
             <a:solidFill>
-              <a:srgbClr val="0FA3B1"/>
+              <a:srgbClr val="DDF3E8"/>
             </a:solidFill>
             <a:prstDash val="solid"/>
           </a:ln>
         </p:spPr>
       </p:sp>
-      <p:pic>
-        <p:nvPicPr>
-          <p:cNvPr id="18" name="Image 4" descr="preencoded.png">    </p:cNvPr>
-          <p:cNvPicPr>
-            <a:picLocks noChangeAspect="1"/>
-          </p:cNvPicPr>
-          <p:nvPr/>
-        </p:nvPicPr>
-        <p:blipFill>
-          <a:blip r:embed="rId5"/>
-          <a:stretch>
-            <a:fillRect/>
-          </a:stretch>
-        </p:blipFill>
-        <p:spPr>
-          <a:xfrm>
-            <a:off x="3611880" y="1485900"/>
-            <a:ext cx="228600" cy="228600"/>
-          </a:xfrm>
-          <a:prstGeom prst="rect">
-            <a:avLst/>
-          </a:prstGeom>
-        </p:spPr>
-      </p:pic>
-      <p:sp>
-        <p:nvSpPr>
-          <p:cNvPr id="19" name="Text 12"/>
-          <p:cNvSpPr txBox="1"/>
-          <p:nvPr/>
-        </p:nvSpPr>
-        <p:spPr>
-          <a:xfrm>
-            <a:off x="4091940" y="1389888"/>
-            <a:ext cx="1645920" cy="182880"/>
-          </a:xfrm>
-          <a:prstGeom prst="rect">
-            <a:avLst/>
-          </a:prstGeom>
-          <a:noFill/>
-          <a:ln/>
-        </p:spPr>
-        <p:txBody>
-          <a:bodyPr wrap="square" lIns="0" tIns="0" rIns="0" bIns="0" rtlCol="0" anchor="t"/>
+      <p:sp>
+        <p:nvSpPr>
+          <p:cNvPr id="35" name="Text 30"/>
+          <p:cNvSpPr txBox="1"/>
+          <p:nvPr/>
+        </p:nvSpPr>
+        <p:spPr>
+          <a:xfrm>
+            <a:off x="3474720" y="3063240"/>
+            <a:ext cx="2240280" cy="475488"/>
+          </a:xfrm>
+          <a:prstGeom prst="rect">
+            <a:avLst/>
+          </a:prstGeom>
+          <a:noFill/>
+          <a:ln/>
+        </p:spPr>
+        <p:txBody>
+          <a:bodyPr wrap="square" lIns="0" tIns="0" rIns="0" bIns="0" rtlCol="0" anchor="ctr"/>
           <a:lstStyle/>
           <a:p>
             <a:pPr indent="0" marL="0">
               <a:buNone/>
             </a:pPr>
             <a:r>
-              <a:rPr lang="en-US" sz="900" b="1" spc="50" kern="0" dirty="0">
-                <a:solidFill>
-                  <a:srgbClr val="0FA3B1"/>
+              <a:rPr lang="en-US" sz="950" b="1" dirty="0">
+                <a:solidFill>
+                  <a:srgbClr val="157A50"/>
                 </a:solidFill>
                 <a:latin typeface="Calibri" pitchFamily="34" charset="0"/>
                 <a:ea typeface="Calibri" pitchFamily="34" charset="-122"/>
                 <a:cs typeface="Calibri" pitchFamily="34" charset="-120"/>
               </a:rPr>
-              <a:t>STAGE 2 · TS 28.561</a:t>
-            </a:r>
-            <a:endParaRPr lang="en-US" sz="900" dirty="0"/>
-          </a:p>
-        </p:txBody>
-      </p:sp>
-      <p:sp>
-        <p:nvSpPr>
-          <p:cNvPr id="20" name="Text 13"/>
-          <p:cNvSpPr txBox="1"/>
-          <p:nvPr/>
-        </p:nvSpPr>
-        <p:spPr>
-          <a:xfrm>
-            <a:off x="4091940" y="1572768"/>
-            <a:ext cx="1645920" cy="274320"/>
-          </a:xfrm>
-          <a:prstGeom prst="rect">
-            <a:avLst/>
-          </a:prstGeom>
-          <a:noFill/>
-          <a:ln/>
-        </p:spPr>
-        <p:txBody>
-          <a:bodyPr wrap="square" lIns="0" tIns="0" rIns="0" bIns="0" rtlCol="0" anchor="t"/>
+              <a:t>★ ONNX model format</a:t>
+            </a:r>
+            <a:endParaRPr lang="en-US" sz="950" dirty="0"/>
+          </a:p>
+        </p:txBody>
+      </p:sp>
+      <p:sp>
+        <p:nvSpPr>
+          <p:cNvPr id="36" name="Shape 31"/>
+          <p:cNvSpPr/>
+          <p:nvPr/>
+        </p:nvSpPr>
+        <p:spPr>
+          <a:xfrm>
+            <a:off x="3383280" y="3630168"/>
+            <a:ext cx="2377440" cy="475488"/>
+          </a:xfrm>
+          <a:prstGeom prst="roundRect">
+            <a:avLst>
+              <a:gd name="adj" fmla="val 11538"/>
+            </a:avLst>
+          </a:prstGeom>
+          <a:solidFill>
+            <a:srgbClr val="FFFFFF"/>
+          </a:solidFill>
+          <a:ln w="12700">
+            <a:solidFill>
+              <a:srgbClr val="FFFFFF"/>
+            </a:solidFill>
+            <a:prstDash val="solid"/>
+          </a:ln>
+        </p:spPr>
+      </p:sp>
+      <p:sp>
+        <p:nvSpPr>
+          <p:cNvPr id="37" name="Text 32"/>
+          <p:cNvSpPr txBox="1"/>
+          <p:nvPr/>
+        </p:nvSpPr>
+        <p:spPr>
+          <a:xfrm>
+            <a:off x="3474720" y="3630168"/>
+            <a:ext cx="2240280" cy="475488"/>
+          </a:xfrm>
+          <a:prstGeom prst="rect">
+            <a:avLst/>
+          </a:prstGeom>
+          <a:noFill/>
+          <a:ln/>
+        </p:spPr>
+        <p:txBody>
+          <a:bodyPr wrap="square" lIns="0" tIns="0" rIns="0" bIns="0" rtlCol="0" anchor="ctr"/>
           <a:lstStyle/>
           <a:p>
             <a:pPr indent="0" marL="0">
               <a:buNone/>
             </a:pPr>
             <a:r>
-              <a:rPr lang="en-US" sz="1150" b="1" dirty="0">
-                <a:solidFill>
-                  <a:srgbClr val="0B1D33"/>
-                </a:solidFill>
-                <a:latin typeface="Arial" pitchFamily="34" charset="0"/>
-                <a:ea typeface="Arial" pitchFamily="34" charset="-122"/>
-                <a:cs typeface="Arial" pitchFamily="34" charset="-120"/>
-              </a:rPr>
-              <a:t>Pre-flight gates</a:t>
-            </a:r>
-            <a:endParaRPr lang="en-US" sz="1150" dirty="0"/>
-          </a:p>
-        </p:txBody>
-      </p:sp>
-      <p:pic>
-        <p:nvPicPr>
-          <p:cNvPr id="21" name="Image 5" descr="preencoded.png">    </p:cNvPr>
-          <p:cNvPicPr>
-            <a:picLocks noChangeAspect="1"/>
-          </p:cNvPicPr>
-          <p:nvPr/>
-        </p:nvPicPr>
-        <p:blipFill>
-          <a:blip r:embed="rId6"/>
-          <a:stretch>
-            <a:fillRect/>
-          </a:stretch>
-        </p:blipFill>
-        <p:spPr>
-          <a:xfrm>
-            <a:off x="3515868" y="2112264"/>
-            <a:ext cx="164592" cy="164592"/>
-          </a:xfrm>
-          <a:prstGeom prst="rect">
-            <a:avLst/>
-          </a:prstGeom>
-        </p:spPr>
-      </p:pic>
-      <p:sp>
-        <p:nvSpPr>
-          <p:cNvPr id="22" name="Text 14"/>
-          <p:cNvSpPr txBox="1"/>
-          <p:nvPr/>
-        </p:nvSpPr>
-        <p:spPr>
-          <a:xfrm>
-            <a:off x="3771900" y="2057400"/>
-            <a:ext cx="1920240" cy="329184"/>
-          </a:xfrm>
-          <a:prstGeom prst="rect">
-            <a:avLst/>
-          </a:prstGeom>
-          <a:noFill/>
-          <a:ln/>
-        </p:spPr>
-        <p:txBody>
-          <a:bodyPr wrap="square" lIns="0" tIns="0" rIns="0" bIns="0" rtlCol="0" anchor="t"/>
-          <a:lstStyle/>
-          <a:p>
-            <a:pPr indent="0" marL="0">
-              <a:buNone/>
-            </a:pPr>
-            <a:r>
-              <a:rPr lang="en-US" sz="1050" dirty="0">
+              <a:rPr lang="en-US" sz="950" dirty="0">
                 <a:solidFill>
                   <a:srgbClr val="1A2B3C"/>
                 </a:solidFill>
@@ -12737,240 +16840,65 @@
                 <a:ea typeface="Calibri" pitchFamily="34" charset="-122"/>
                 <a:cs typeface="Calibri" pitchFamily="34" charset="-120"/>
               </a:rPr>
-              <a:t>Latency 1.12 ms ≤ 1.5 ms</a:t>
-            </a:r>
-            <a:endParaRPr lang="en-US" sz="1050" dirty="0"/>
-          </a:p>
-        </p:txBody>
-      </p:sp>
-      <p:pic>
-        <p:nvPicPr>
-          <p:cNvPr id="23" name="Image 6" descr="preencoded.png">    </p:cNvPr>
-          <p:cNvPicPr>
-            <a:picLocks noChangeAspect="1"/>
-          </p:cNvPicPr>
-          <p:nvPr/>
-        </p:nvPicPr>
-        <p:blipFill>
-          <a:blip r:embed="rId7"/>
-          <a:stretch>
-            <a:fillRect/>
-          </a:stretch>
-        </p:blipFill>
-        <p:spPr>
-          <a:xfrm>
-            <a:off x="3515868" y="2496312"/>
-            <a:ext cx="164592" cy="164592"/>
-          </a:xfrm>
-          <a:prstGeom prst="rect">
-            <a:avLst/>
-          </a:prstGeom>
-        </p:spPr>
-      </p:pic>
-      <p:sp>
-        <p:nvSpPr>
-          <p:cNvPr id="24" name="Text 15"/>
-          <p:cNvSpPr txBox="1"/>
-          <p:nvPr/>
-        </p:nvSpPr>
-        <p:spPr>
-          <a:xfrm>
-            <a:off x="3771900" y="2441448"/>
-            <a:ext cx="1920240" cy="329184"/>
-          </a:xfrm>
-          <a:prstGeom prst="rect">
-            <a:avLst/>
-          </a:prstGeom>
-          <a:noFill/>
-          <a:ln/>
-        </p:spPr>
-        <p:txBody>
-          <a:bodyPr wrap="square" lIns="0" tIns="0" rIns="0" bIns="0" rtlCol="0" anchor="t"/>
+              <a:t>Open Inference Protocol (REST / gRPC)</a:t>
+            </a:r>
+            <a:endParaRPr lang="en-US" sz="950" dirty="0"/>
+          </a:p>
+        </p:txBody>
+      </p:sp>
+      <p:sp>
+        <p:nvSpPr>
+          <p:cNvPr id="38" name="Text 33"/>
+          <p:cNvSpPr txBox="1"/>
+          <p:nvPr/>
+        </p:nvSpPr>
+        <p:spPr>
+          <a:xfrm>
+            <a:off x="3410712" y="4297680"/>
+            <a:ext cx="2377440" cy="320040"/>
+          </a:xfrm>
+          <a:prstGeom prst="rect">
+            <a:avLst/>
+          </a:prstGeom>
+          <a:noFill/>
+          <a:ln/>
+        </p:spPr>
+        <p:txBody>
+          <a:bodyPr wrap="square" lIns="0" tIns="0" rIns="0" bIns="0" rtlCol="0" anchor="ctr"/>
           <a:lstStyle/>
           <a:p>
             <a:pPr indent="0" marL="0">
               <a:buNone/>
             </a:pPr>
             <a:r>
-              <a:rPr lang="en-US" sz="1050" dirty="0">
-                <a:solidFill>
-                  <a:srgbClr val="1A2B3C"/>
+              <a:rPr lang="en-US" sz="900" i="1" dirty="0">
+                <a:solidFill>
+                  <a:srgbClr val="5A6B7D"/>
                 </a:solidFill>
                 <a:latin typeface="Calibri" pitchFamily="34" charset="0"/>
                 <a:ea typeface="Calibri" pitchFamily="34" charset="-122"/>
                 <a:cs typeface="Calibri" pitchFamily="34" charset="-120"/>
               </a:rPr>
-              <a:t>Buffer occupancy &lt; 40%</a:t>
-            </a:r>
-            <a:endParaRPr lang="en-US" sz="1050" dirty="0"/>
-          </a:p>
-        </p:txBody>
-      </p:sp>
-      <p:pic>
-        <p:nvPicPr>
-          <p:cNvPr id="25" name="Image 7" descr="preencoded.png">    </p:cNvPr>
-          <p:cNvPicPr>
-            <a:picLocks noChangeAspect="1"/>
-          </p:cNvPicPr>
-          <p:nvPr/>
-        </p:nvPicPr>
-        <p:blipFill>
-          <a:blip r:embed="rId8"/>
-          <a:stretch>
-            <a:fillRect/>
-          </a:stretch>
-        </p:blipFill>
-        <p:spPr>
-          <a:xfrm>
-            <a:off x="3515868" y="2880360"/>
-            <a:ext cx="164592" cy="164592"/>
-          </a:xfrm>
-          <a:prstGeom prst="rect">
-            <a:avLst/>
-          </a:prstGeom>
-        </p:spPr>
-      </p:pic>
-      <p:sp>
-        <p:nvSpPr>
-          <p:cNvPr id="26" name="Text 16"/>
-          <p:cNvSpPr txBox="1"/>
-          <p:nvPr/>
-        </p:nvSpPr>
-        <p:spPr>
-          <a:xfrm>
-            <a:off x="3771900" y="2825496"/>
-            <a:ext cx="1920240" cy="329184"/>
-          </a:xfrm>
-          <a:prstGeom prst="rect">
-            <a:avLst/>
-          </a:prstGeom>
-          <a:noFill/>
-          <a:ln/>
-        </p:spPr>
-        <p:txBody>
-          <a:bodyPr wrap="square" lIns="0" tIns="0" rIns="0" bIns="0" rtlCol="0" anchor="t"/>
-          <a:lstStyle/>
-          <a:p>
-            <a:pPr indent="0" marL="0">
-              <a:buNone/>
-            </a:pPr>
-            <a:r>
-              <a:rPr lang="en-US" sz="1050" dirty="0">
-                <a:solidFill>
-                  <a:srgbClr val="1A2B3C"/>
-                </a:solidFill>
-                <a:latin typeface="Calibri" pitchFamily="34" charset="0"/>
-                <a:ea typeface="Calibri" pitchFamily="34" charset="-122"/>
-                <a:cs typeface="Calibri" pitchFamily="34" charset="-120"/>
-              </a:rPr>
-              <a:t>MH-T261 supports MCS 4</a:t>
-            </a:r>
-            <a:endParaRPr lang="en-US" sz="1050" dirty="0"/>
-          </a:p>
-        </p:txBody>
-      </p:sp>
-      <p:pic>
-        <p:nvPicPr>
-          <p:cNvPr id="27" name="Image 8" descr="preencoded.png">    </p:cNvPr>
-          <p:cNvPicPr>
-            <a:picLocks noChangeAspect="1"/>
-          </p:cNvPicPr>
-          <p:nvPr/>
-        </p:nvPicPr>
-        <p:blipFill>
-          <a:blip r:embed="rId9"/>
-          <a:stretch>
-            <a:fillRect/>
-          </a:stretch>
-        </p:blipFill>
-        <p:spPr>
-          <a:xfrm>
-            <a:off x="3515868" y="3264408"/>
-            <a:ext cx="164592" cy="164592"/>
-          </a:xfrm>
-          <a:prstGeom prst="rect">
-            <a:avLst/>
-          </a:prstGeom>
-        </p:spPr>
-      </p:pic>
-      <p:sp>
-        <p:nvSpPr>
-          <p:cNvPr id="28" name="Text 17"/>
-          <p:cNvSpPr txBox="1"/>
-          <p:nvPr/>
-        </p:nvSpPr>
-        <p:spPr>
-          <a:xfrm>
-            <a:off x="3771900" y="3209544"/>
-            <a:ext cx="1920240" cy="329184"/>
-          </a:xfrm>
-          <a:prstGeom prst="rect">
-            <a:avLst/>
-          </a:prstGeom>
-          <a:noFill/>
-          <a:ln/>
-        </p:spPr>
-        <p:txBody>
-          <a:bodyPr wrap="square" lIns="0" tIns="0" rIns="0" bIns="0" rtlCol="0" anchor="t"/>
-          <a:lstStyle/>
-          <a:p>
-            <a:pPr indent="0" marL="0">
-              <a:buNone/>
-            </a:pPr>
-            <a:r>
-              <a:rPr lang="en-US" sz="1050" dirty="0">
-                <a:solidFill>
-                  <a:srgbClr val="1A2B3C"/>
-                </a:solidFill>
-                <a:latin typeface="Calibri" pitchFamily="34" charset="0"/>
-                <a:ea typeface="Calibri" pitchFamily="34" charset="-122"/>
-                <a:cs typeface="Calibri" pitchFamily="34" charset="-120"/>
-              </a:rPr>
-              <a:t>64.80 GHz inside V-band mask</a:t>
-            </a:r>
-            <a:endParaRPr lang="en-US" sz="1050" dirty="0"/>
-          </a:p>
-        </p:txBody>
-      </p:sp>
-      <p:sp>
-        <p:nvSpPr>
-          <p:cNvPr id="29" name="Shape 18"/>
+              <a:t>Industry open formats</a:t>
+            </a:r>
+            <a:endParaRPr lang="en-US" sz="900" dirty="0"/>
+          </a:p>
+        </p:txBody>
+      </p:sp>
+      <p:sp>
+        <p:nvSpPr>
+          <p:cNvPr id="39" name="Shape 34"/>
           <p:cNvSpPr/>
           <p:nvPr/>
         </p:nvSpPr>
         <p:spPr>
           <a:xfrm>
-            <a:off x="5875020" y="2446020"/>
-            <a:ext cx="251460" cy="0"/>
-          </a:xfrm>
-          <a:prstGeom prst="line">
-            <a:avLst/>
-          </a:prstGeom>
-          <a:noFill/>
-          <a:ln w="22225">
-            <a:solidFill>
-              <a:srgbClr val="0B1D33"/>
-            </a:solidFill>
-            <a:prstDash val="solid"/>
-            <a:headEnd type="none"/>
-            <a:tailEnd type="triangle"/>
-          </a:ln>
-        </p:spPr>
-      </p:sp>
-      <p:sp>
-        <p:nvSpPr>
-          <p:cNvPr id="30" name="Shape 19"/>
-          <p:cNvSpPr/>
-          <p:nvPr/>
-        </p:nvSpPr>
-        <p:spPr>
-          <a:xfrm>
-            <a:off x="6172200" y="1188720"/>
-            <a:ext cx="2514600" cy="2514600"/>
+            <a:off x="6035040" y="2286000"/>
+            <a:ext cx="2651760" cy="2487168"/>
           </a:xfrm>
           <a:prstGeom prst="roundRect">
             <a:avLst>
-              <a:gd name="adj" fmla="val 3636"/>
+              <a:gd name="adj" fmla="val 2941"/>
             </a:avLst>
           </a:prstGeom>
           <a:solidFill>
@@ -12986,404 +16914,163 @@
       </p:sp>
       <p:sp>
         <p:nvSpPr>
-          <p:cNvPr id="31" name="Shape 20"/>
+          <p:cNvPr id="40" name="Text 35"/>
+          <p:cNvSpPr txBox="1"/>
+          <p:nvPr/>
+        </p:nvSpPr>
+        <p:spPr>
+          <a:xfrm>
+            <a:off x="6199632" y="2432304"/>
+            <a:ext cx="2377440" cy="182880"/>
+          </a:xfrm>
+          <a:prstGeom prst="rect">
+            <a:avLst/>
+          </a:prstGeom>
+          <a:noFill/>
+          <a:ln/>
+        </p:spPr>
+        <p:txBody>
+          <a:bodyPr wrap="square" lIns="0" tIns="0" rIns="0" bIns="0" rtlCol="0" anchor="t"/>
+          <a:lstStyle/>
+          <a:p>
+            <a:pPr indent="0" marL="0">
+              <a:buNone/>
+            </a:pPr>
+            <a:r>
+              <a:rPr lang="en-US" sz="900" b="1" spc="100" kern="0" dirty="0">
+                <a:solidFill>
+                  <a:srgbClr val="14304F"/>
+                </a:solidFill>
+                <a:latin typeface="Calibri" pitchFamily="34" charset="0"/>
+                <a:ea typeface="Calibri" pitchFamily="34" charset="-122"/>
+                <a:cs typeface="Calibri" pitchFamily="34" charset="-120"/>
+              </a:rPr>
+              <a:t>3  GOVERN THE LIFECYCLE</a:t>
+            </a:r>
+            <a:endParaRPr lang="en-US" sz="900" dirty="0"/>
+          </a:p>
+        </p:txBody>
+      </p:sp>
+      <p:sp>
+        <p:nvSpPr>
+          <p:cNvPr id="41" name="Text 36"/>
+          <p:cNvSpPr txBox="1"/>
+          <p:nvPr/>
+        </p:nvSpPr>
+        <p:spPr>
+          <a:xfrm>
+            <a:off x="6199632" y="2651760"/>
+            <a:ext cx="2377440" cy="274320"/>
+          </a:xfrm>
+          <a:prstGeom prst="rect">
+            <a:avLst/>
+          </a:prstGeom>
+          <a:noFill/>
+          <a:ln/>
+        </p:spPr>
+        <p:txBody>
+          <a:bodyPr wrap="square" lIns="0" tIns="0" rIns="0" bIns="0" rtlCol="0" anchor="t"/>
+          <a:lstStyle/>
+          <a:p>
+            <a:pPr indent="0" marL="0">
+              <a:buNone/>
+            </a:pPr>
+            <a:r>
+              <a:rPr lang="en-US" sz="1150" b="1" dirty="0">
+                <a:solidFill>
+                  <a:srgbClr val="0B1D33"/>
+                </a:solidFill>
+                <a:latin typeface="Arial" pitchFamily="34" charset="0"/>
+                <a:ea typeface="Arial" pitchFamily="34" charset="-122"/>
+                <a:cs typeface="Arial" pitchFamily="34" charset="-120"/>
+              </a:rPr>
+              <a:t>Train → test → emulate → deploy</a:t>
+            </a:r>
+            <a:endParaRPr lang="en-US" sz="1150" dirty="0"/>
+          </a:p>
+        </p:txBody>
+      </p:sp>
+      <p:sp>
+        <p:nvSpPr>
+          <p:cNvPr id="42" name="Shape 37"/>
           <p:cNvSpPr/>
           <p:nvPr/>
         </p:nvSpPr>
         <p:spPr>
           <a:xfrm>
-            <a:off x="6355080" y="1371600"/>
-            <a:ext cx="457200" cy="457200"/>
-          </a:xfrm>
-          <a:prstGeom prst="ellipse">
-            <a:avLst/>
+            <a:off x="6172200" y="3063240"/>
+            <a:ext cx="2377440" cy="475488"/>
+          </a:xfrm>
+          <a:prstGeom prst="roundRect">
+            <a:avLst>
+              <a:gd name="adj" fmla="val 11538"/>
+            </a:avLst>
           </a:prstGeom>
           <a:solidFill>
-            <a:srgbClr val="22A06B"/>
+            <a:srgbClr val="DDF3E8"/>
           </a:solidFill>
           <a:ln w="12700">
             <a:solidFill>
-              <a:srgbClr val="22A06B"/>
+              <a:srgbClr val="DDF3E8"/>
             </a:solidFill>
             <a:prstDash val="solid"/>
           </a:ln>
         </p:spPr>
       </p:sp>
-      <p:pic>
-        <p:nvPicPr>
-          <p:cNvPr id="32" name="Image 9" descr="preencoded.png">    </p:cNvPr>
-          <p:cNvPicPr>
-            <a:picLocks noChangeAspect="1"/>
-          </p:cNvPicPr>
-          <p:nvPr/>
-        </p:nvPicPr>
-        <p:blipFill>
-          <a:blip r:embed="rId10"/>
-          <a:stretch>
-            <a:fillRect/>
-          </a:stretch>
-        </p:blipFill>
-        <p:spPr>
-          <a:xfrm>
-            <a:off x="6469380" y="1485900"/>
-            <a:ext cx="228600" cy="228600"/>
-          </a:xfrm>
-          <a:prstGeom prst="rect">
-            <a:avLst/>
-          </a:prstGeom>
-        </p:spPr>
-      </p:pic>
-      <p:sp>
-        <p:nvSpPr>
-          <p:cNvPr id="33" name="Text 21"/>
-          <p:cNvSpPr txBox="1"/>
-          <p:nvPr/>
-        </p:nvSpPr>
-        <p:spPr>
-          <a:xfrm>
-            <a:off x="6949440" y="1389888"/>
-            <a:ext cx="1645920" cy="182880"/>
-          </a:xfrm>
-          <a:prstGeom prst="rect">
-            <a:avLst/>
-          </a:prstGeom>
-          <a:noFill/>
-          <a:ln/>
-        </p:spPr>
-        <p:txBody>
-          <a:bodyPr wrap="square" lIns="0" tIns="0" rIns="0" bIns="0" rtlCol="0" anchor="t"/>
+      <p:sp>
+        <p:nvSpPr>
+          <p:cNvPr id="43" name="Text 38"/>
+          <p:cNvSpPr txBox="1"/>
+          <p:nvPr/>
+        </p:nvSpPr>
+        <p:spPr>
+          <a:xfrm>
+            <a:off x="6263640" y="3063240"/>
+            <a:ext cx="2240280" cy="475488"/>
+          </a:xfrm>
+          <a:prstGeom prst="rect">
+            <a:avLst/>
+          </a:prstGeom>
+          <a:noFill/>
+          <a:ln/>
+        </p:spPr>
+        <p:txBody>
+          <a:bodyPr wrap="square" lIns="0" tIns="0" rIns="0" bIns="0" rtlCol="0" anchor="ctr"/>
           <a:lstStyle/>
           <a:p>
             <a:pPr indent="0" marL="0">
               <a:buNone/>
             </a:pPr>
             <a:r>
-              <a:rPr lang="en-US" sz="900" b="1" spc="50" kern="0" dirty="0">
-                <a:solidFill>
-                  <a:srgbClr val="22A06B"/>
+              <a:rPr lang="en-US" sz="950" b="1" dirty="0">
+                <a:solidFill>
+                  <a:srgbClr val="157A50"/>
                 </a:solidFill>
                 <a:latin typeface="Calibri" pitchFamily="34" charset="0"/>
                 <a:ea typeface="Calibri" pitchFamily="34" charset="-122"/>
                 <a:cs typeface="Calibri" pitchFamily="34" charset="-120"/>
               </a:rPr>
-              <a:t>STAGE 3 · RESTCONF</a:t>
-            </a:r>
-            <a:endParaRPr lang="en-US" sz="900" dirty="0"/>
-          </a:p>
-        </p:txBody>
-      </p:sp>
-      <p:sp>
-        <p:nvSpPr>
-          <p:cNvPr id="34" name="Text 22"/>
-          <p:cNvSpPr txBox="1"/>
-          <p:nvPr/>
-        </p:nvSpPr>
-        <p:spPr>
-          <a:xfrm>
-            <a:off x="6949440" y="1572768"/>
-            <a:ext cx="1645920" cy="274320"/>
-          </a:xfrm>
-          <a:prstGeom prst="rect">
-            <a:avLst/>
-          </a:prstGeom>
-          <a:noFill/>
-          <a:ln/>
-        </p:spPr>
-        <p:txBody>
-          <a:bodyPr wrap="square" lIns="0" tIns="0" rIns="0" bIns="0" rtlCol="0" anchor="t"/>
-          <a:lstStyle/>
-          <a:p>
-            <a:pPr indent="0" marL="0">
-              <a:buNone/>
-            </a:pPr>
-            <a:r>
-              <a:rPr lang="en-US" sz="1150" b="1" dirty="0">
-                <a:solidFill>
-                  <a:srgbClr val="0B1D33"/>
-                </a:solidFill>
-                <a:latin typeface="Arial" pitchFamily="34" charset="0"/>
-                <a:ea typeface="Arial" pitchFamily="34" charset="-122"/>
-                <a:cs typeface="Arial" pitchFamily="34" charset="-120"/>
-              </a:rPr>
-              <a:t>Two-phase commit</a:t>
-            </a:r>
-            <a:endParaRPr lang="en-US" sz="1150" dirty="0"/>
-          </a:p>
-        </p:txBody>
-      </p:sp>
-      <p:pic>
-        <p:nvPicPr>
-          <p:cNvPr id="35" name="Image 10" descr="preencoded.png">    </p:cNvPr>
-          <p:cNvPicPr>
-            <a:picLocks noChangeAspect="1"/>
-          </p:cNvPicPr>
-          <p:nvPr/>
-        </p:nvPicPr>
-        <p:blipFill>
-          <a:blip r:embed="rId11"/>
-          <a:stretch>
-            <a:fillRect/>
-          </a:stretch>
-        </p:blipFill>
-        <p:spPr>
-          <a:xfrm>
-            <a:off x="6373368" y="2112264"/>
-            <a:ext cx="164592" cy="164592"/>
-          </a:xfrm>
-          <a:prstGeom prst="rect">
-            <a:avLst/>
-          </a:prstGeom>
-        </p:spPr>
-      </p:pic>
-      <p:sp>
-        <p:nvSpPr>
-          <p:cNvPr id="36" name="Text 23"/>
-          <p:cNvSpPr txBox="1"/>
-          <p:nvPr/>
-        </p:nvSpPr>
-        <p:spPr>
-          <a:xfrm>
-            <a:off x="6629400" y="2057400"/>
-            <a:ext cx="1920240" cy="329184"/>
-          </a:xfrm>
-          <a:prstGeom prst="rect">
-            <a:avLst/>
-          </a:prstGeom>
-          <a:noFill/>
-          <a:ln/>
-        </p:spPr>
-        <p:txBody>
-          <a:bodyPr wrap="square" lIns="0" tIns="0" rIns="0" bIns="0" rtlCol="0" anchor="t"/>
-          <a:lstStyle/>
-          <a:p>
-            <a:pPr indent="0" marL="0">
-              <a:buNone/>
-            </a:pPr>
-            <a:r>
-              <a:rPr lang="en-US" sz="1050" dirty="0">
-                <a:solidFill>
-                  <a:srgbClr val="1A2B3C"/>
-                </a:solidFill>
-                <a:latin typeface="Calibri" pitchFamily="34" charset="0"/>
-                <a:ea typeface="Calibri" pitchFamily="34" charset="-122"/>
-                <a:cs typeface="Calibri" pitchFamily="34" charset="-120"/>
-              </a:rPr>
-              <a:t>Prepare: PATCH the candidate</a:t>
-            </a:r>
-            <a:endParaRPr lang="en-US" sz="1050" dirty="0"/>
-          </a:p>
-        </p:txBody>
-      </p:sp>
-      <p:pic>
-        <p:nvPicPr>
-          <p:cNvPr id="37" name="Image 11" descr="preencoded.png">    </p:cNvPr>
-          <p:cNvPicPr>
-            <a:picLocks noChangeAspect="1"/>
-          </p:cNvPicPr>
-          <p:nvPr/>
-        </p:nvPicPr>
-        <p:blipFill>
-          <a:blip r:embed="rId12"/>
-          <a:stretch>
-            <a:fillRect/>
-          </a:stretch>
-        </p:blipFill>
-        <p:spPr>
-          <a:xfrm>
-            <a:off x="6373368" y="2496312"/>
-            <a:ext cx="164592" cy="164592"/>
-          </a:xfrm>
-          <a:prstGeom prst="rect">
-            <a:avLst/>
-          </a:prstGeom>
-        </p:spPr>
-      </p:pic>
-      <p:sp>
-        <p:nvSpPr>
-          <p:cNvPr id="38" name="Text 24"/>
-          <p:cNvSpPr txBox="1"/>
-          <p:nvPr/>
-        </p:nvSpPr>
-        <p:spPr>
-          <a:xfrm>
-            <a:off x="6629400" y="2441448"/>
-            <a:ext cx="1920240" cy="329184"/>
-          </a:xfrm>
-          <a:prstGeom prst="rect">
-            <a:avLst/>
-          </a:prstGeom>
-          <a:noFill/>
-          <a:ln/>
-        </p:spPr>
-        <p:txBody>
-          <a:bodyPr wrap="square" lIns="0" tIns="0" rIns="0" bIns="0" rtlCol="0" anchor="t"/>
-          <a:lstStyle/>
-          <a:p>
-            <a:pPr indent="0" marL="0">
-              <a:buNone/>
-            </a:pPr>
-            <a:r>
-              <a:rPr lang="en-US" sz="1050" dirty="0">
-                <a:solidFill>
-                  <a:srgbClr val="1A2B3C"/>
-                </a:solidFill>
-                <a:latin typeface="Calibri" pitchFamily="34" charset="0"/>
-                <a:ea typeface="Calibri" pitchFamily="34" charset="-122"/>
-                <a:cs typeface="Calibri" pitchFamily="34" charset="-120"/>
-              </a:rPr>
-              <a:t>Commit: POST ietf-netconf:commit</a:t>
-            </a:r>
-            <a:endParaRPr lang="en-US" sz="1050" dirty="0"/>
-          </a:p>
-        </p:txBody>
-      </p:sp>
-      <p:pic>
-        <p:nvPicPr>
-          <p:cNvPr id="39" name="Image 12" descr="preencoded.png">    </p:cNvPr>
-          <p:cNvPicPr>
-            <a:picLocks noChangeAspect="1"/>
-          </p:cNvPicPr>
-          <p:nvPr/>
-        </p:nvPicPr>
-        <p:blipFill>
-          <a:blip r:embed="rId13"/>
-          <a:stretch>
-            <a:fillRect/>
-          </a:stretch>
-        </p:blipFill>
-        <p:spPr>
-          <a:xfrm>
-            <a:off x="6373368" y="2880360"/>
-            <a:ext cx="164592" cy="164592"/>
-          </a:xfrm>
-          <a:prstGeom prst="rect">
-            <a:avLst/>
-          </a:prstGeom>
-        </p:spPr>
-      </p:pic>
-      <p:sp>
-        <p:nvSpPr>
-          <p:cNvPr id="40" name="Text 25"/>
-          <p:cNvSpPr txBox="1"/>
-          <p:nvPr/>
-        </p:nvSpPr>
-        <p:spPr>
-          <a:xfrm>
-            <a:off x="6629400" y="2825496"/>
-            <a:ext cx="1920240" cy="329184"/>
-          </a:xfrm>
-          <a:prstGeom prst="rect">
-            <a:avLst/>
-          </a:prstGeom>
-          <a:noFill/>
-          <a:ln/>
-        </p:spPr>
-        <p:txBody>
-          <a:bodyPr wrap="square" lIns="0" tIns="0" rIns="0" bIns="0" rtlCol="0" anchor="t"/>
-          <a:lstStyle/>
-          <a:p>
-            <a:pPr indent="0" marL="0">
-              <a:buNone/>
-            </a:pPr>
-            <a:r>
-              <a:rPr lang="en-US" sz="1050" dirty="0">
-                <a:solidFill>
-                  <a:srgbClr val="1A2B3C"/>
-                </a:solidFill>
-                <a:latin typeface="Calibri" pitchFamily="34" charset="0"/>
-                <a:ea typeface="Calibri" pitchFamily="34" charset="-122"/>
-                <a:cs typeface="Calibri" pitchFamily="34" charset="-120"/>
-              </a:rPr>
-              <a:t>Verify: poll telemetry</a:t>
-            </a:r>
-            <a:endParaRPr lang="en-US" sz="1050" dirty="0"/>
-          </a:p>
-        </p:txBody>
-      </p:sp>
-      <p:sp>
-        <p:nvSpPr>
-          <p:cNvPr id="41" name="Shape 26"/>
+              <a:t>★ 3GPP TS 28.105 AI/ML mgmt · inference emulation</a:t>
+            </a:r>
+            <a:endParaRPr lang="en-US" sz="950" dirty="0"/>
+          </a:p>
+        </p:txBody>
+      </p:sp>
+      <p:sp>
+        <p:nvSpPr>
+          <p:cNvPr id="44" name="Shape 39"/>
           <p:cNvSpPr/>
           <p:nvPr/>
         </p:nvSpPr>
         <p:spPr>
           <a:xfrm>
-            <a:off x="7429500" y="3703320"/>
-            <a:ext cx="0" cy="274320"/>
-          </a:xfrm>
-          <a:prstGeom prst="line">
-            <a:avLst/>
-          </a:prstGeom>
-          <a:noFill/>
-          <a:ln w="19050">
-            <a:solidFill>
-              <a:srgbClr val="D64545"/>
-            </a:solidFill>
-            <a:prstDash val="dash"/>
-          </a:ln>
-        </p:spPr>
-      </p:sp>
-      <p:sp>
-        <p:nvSpPr>
-          <p:cNvPr id="42" name="Shape 27"/>
-          <p:cNvSpPr/>
-          <p:nvPr/>
-        </p:nvSpPr>
-        <p:spPr>
-          <a:xfrm>
-            <a:off x="1714500" y="3977640"/>
-            <a:ext cx="5715000" cy="0"/>
-          </a:xfrm>
-          <a:prstGeom prst="line">
-            <a:avLst/>
-          </a:prstGeom>
-          <a:noFill/>
-          <a:ln w="19050">
-            <a:solidFill>
-              <a:srgbClr val="D64545"/>
-            </a:solidFill>
-            <a:prstDash val="dash"/>
-          </a:ln>
-        </p:spPr>
-      </p:sp>
-      <p:sp>
-        <p:nvSpPr>
-          <p:cNvPr id="43" name="Shape 28"/>
-          <p:cNvSpPr/>
-          <p:nvPr/>
-        </p:nvSpPr>
-        <p:spPr>
-          <a:xfrm flipV="1">
-            <a:off x="1714500" y="3703320"/>
-            <a:ext cx="0" cy="274320"/>
-          </a:xfrm>
-          <a:prstGeom prst="line">
-            <a:avLst/>
-          </a:prstGeom>
-          <a:noFill/>
-          <a:ln w="22225">
-            <a:solidFill>
-              <a:srgbClr val="D64545"/>
-            </a:solidFill>
-            <a:prstDash val="solid"/>
-            <a:headEnd type="none"/>
-            <a:tailEnd type="triangle"/>
-          </a:ln>
-        </p:spPr>
-      </p:sp>
-      <p:sp>
-        <p:nvSpPr>
-          <p:cNvPr id="44" name="Shape 29"/>
-          <p:cNvSpPr/>
-          <p:nvPr/>
-        </p:nvSpPr>
-        <p:spPr>
-          <a:xfrm>
-            <a:off x="2926080" y="3840480"/>
-            <a:ext cx="3291840" cy="274320"/>
-          </a:xfrm>
-          <a:prstGeom prst="rect">
-            <a:avLst/>
+            <a:off x="6172200" y="3630168"/>
+            <a:ext cx="2377440" cy="475488"/>
+          </a:xfrm>
+          <a:prstGeom prst="roundRect">
+            <a:avLst>
+              <a:gd name="adj" fmla="val 11538"/>
+            </a:avLst>
           </a:prstGeom>
           <a:solidFill>
             <a:srgbClr val="FFFFFF"/>
@@ -13398,14 +17085,14 @@
       </p:sp>
       <p:sp>
         <p:nvSpPr>
-          <p:cNvPr id="45" name="Text 30"/>
-          <p:cNvSpPr txBox="1"/>
-          <p:nvPr/>
-        </p:nvSpPr>
-        <p:spPr>
-          <a:xfrm>
-            <a:off x="2926080" y="3840480"/>
-            <a:ext cx="3291840" cy="274320"/>
+          <p:cNvPr id="45" name="Text 40"/>
+          <p:cNvSpPr txBox="1"/>
+          <p:nvPr/>
+        </p:nvSpPr>
+        <p:spPr>
+          <a:xfrm>
+            <a:off x="6263640" y="3630168"/>
+            <a:ext cx="2240280" cy="475488"/>
           </a:xfrm>
           <a:prstGeom prst="rect">
             <a:avLst/>
@@ -13417,85 +17104,34 @@
           <a:bodyPr wrap="square" lIns="0" tIns="0" rIns="0" bIns="0" rtlCol="0" anchor="ctr"/>
           <a:lstStyle/>
           <a:p>
-            <a:pPr algn="ctr" indent="0" marL="0">
-              <a:buNone/>
-            </a:pPr>
-            <a:r>
-              <a:rPr lang="en-US" sz="1000" b="1" dirty="0">
-                <a:solidFill>
-                  <a:srgbClr val="D64545"/>
+            <a:pPr indent="0" marL="0">
+              <a:buNone/>
+            </a:pPr>
+            <a:r>
+              <a:rPr lang="en-US" sz="950" dirty="0">
+                <a:solidFill>
+                  <a:srgbClr val="1A2B3C"/>
                 </a:solidFill>
                 <a:latin typeface="Calibri" pitchFamily="34" charset="0"/>
                 <a:ea typeface="Calibri" pitchFamily="34" charset="-122"/>
                 <a:cs typeface="Calibri" pitchFamily="34" charset="-120"/>
               </a:rPr>
-              <a:t>Health check fails → automatic rollback</a:t>
-            </a:r>
-            <a:endParaRPr lang="en-US" sz="1000" dirty="0"/>
-          </a:p>
-        </p:txBody>
-      </p:sp>
-      <p:sp>
-        <p:nvSpPr>
-          <p:cNvPr id="46" name="Shape 31"/>
-          <p:cNvSpPr/>
-          <p:nvPr/>
-        </p:nvSpPr>
-        <p:spPr>
-          <a:xfrm>
-            <a:off x="457200" y="4251960"/>
-            <a:ext cx="8229600" cy="548640"/>
-          </a:xfrm>
-          <a:prstGeom prst="roundRect">
-            <a:avLst>
-              <a:gd name="adj" fmla="val 13333"/>
-            </a:avLst>
-          </a:prstGeom>
-          <a:solidFill>
-            <a:srgbClr val="DDF3E8"/>
-          </a:solidFill>
-          <a:ln w="12700">
-            <a:solidFill>
-              <a:srgbClr val="DDF3E8"/>
-            </a:solidFill>
-            <a:prstDash val="solid"/>
-          </a:ln>
-        </p:spPr>
-      </p:sp>
-      <p:pic>
-        <p:nvPicPr>
-          <p:cNvPr id="47" name="Image 13" descr="preencoded.png">    </p:cNvPr>
-          <p:cNvPicPr>
-            <a:picLocks noChangeAspect="1"/>
-          </p:cNvPicPr>
-          <p:nvPr/>
-        </p:nvPicPr>
-        <p:blipFill>
-          <a:blip r:embed="rId14"/>
-          <a:stretch>
-            <a:fillRect/>
-          </a:stretch>
-        </p:blipFill>
-        <p:spPr>
-          <a:xfrm>
-            <a:off x="658368" y="4389120"/>
-            <a:ext cx="274320" cy="274320"/>
-          </a:xfrm>
-          <a:prstGeom prst="rect">
-            <a:avLst/>
-          </a:prstGeom>
-        </p:spPr>
-      </p:pic>
-      <p:sp>
-        <p:nvSpPr>
-          <p:cNvPr id="48" name="Text 32"/>
-          <p:cNvSpPr txBox="1"/>
-          <p:nvPr/>
-        </p:nvSpPr>
-        <p:spPr>
-          <a:xfrm>
-            <a:off x="1097280" y="4251960"/>
-            <a:ext cx="7406640" cy="548640"/>
+              <a:t>ITU-T Y.3181 ML sandbox · Y.3172 ML pipeline</a:t>
+            </a:r>
+            <a:endParaRPr lang="en-US" sz="950" dirty="0"/>
+          </a:p>
+        </p:txBody>
+      </p:sp>
+      <p:sp>
+        <p:nvSpPr>
+          <p:cNvPr id="46" name="Text 41"/>
+          <p:cNvSpPr txBox="1"/>
+          <p:nvPr/>
+        </p:nvSpPr>
+        <p:spPr>
+          <a:xfrm>
+            <a:off x="6199632" y="4297680"/>
+            <a:ext cx="2377440" cy="320040"/>
           </a:xfrm>
           <a:prstGeom prst="rect">
             <a:avLst/>
@@ -13511,31 +17147,17 @@
               <a:buNone/>
             </a:pPr>
             <a:r>
-              <a:rPr lang="en-US" sz="1150" b="1" dirty="0">
-                <a:solidFill>
-                  <a:srgbClr val="157A50"/>
+              <a:rPr lang="en-US" sz="900" i="1" dirty="0">
+                <a:solidFill>
+                  <a:srgbClr val="5A6B7D"/>
                 </a:solidFill>
                 <a:latin typeface="Calibri" pitchFamily="34" charset="0"/>
                 <a:ea typeface="Calibri" pitchFamily="34" charset="-122"/>
                 <a:cs typeface="Calibri" pitchFamily="34" charset="-120"/>
               </a:rPr>
-              <a:t>Zero-outage by design: </a:t>
-            </a:r>
-            <a:pPr indent="0" marL="0">
-              <a:buNone/>
-            </a:pPr>
-            <a:r>
-              <a:rPr lang="en-US" sz="1150" dirty="0">
-                <a:solidFill>
-                  <a:srgbClr val="1A2B3C"/>
-                </a:solidFill>
-                <a:latin typeface="Calibri" pitchFamily="34" charset="0"/>
-                <a:ea typeface="Calibri" pitchFamily="34" charset="-122"/>
-                <a:cs typeface="Calibri" pitchFamily="34" charset="-120"/>
-              </a:rPr>
-              <a:t>bad configurations are rejected in software before they can touch customer traffic.</a:t>
-            </a:r>
-            <a:endParaRPr lang="en-US" sz="1150" dirty="0"/>
+              <a:t>Next: Rel-20 NDT ↔ ML collaboration</a:t>
+            </a:r>
+            <a:endParaRPr lang="en-US" sz="900" dirty="0"/>
           </a:p>
         </p:txBody>
       </p:sp>
@@ -13604,7 +17226,7 @@
                 <a:ea typeface="Arial" pitchFamily="34" charset="-122"/>
                 <a:cs typeface="Arial" pitchFamily="34" charset="-120"/>
               </a:rPr>
-              <a:t>END-TO-END</a:t>
+              <a:t>WHAT-IF IN PRACTICE</a:t>
             </a:r>
             <a:endParaRPr lang="en-US" sz="1000" dirty="0"/>
           </a:p>
@@ -13643,30 +17265,792 @@
                 <a:ea typeface="Arial" pitchFamily="34" charset="-122"/>
                 <a:cs typeface="Arial" pitchFamily="34" charset="-120"/>
               </a:rPr>
-              <a:t>One closed loop, seconds instead of hours</a:t>
+              <a:t>A storm on the V-band link, tested before it happens</a:t>
             </a:r>
             <a:endParaRPr lang="en-US" sz="2400" dirty="0"/>
           </a:p>
         </p:txBody>
       </p:sp>
-      <p:sp>
-        <p:nvSpPr>
-          <p:cNvPr id="4" name="Shape 2"/>
+      <p:graphicFrame>
+        <p:nvGraphicFramePr>
+          <p:cNvPr id="4" name="Chart 0" descr=""/>
+          <p:cNvGraphicFramePr/>
+          <p:nvPr/>
+        </p:nvGraphicFramePr>
+        <p:xfrm>
+          <a:off x="365760" y="1143000"/>
+          <a:ext cx="4480560" cy="3611880"/>
+        </p:xfrm>
+        <a:graphic xmlns:a="http://schemas.openxmlformats.org/drawingml/2006/main">
+          <a:graphicData uri="http://schemas.openxmlformats.org/drawingml/2006/chart">
+            <c:chart xmlns:c="http://schemas.openxmlformats.org/drawingml/2006/chart" r:id="rId1"/>
+          </a:graphicData>
+        </a:graphic>
+      </p:graphicFrame>
+      <p:sp>
+        <p:nvSpPr>
+          <p:cNvPr id="5" name="Text 2"/>
+          <p:cNvSpPr txBox="1"/>
+          <p:nvPr/>
+        </p:nvSpPr>
+        <p:spPr>
+          <a:xfrm>
+            <a:off x="5212080" y="1188720"/>
+            <a:ext cx="3474720" cy="274320"/>
+          </a:xfrm>
+          <a:prstGeom prst="rect">
+            <a:avLst/>
+          </a:prstGeom>
+          <a:noFill/>
+          <a:ln/>
+        </p:spPr>
+        <p:txBody>
+          <a:bodyPr wrap="square" lIns="0" tIns="0" rIns="0" bIns="0" rtlCol="0" anchor="t"/>
+          <a:lstStyle/>
+          <a:p>
+            <a:pPr indent="0" marL="0">
+              <a:buNone/>
+            </a:pPr>
+            <a:r>
+              <a:rPr lang="en-US" sz="1250" b="1" dirty="0">
+                <a:solidFill>
+                  <a:srgbClr val="0B1D33"/>
+                </a:solidFill>
+                <a:latin typeface="Arial" pitchFamily="34" charset="0"/>
+                <a:ea typeface="Arial" pitchFamily="34" charset="-122"/>
+                <a:cs typeface="Arial" pitchFamily="34" charset="-120"/>
+              </a:rPr>
+              <a:t>Change the twin recommends</a:t>
+            </a:r>
+            <a:endParaRPr lang="en-US" sz="1250" dirty="0"/>
+          </a:p>
+        </p:txBody>
+      </p:sp>
+      <p:sp>
+        <p:nvSpPr>
+          <p:cNvPr id="6" name="Text 3"/>
+          <p:cNvSpPr txBox="1"/>
+          <p:nvPr/>
+        </p:nvSpPr>
+        <p:spPr>
+          <a:xfrm>
+            <a:off x="5212080" y="1572768"/>
+            <a:ext cx="1005840" cy="347472"/>
+          </a:xfrm>
+          <a:prstGeom prst="rect">
+            <a:avLst/>
+          </a:prstGeom>
+          <a:noFill/>
+          <a:ln/>
+        </p:spPr>
+        <p:txBody>
+          <a:bodyPr wrap="square" lIns="0" tIns="0" rIns="0" bIns="0" rtlCol="0" anchor="ctr"/>
+          <a:lstStyle/>
+          <a:p>
+            <a:pPr indent="0" marL="0">
+              <a:buNone/>
+            </a:pPr>
+            <a:r>
+              <a:rPr lang="en-US" sz="1100" b="1" dirty="0">
+                <a:solidFill>
+                  <a:srgbClr val="1A2B3C"/>
+                </a:solidFill>
+                <a:latin typeface="Calibri" pitchFamily="34" charset="0"/>
+                <a:ea typeface="Calibri" pitchFamily="34" charset="-122"/>
+                <a:cs typeface="Calibri" pitchFamily="34" charset="-120"/>
+              </a:rPr>
+              <a:t>ACM floor</a:t>
+            </a:r>
+            <a:endParaRPr lang="en-US" sz="1100" dirty="0"/>
+          </a:p>
+        </p:txBody>
+      </p:sp>
+      <p:sp>
+        <p:nvSpPr>
+          <p:cNvPr id="7" name="Shape 4"/>
           <p:cNvSpPr/>
           <p:nvPr/>
         </p:nvSpPr>
         <p:spPr>
           <a:xfrm>
-            <a:off x="1554480" y="1737360"/>
-            <a:ext cx="2560320" cy="2560320"/>
-          </a:xfrm>
-          <a:prstGeom prst="ellipse">
-            <a:avLst/>
+            <a:off x="6263640" y="1572768"/>
+            <a:ext cx="960120" cy="347472"/>
+          </a:xfrm>
+          <a:prstGeom prst="roundRect">
+            <a:avLst>
+              <a:gd name="adj" fmla="val 15789"/>
+            </a:avLst>
           </a:prstGeom>
           <a:solidFill>
-            <a:srgbClr val="FFFFFF"/>
+            <a:srgbClr val="ECEFF2"/>
           </a:solidFill>
-          <a:ln w="31750">
+          <a:ln w="12700">
+            <a:solidFill>
+              <a:srgbClr val="ECEFF2"/>
+            </a:solidFill>
+            <a:prstDash val="solid"/>
+          </a:ln>
+        </p:spPr>
+      </p:sp>
+      <p:sp>
+        <p:nvSpPr>
+          <p:cNvPr id="8" name="Text 5"/>
+          <p:cNvSpPr txBox="1"/>
+          <p:nvPr/>
+        </p:nvSpPr>
+        <p:spPr>
+          <a:xfrm>
+            <a:off x="6263640" y="1572768"/>
+            <a:ext cx="960120" cy="347472"/>
+          </a:xfrm>
+          <a:prstGeom prst="rect">
+            <a:avLst/>
+          </a:prstGeom>
+          <a:noFill/>
+          <a:ln/>
+        </p:spPr>
+        <p:txBody>
+          <a:bodyPr wrap="square" lIns="0" tIns="0" rIns="0" bIns="0" rtlCol="0" anchor="ctr"/>
+          <a:lstStyle/>
+          <a:p>
+            <a:pPr algn="ctr" indent="0" marL="0">
+              <a:buNone/>
+            </a:pPr>
+            <a:r>
+              <a:rPr lang="en-US" sz="1050" dirty="0">
+                <a:solidFill>
+                  <a:srgbClr val="5A6B7D"/>
+                </a:solidFill>
+                <a:latin typeface="Calibri" pitchFamily="34" charset="0"/>
+                <a:ea typeface="Calibri" pitchFamily="34" charset="-122"/>
+                <a:cs typeface="Calibri" pitchFamily="34" charset="-120"/>
+              </a:rPr>
+              <a:t>MCS 0</a:t>
+            </a:r>
+            <a:endParaRPr lang="en-US" sz="1050" dirty="0"/>
+          </a:p>
+        </p:txBody>
+      </p:sp>
+      <p:sp>
+        <p:nvSpPr>
+          <p:cNvPr id="9" name="Shape 6"/>
+          <p:cNvSpPr/>
+          <p:nvPr/>
+        </p:nvSpPr>
+        <p:spPr>
+          <a:xfrm>
+            <a:off x="7269480" y="1746504"/>
+            <a:ext cx="320040" cy="0"/>
+          </a:xfrm>
+          <a:prstGeom prst="line">
+            <a:avLst/>
+          </a:prstGeom>
+          <a:noFill/>
+          <a:ln w="22225">
+            <a:solidFill>
+              <a:srgbClr val="5A6B7D"/>
+            </a:solidFill>
+            <a:prstDash val="solid"/>
+            <a:headEnd type="none"/>
+            <a:tailEnd type="triangle"/>
+          </a:ln>
+        </p:spPr>
+      </p:sp>
+      <p:sp>
+        <p:nvSpPr>
+          <p:cNvPr id="10" name="Shape 7"/>
+          <p:cNvSpPr/>
+          <p:nvPr/>
+        </p:nvSpPr>
+        <p:spPr>
+          <a:xfrm>
+            <a:off x="7635240" y="1572768"/>
+            <a:ext cx="1051560" cy="347472"/>
+          </a:xfrm>
+          <a:prstGeom prst="roundRect">
+            <a:avLst>
+              <a:gd name="adj" fmla="val 15789"/>
+            </a:avLst>
+          </a:prstGeom>
+          <a:solidFill>
+            <a:srgbClr val="DDF3E8"/>
+          </a:solidFill>
+          <a:ln w="12700">
+            <a:solidFill>
+              <a:srgbClr val="DDF3E8"/>
+            </a:solidFill>
+            <a:prstDash val="solid"/>
+          </a:ln>
+        </p:spPr>
+      </p:sp>
+      <p:sp>
+        <p:nvSpPr>
+          <p:cNvPr id="11" name="Text 8"/>
+          <p:cNvSpPr txBox="1"/>
+          <p:nvPr/>
+        </p:nvSpPr>
+        <p:spPr>
+          <a:xfrm>
+            <a:off x="7635240" y="1572768"/>
+            <a:ext cx="1051560" cy="347472"/>
+          </a:xfrm>
+          <a:prstGeom prst="rect">
+            <a:avLst/>
+          </a:prstGeom>
+          <a:noFill/>
+          <a:ln/>
+        </p:spPr>
+        <p:txBody>
+          <a:bodyPr wrap="square" lIns="0" tIns="0" rIns="0" bIns="0" rtlCol="0" anchor="ctr"/>
+          <a:lstStyle/>
+          <a:p>
+            <a:pPr algn="ctr" indent="0" marL="0">
+              <a:buNone/>
+            </a:pPr>
+            <a:r>
+              <a:rPr lang="en-US" sz="1050" b="1" dirty="0">
+                <a:solidFill>
+                  <a:srgbClr val="157A50"/>
+                </a:solidFill>
+                <a:latin typeface="Calibri" pitchFamily="34" charset="0"/>
+                <a:ea typeface="Calibri" pitchFamily="34" charset="-122"/>
+                <a:cs typeface="Calibri" pitchFamily="34" charset="-120"/>
+              </a:rPr>
+              <a:t>MCS 4</a:t>
+            </a:r>
+            <a:endParaRPr lang="en-US" sz="1050" dirty="0"/>
+          </a:p>
+        </p:txBody>
+      </p:sp>
+      <p:sp>
+        <p:nvSpPr>
+          <p:cNvPr id="12" name="Text 9"/>
+          <p:cNvSpPr txBox="1"/>
+          <p:nvPr/>
+        </p:nvSpPr>
+        <p:spPr>
+          <a:xfrm>
+            <a:off x="5212080" y="2048256"/>
+            <a:ext cx="1005840" cy="347472"/>
+          </a:xfrm>
+          <a:prstGeom prst="rect">
+            <a:avLst/>
+          </a:prstGeom>
+          <a:noFill/>
+          <a:ln/>
+        </p:spPr>
+        <p:txBody>
+          <a:bodyPr wrap="square" lIns="0" tIns="0" rIns="0" bIns="0" rtlCol="0" anchor="ctr"/>
+          <a:lstStyle/>
+          <a:p>
+            <a:pPr indent="0" marL="0">
+              <a:buNone/>
+            </a:pPr>
+            <a:r>
+              <a:rPr lang="en-US" sz="1100" b="1" dirty="0">
+                <a:solidFill>
+                  <a:srgbClr val="1A2B3C"/>
+                </a:solidFill>
+                <a:latin typeface="Calibri" pitchFamily="34" charset="0"/>
+                <a:ea typeface="Calibri" pitchFamily="34" charset="-122"/>
+                <a:cs typeface="Calibri" pitchFamily="34" charset="-120"/>
+              </a:rPr>
+              <a:t>QoS queue</a:t>
+            </a:r>
+            <a:endParaRPr lang="en-US" sz="1100" dirty="0"/>
+          </a:p>
+        </p:txBody>
+      </p:sp>
+      <p:sp>
+        <p:nvSpPr>
+          <p:cNvPr id="13" name="Shape 10"/>
+          <p:cNvSpPr/>
+          <p:nvPr/>
+        </p:nvSpPr>
+        <p:spPr>
+          <a:xfrm>
+            <a:off x="6263640" y="2048256"/>
+            <a:ext cx="960120" cy="347472"/>
+          </a:xfrm>
+          <a:prstGeom prst="roundRect">
+            <a:avLst>
+              <a:gd name="adj" fmla="val 15789"/>
+            </a:avLst>
+          </a:prstGeom>
+          <a:solidFill>
+            <a:srgbClr val="ECEFF2"/>
+          </a:solidFill>
+          <a:ln w="12700">
+            <a:solidFill>
+              <a:srgbClr val="ECEFF2"/>
+            </a:solidFill>
+            <a:prstDash val="solid"/>
+          </a:ln>
+        </p:spPr>
+      </p:sp>
+      <p:sp>
+        <p:nvSpPr>
+          <p:cNvPr id="14" name="Text 11"/>
+          <p:cNvSpPr txBox="1"/>
+          <p:nvPr/>
+        </p:nvSpPr>
+        <p:spPr>
+          <a:xfrm>
+            <a:off x="6263640" y="2048256"/>
+            <a:ext cx="960120" cy="347472"/>
+          </a:xfrm>
+          <a:prstGeom prst="rect">
+            <a:avLst/>
+          </a:prstGeom>
+          <a:noFill/>
+          <a:ln/>
+        </p:spPr>
+        <p:txBody>
+          <a:bodyPr wrap="square" lIns="0" tIns="0" rIns="0" bIns="0" rtlCol="0" anchor="ctr"/>
+          <a:lstStyle/>
+          <a:p>
+            <a:pPr algn="ctr" indent="0" marL="0">
+              <a:buNone/>
+            </a:pPr>
+            <a:r>
+              <a:rPr lang="en-US" sz="1050" dirty="0">
+                <a:solidFill>
+                  <a:srgbClr val="5A6B7D"/>
+                </a:solidFill>
+                <a:latin typeface="Calibri" pitchFamily="34" charset="0"/>
+                <a:ea typeface="Calibri" pitchFamily="34" charset="-122"/>
+                <a:cs typeface="Calibri" pitchFamily="34" charset="-120"/>
+              </a:rPr>
+              <a:t>FIFO</a:t>
+            </a:r>
+            <a:endParaRPr lang="en-US" sz="1050" dirty="0"/>
+          </a:p>
+        </p:txBody>
+      </p:sp>
+      <p:sp>
+        <p:nvSpPr>
+          <p:cNvPr id="15" name="Shape 12"/>
+          <p:cNvSpPr/>
+          <p:nvPr/>
+        </p:nvSpPr>
+        <p:spPr>
+          <a:xfrm>
+            <a:off x="7269480" y="2221992"/>
+            <a:ext cx="320040" cy="0"/>
+          </a:xfrm>
+          <a:prstGeom prst="line">
+            <a:avLst/>
+          </a:prstGeom>
+          <a:noFill/>
+          <a:ln w="22225">
+            <a:solidFill>
+              <a:srgbClr val="5A6B7D"/>
+            </a:solidFill>
+            <a:prstDash val="solid"/>
+            <a:headEnd type="none"/>
+            <a:tailEnd type="triangle"/>
+          </a:ln>
+        </p:spPr>
+      </p:sp>
+      <p:sp>
+        <p:nvSpPr>
+          <p:cNvPr id="16" name="Shape 13"/>
+          <p:cNvSpPr/>
+          <p:nvPr/>
+        </p:nvSpPr>
+        <p:spPr>
+          <a:xfrm>
+            <a:off x="7635240" y="2048256"/>
+            <a:ext cx="1051560" cy="347472"/>
+          </a:xfrm>
+          <a:prstGeom prst="roundRect">
+            <a:avLst>
+              <a:gd name="adj" fmla="val 15789"/>
+            </a:avLst>
+          </a:prstGeom>
+          <a:solidFill>
+            <a:srgbClr val="DDF3E8"/>
+          </a:solidFill>
+          <a:ln w="12700">
+            <a:solidFill>
+              <a:srgbClr val="DDF3E8"/>
+            </a:solidFill>
+            <a:prstDash val="solid"/>
+          </a:ln>
+        </p:spPr>
+      </p:sp>
+      <p:sp>
+        <p:nvSpPr>
+          <p:cNvPr id="17" name="Text 14"/>
+          <p:cNvSpPr txBox="1"/>
+          <p:nvPr/>
+        </p:nvSpPr>
+        <p:spPr>
+          <a:xfrm>
+            <a:off x="7635240" y="2048256"/>
+            <a:ext cx="1051560" cy="347472"/>
+          </a:xfrm>
+          <a:prstGeom prst="rect">
+            <a:avLst/>
+          </a:prstGeom>
+          <a:noFill/>
+          <a:ln/>
+        </p:spPr>
+        <p:txBody>
+          <a:bodyPr wrap="square" lIns="0" tIns="0" rIns="0" bIns="0" rtlCol="0" anchor="ctr"/>
+          <a:lstStyle/>
+          <a:p>
+            <a:pPr algn="ctr" indent="0" marL="0">
+              <a:buNone/>
+            </a:pPr>
+            <a:r>
+              <a:rPr lang="en-US" sz="1050" b="1" dirty="0">
+                <a:solidFill>
+                  <a:srgbClr val="157A50"/>
+                </a:solidFill>
+                <a:latin typeface="Calibri" pitchFamily="34" charset="0"/>
+                <a:ea typeface="Calibri" pitchFamily="34" charset="-122"/>
+                <a:cs typeface="Calibri" pitchFamily="34" charset="-120"/>
+              </a:rPr>
+              <a:t>PCP 6</a:t>
+            </a:r>
+            <a:endParaRPr lang="en-US" sz="1050" dirty="0"/>
+          </a:p>
+        </p:txBody>
+      </p:sp>
+      <p:sp>
+        <p:nvSpPr>
+          <p:cNvPr id="18" name="Text 15"/>
+          <p:cNvSpPr txBox="1"/>
+          <p:nvPr/>
+        </p:nvSpPr>
+        <p:spPr>
+          <a:xfrm>
+            <a:off x="5212080" y="2523744"/>
+            <a:ext cx="1005840" cy="347472"/>
+          </a:xfrm>
+          <a:prstGeom prst="rect">
+            <a:avLst/>
+          </a:prstGeom>
+          <a:noFill/>
+          <a:ln/>
+        </p:spPr>
+        <p:txBody>
+          <a:bodyPr wrap="square" lIns="0" tIns="0" rIns="0" bIns="0" rtlCol="0" anchor="ctr"/>
+          <a:lstStyle/>
+          <a:p>
+            <a:pPr indent="0" marL="0">
+              <a:buNone/>
+            </a:pPr>
+            <a:r>
+              <a:rPr lang="en-US" sz="1100" b="1" dirty="0">
+                <a:solidFill>
+                  <a:srgbClr val="1A2B3C"/>
+                </a:solidFill>
+                <a:latin typeface="Calibri" pitchFamily="34" charset="0"/>
+                <a:ea typeface="Calibri" pitchFamily="34" charset="-122"/>
+                <a:cs typeface="Calibri" pitchFamily="34" charset="-120"/>
+              </a:rPr>
+              <a:t>Carrier</a:t>
+            </a:r>
+            <a:endParaRPr lang="en-US" sz="1100" dirty="0"/>
+          </a:p>
+        </p:txBody>
+      </p:sp>
+      <p:sp>
+        <p:nvSpPr>
+          <p:cNvPr id="19" name="Shape 16"/>
+          <p:cNvSpPr/>
+          <p:nvPr/>
+        </p:nvSpPr>
+        <p:spPr>
+          <a:xfrm>
+            <a:off x="6263640" y="2523744"/>
+            <a:ext cx="960120" cy="347472"/>
+          </a:xfrm>
+          <a:prstGeom prst="roundRect">
+            <a:avLst>
+              <a:gd name="adj" fmla="val 15789"/>
+            </a:avLst>
+          </a:prstGeom>
+          <a:solidFill>
+            <a:srgbClr val="ECEFF2"/>
+          </a:solidFill>
+          <a:ln w="12700">
+            <a:solidFill>
+              <a:srgbClr val="ECEFF2"/>
+            </a:solidFill>
+            <a:prstDash val="solid"/>
+          </a:ln>
+        </p:spPr>
+      </p:sp>
+      <p:sp>
+        <p:nvSpPr>
+          <p:cNvPr id="20" name="Text 17"/>
+          <p:cNvSpPr txBox="1"/>
+          <p:nvPr/>
+        </p:nvSpPr>
+        <p:spPr>
+          <a:xfrm>
+            <a:off x="6263640" y="2523744"/>
+            <a:ext cx="960120" cy="347472"/>
+          </a:xfrm>
+          <a:prstGeom prst="rect">
+            <a:avLst/>
+          </a:prstGeom>
+          <a:noFill/>
+          <a:ln/>
+        </p:spPr>
+        <p:txBody>
+          <a:bodyPr wrap="square" lIns="0" tIns="0" rIns="0" bIns="0" rtlCol="0" anchor="ctr"/>
+          <a:lstStyle/>
+          <a:p>
+            <a:pPr algn="ctr" indent="0" marL="0">
+              <a:buNone/>
+            </a:pPr>
+            <a:r>
+              <a:rPr lang="en-US" sz="1050" dirty="0">
+                <a:solidFill>
+                  <a:srgbClr val="5A6B7D"/>
+                </a:solidFill>
+                <a:latin typeface="Calibri" pitchFamily="34" charset="0"/>
+                <a:ea typeface="Calibri" pitchFamily="34" charset="-122"/>
+                <a:cs typeface="Calibri" pitchFamily="34" charset="-120"/>
+              </a:rPr>
+              <a:t>60.48 GHz</a:t>
+            </a:r>
+            <a:endParaRPr lang="en-US" sz="1050" dirty="0"/>
+          </a:p>
+        </p:txBody>
+      </p:sp>
+      <p:sp>
+        <p:nvSpPr>
+          <p:cNvPr id="21" name="Shape 18"/>
+          <p:cNvSpPr/>
+          <p:nvPr/>
+        </p:nvSpPr>
+        <p:spPr>
+          <a:xfrm>
+            <a:off x="7269480" y="2697480"/>
+            <a:ext cx="320040" cy="0"/>
+          </a:xfrm>
+          <a:prstGeom prst="line">
+            <a:avLst/>
+          </a:prstGeom>
+          <a:noFill/>
+          <a:ln w="22225">
+            <a:solidFill>
+              <a:srgbClr val="5A6B7D"/>
+            </a:solidFill>
+            <a:prstDash val="solid"/>
+            <a:headEnd type="none"/>
+            <a:tailEnd type="triangle"/>
+          </a:ln>
+        </p:spPr>
+      </p:sp>
+      <p:sp>
+        <p:nvSpPr>
+          <p:cNvPr id="22" name="Shape 19"/>
+          <p:cNvSpPr/>
+          <p:nvPr/>
+        </p:nvSpPr>
+        <p:spPr>
+          <a:xfrm>
+            <a:off x="7635240" y="2523744"/>
+            <a:ext cx="1051560" cy="347472"/>
+          </a:xfrm>
+          <a:prstGeom prst="roundRect">
+            <a:avLst>
+              <a:gd name="adj" fmla="val 15789"/>
+            </a:avLst>
+          </a:prstGeom>
+          <a:solidFill>
+            <a:srgbClr val="DDF3E8"/>
+          </a:solidFill>
+          <a:ln w="12700">
+            <a:solidFill>
+              <a:srgbClr val="DDF3E8"/>
+            </a:solidFill>
+            <a:prstDash val="solid"/>
+          </a:ln>
+        </p:spPr>
+      </p:sp>
+      <p:sp>
+        <p:nvSpPr>
+          <p:cNvPr id="23" name="Text 20"/>
+          <p:cNvSpPr txBox="1"/>
+          <p:nvPr/>
+        </p:nvSpPr>
+        <p:spPr>
+          <a:xfrm>
+            <a:off x="7635240" y="2523744"/>
+            <a:ext cx="1051560" cy="347472"/>
+          </a:xfrm>
+          <a:prstGeom prst="rect">
+            <a:avLst/>
+          </a:prstGeom>
+          <a:noFill/>
+          <a:ln/>
+        </p:spPr>
+        <p:txBody>
+          <a:bodyPr wrap="square" lIns="0" tIns="0" rIns="0" bIns="0" rtlCol="0" anchor="ctr"/>
+          <a:lstStyle/>
+          <a:p>
+            <a:pPr algn="ctr" indent="0" marL="0">
+              <a:buNone/>
+            </a:pPr>
+            <a:r>
+              <a:rPr lang="en-US" sz="1050" b="1" dirty="0">
+                <a:solidFill>
+                  <a:srgbClr val="157A50"/>
+                </a:solidFill>
+                <a:latin typeface="Calibri" pitchFamily="34" charset="0"/>
+                <a:ea typeface="Calibri" pitchFamily="34" charset="-122"/>
+                <a:cs typeface="Calibri" pitchFamily="34" charset="-120"/>
+              </a:rPr>
+              <a:t>64.80 GHz</a:t>
+            </a:r>
+            <a:endParaRPr lang="en-US" sz="1050" dirty="0"/>
+          </a:p>
+        </p:txBody>
+      </p:sp>
+      <p:sp>
+        <p:nvSpPr>
+          <p:cNvPr id="24" name="Shape 21"/>
+          <p:cNvSpPr/>
+          <p:nvPr/>
+        </p:nvSpPr>
+        <p:spPr>
+          <a:xfrm>
+            <a:off x="5212080" y="3154680"/>
+            <a:ext cx="3474720" cy="1600200"/>
+          </a:xfrm>
+          <a:prstGeom prst="roundRect">
+            <a:avLst>
+              <a:gd name="adj" fmla="val 4571"/>
+            </a:avLst>
+          </a:prstGeom>
+          <a:solidFill>
+            <a:srgbClr val="F2F5F8"/>
+          </a:solidFill>
+          <a:ln w="12700">
+            <a:solidFill>
+              <a:srgbClr val="F2F5F8"/>
+            </a:solidFill>
+            <a:prstDash val="solid"/>
+          </a:ln>
+        </p:spPr>
+      </p:sp>
+      <p:sp>
+        <p:nvSpPr>
+          <p:cNvPr id="25" name="Text 22"/>
+          <p:cNvSpPr txBox="1"/>
+          <p:nvPr/>
+        </p:nvSpPr>
+        <p:spPr>
+          <a:xfrm>
+            <a:off x="5394960" y="3291840"/>
+            <a:ext cx="3108960" cy="228600"/>
+          </a:xfrm>
+          <a:prstGeom prst="rect">
+            <a:avLst/>
+          </a:prstGeom>
+          <a:noFill/>
+          <a:ln/>
+        </p:spPr>
+        <p:txBody>
+          <a:bodyPr wrap="square" lIns="0" tIns="0" rIns="0" bIns="0" rtlCol="0" anchor="t"/>
+          <a:lstStyle/>
+          <a:p>
+            <a:pPr indent="0" marL="0">
+              <a:buNone/>
+            </a:pPr>
+            <a:r>
+              <a:rPr lang="en-US" sz="1100" b="1" dirty="0">
+                <a:solidFill>
+                  <a:srgbClr val="1A2B3C"/>
+                </a:solidFill>
+                <a:latin typeface="Calibri" pitchFamily="34" charset="0"/>
+                <a:ea typeface="Calibri" pitchFamily="34" charset="-122"/>
+                <a:cs typeface="Calibri" pitchFamily="34" charset="-120"/>
+              </a:rPr>
+              <a:t>Predicted URLLC latency</a:t>
+            </a:r>
+            <a:endParaRPr lang="en-US" sz="1100" dirty="0"/>
+          </a:p>
+        </p:txBody>
+      </p:sp>
+      <p:sp>
+        <p:nvSpPr>
+          <p:cNvPr id="26" name="Text 23"/>
+          <p:cNvSpPr txBox="1"/>
+          <p:nvPr/>
+        </p:nvSpPr>
+        <p:spPr>
+          <a:xfrm>
+            <a:off x="5394960" y="3538728"/>
+            <a:ext cx="3108960" cy="457200"/>
+          </a:xfrm>
+          <a:prstGeom prst="rect">
+            <a:avLst/>
+          </a:prstGeom>
+          <a:noFill/>
+          <a:ln/>
+        </p:spPr>
+        <p:txBody>
+          <a:bodyPr wrap="square" lIns="0" tIns="0" rIns="0" bIns="0" rtlCol="0" anchor="ctr"/>
+          <a:lstStyle/>
+          <a:p>
+            <a:pPr indent="0" marL="0">
+              <a:buNone/>
+            </a:pPr>
+            <a:r>
+              <a:rPr lang="en-US" sz="2400" b="1" dirty="0">
+                <a:solidFill>
+                  <a:srgbClr val="0FA3B1"/>
+                </a:solidFill>
+                <a:latin typeface="Arial" pitchFamily="34" charset="0"/>
+                <a:ea typeface="Arial" pitchFamily="34" charset="-122"/>
+                <a:cs typeface="Arial" pitchFamily="34" charset="-120"/>
+              </a:rPr>
+              <a:t>1.12 ms</a:t>
+            </a:r>
+            <a:pPr indent="0" marL="0">
+              <a:buNone/>
+            </a:pPr>
+            <a:r>
+              <a:rPr lang="en-US" sz="1100" dirty="0">
+                <a:solidFill>
+                  <a:srgbClr val="5A6B7D"/>
+                </a:solidFill>
+                <a:latin typeface="Arial" pitchFamily="34" charset="0"/>
+                <a:ea typeface="Arial" pitchFamily="34" charset="-122"/>
+                <a:cs typeface="Arial" pitchFamily="34" charset="-120"/>
+              </a:rPr>
+              <a:t>  of a 1.5 ms SLA</a:t>
+            </a:r>
+            <a:endParaRPr lang="en-US" sz="1100" dirty="0"/>
+          </a:p>
+        </p:txBody>
+      </p:sp>
+      <p:sp>
+        <p:nvSpPr>
+          <p:cNvPr id="27" name="Shape 24"/>
+          <p:cNvSpPr/>
+          <p:nvPr/>
+        </p:nvSpPr>
+        <p:spPr>
+          <a:xfrm>
+            <a:off x="5394960" y="4114800"/>
+            <a:ext cx="3108960" cy="146304"/>
+          </a:xfrm>
+          <a:prstGeom prst="rect">
+            <a:avLst/>
+          </a:prstGeom>
+          <a:solidFill>
+            <a:srgbClr val="D5DDE5"/>
+          </a:solidFill>
+          <a:ln w="12700">
             <a:solidFill>
               <a:srgbClr val="D5DDE5"/>
             </a:solidFill>
@@ -13676,348 +18060,16 @@
       </p:sp>
       <p:sp>
         <p:nvSpPr>
-          <p:cNvPr id="5" name="Text 3"/>
-          <p:cNvSpPr txBox="1"/>
-          <p:nvPr/>
-        </p:nvSpPr>
-        <p:spPr>
-          <a:xfrm>
-            <a:off x="1920240" y="2651760"/>
-            <a:ext cx="1828800" cy="457200"/>
-          </a:xfrm>
-          <a:prstGeom prst="rect">
-            <a:avLst/>
-          </a:prstGeom>
-          <a:noFill/>
-          <a:ln/>
-        </p:spPr>
-        <p:txBody>
-          <a:bodyPr wrap="square" lIns="0" tIns="0" rIns="0" bIns="0" rtlCol="0" anchor="ctr"/>
-          <a:lstStyle/>
-          <a:p>
-            <a:pPr algn="ctr" indent="0" marL="0">
-              <a:buNone/>
-            </a:pPr>
-            <a:r>
-              <a:rPr lang="en-US" sz="2600" b="1" dirty="0">
-                <a:solidFill>
-                  <a:srgbClr val="0B1D33"/>
-                </a:solidFill>
-                <a:latin typeface="Arial" pitchFamily="34" charset="0"/>
-                <a:ea typeface="Arial" pitchFamily="34" charset="-122"/>
-                <a:cs typeface="Arial" pitchFamily="34" charset="-120"/>
-              </a:rPr>
-              <a:t>≈ 2 s</a:t>
-            </a:r>
-            <a:endParaRPr lang="en-US" sz="2600" dirty="0"/>
-          </a:p>
-        </p:txBody>
-      </p:sp>
-      <p:sp>
-        <p:nvSpPr>
-          <p:cNvPr id="6" name="Text 4"/>
-          <p:cNvSpPr txBox="1"/>
-          <p:nvPr/>
-        </p:nvSpPr>
-        <p:spPr>
-          <a:xfrm>
-            <a:off x="1920240" y="3108960"/>
-            <a:ext cx="1828800" cy="274320"/>
-          </a:xfrm>
-          <a:prstGeom prst="rect">
-            <a:avLst/>
-          </a:prstGeom>
-          <a:noFill/>
-          <a:ln/>
-        </p:spPr>
-        <p:txBody>
-          <a:bodyPr wrap="square" lIns="0" tIns="0" rIns="0" bIns="0" rtlCol="0" anchor="t"/>
-          <a:lstStyle/>
-          <a:p>
-            <a:pPr algn="ctr" indent="0" marL="0">
-              <a:buNone/>
-            </a:pPr>
-            <a:r>
-              <a:rPr lang="en-US" sz="1100" dirty="0">
-                <a:solidFill>
-                  <a:srgbClr val="5A6B7D"/>
-                </a:solidFill>
-                <a:latin typeface="Calibri" pitchFamily="34" charset="0"/>
-                <a:ea typeface="Calibri" pitchFamily="34" charset="-122"/>
-                <a:cs typeface="Calibri" pitchFamily="34" charset="-120"/>
-              </a:rPr>
-              <a:t>per loop</a:t>
-            </a:r>
-            <a:endParaRPr lang="en-US" sz="1100" dirty="0"/>
-          </a:p>
-        </p:txBody>
-      </p:sp>
-      <p:sp>
-        <p:nvSpPr>
-          <p:cNvPr id="7" name="Shape 5"/>
+          <p:cNvPr id="28" name="Shape 25"/>
           <p:cNvSpPr/>
           <p:nvPr/>
         </p:nvSpPr>
         <p:spPr>
           <a:xfrm>
-            <a:off x="2551176" y="1453896"/>
-            <a:ext cx="566928" cy="566928"/>
-          </a:xfrm>
-          <a:prstGeom prst="ellipse">
-            <a:avLst/>
-          </a:prstGeom>
-          <a:solidFill>
-            <a:srgbClr val="7C5CFF"/>
-          </a:solidFill>
-          <a:ln w="12700">
-            <a:solidFill>
-              <a:srgbClr val="7C5CFF"/>
-            </a:solidFill>
-            <a:prstDash val="solid"/>
-          </a:ln>
-        </p:spPr>
-      </p:sp>
-      <p:pic>
-        <p:nvPicPr>
-          <p:cNvPr id="8" name="Image 0" descr="preencoded.png">    </p:cNvPr>
-          <p:cNvPicPr>
-            <a:picLocks noChangeAspect="1"/>
-          </p:cNvPicPr>
-          <p:nvPr/>
-        </p:nvPicPr>
-        <p:blipFill>
-          <a:blip r:embed="rId1"/>
-          <a:stretch>
-            <a:fillRect/>
-          </a:stretch>
-        </p:blipFill>
-        <p:spPr>
-          <a:xfrm>
-            <a:off x="2692908" y="1595628"/>
-            <a:ext cx="283464" cy="283464"/>
-          </a:xfrm>
-          <a:prstGeom prst="rect">
-            <a:avLst/>
-          </a:prstGeom>
-        </p:spPr>
-      </p:pic>
-      <p:sp>
-        <p:nvSpPr>
-          <p:cNvPr id="9" name="Text 6"/>
-          <p:cNvSpPr txBox="1"/>
-          <p:nvPr/>
-        </p:nvSpPr>
-        <p:spPr>
-          <a:xfrm>
-            <a:off x="3209544" y="1490472"/>
-            <a:ext cx="1143000" cy="246888"/>
-          </a:xfrm>
-          <a:prstGeom prst="rect">
-            <a:avLst/>
-          </a:prstGeom>
-          <a:noFill/>
-          <a:ln/>
-        </p:spPr>
-        <p:txBody>
-          <a:bodyPr wrap="square" lIns="0" tIns="0" rIns="0" bIns="0" rtlCol="0" anchor="t"/>
-          <a:lstStyle/>
-          <a:p>
-            <a:pPr algn="l" indent="0" marL="0">
-              <a:buNone/>
-            </a:pPr>
-            <a:r>
-              <a:rPr lang="en-US" sz="1100" b="1" dirty="0">
-                <a:solidFill>
-                  <a:srgbClr val="1A2B3C"/>
-                </a:solidFill>
-                <a:latin typeface="Arial" pitchFamily="34" charset="0"/>
-                <a:ea typeface="Arial" pitchFamily="34" charset="-122"/>
-                <a:cs typeface="Arial" pitchFamily="34" charset="-120"/>
-              </a:rPr>
-              <a:t>1 Intent</a:t>
-            </a:r>
-            <a:endParaRPr lang="en-US" sz="1100" dirty="0"/>
-          </a:p>
-        </p:txBody>
-      </p:sp>
-      <p:sp>
-        <p:nvSpPr>
-          <p:cNvPr id="10" name="Text 7"/>
-          <p:cNvSpPr txBox="1"/>
-          <p:nvPr/>
-        </p:nvSpPr>
-        <p:spPr>
-          <a:xfrm>
-            <a:off x="3209544" y="1728216"/>
-            <a:ext cx="1143000" cy="228600"/>
-          </a:xfrm>
-          <a:prstGeom prst="rect">
-            <a:avLst/>
-          </a:prstGeom>
-          <a:noFill/>
-          <a:ln/>
-        </p:spPr>
-        <p:txBody>
-          <a:bodyPr wrap="square" lIns="0" tIns="0" rIns="0" bIns="0" rtlCol="0" anchor="t"/>
-          <a:lstStyle/>
-          <a:p>
-            <a:pPr algn="l" indent="0" marL="0">
-              <a:buNone/>
-            </a:pPr>
-            <a:r>
-              <a:rPr lang="en-US" sz="950" dirty="0">
-                <a:solidFill>
-                  <a:srgbClr val="5A6B7D"/>
-                </a:solidFill>
-                <a:latin typeface="Calibri" pitchFamily="34" charset="0"/>
-                <a:ea typeface="Calibri" pitchFamily="34" charset="-122"/>
-                <a:cs typeface="Calibri" pitchFamily="34" charset="-120"/>
-              </a:rPr>
-              <a:t>TMF921</a:t>
-            </a:r>
-            <a:endParaRPr lang="en-US" sz="950" dirty="0"/>
-          </a:p>
-        </p:txBody>
-      </p:sp>
-      <p:sp>
-        <p:nvSpPr>
-          <p:cNvPr id="11" name="Shape 8"/>
-          <p:cNvSpPr/>
-          <p:nvPr/>
-        </p:nvSpPr>
-        <p:spPr>
-          <a:xfrm>
-            <a:off x="3768681" y="2338465"/>
-            <a:ext cx="566928" cy="566928"/>
-          </a:xfrm>
-          <a:prstGeom prst="ellipse">
-            <a:avLst/>
-          </a:prstGeom>
-          <a:solidFill>
-            <a:srgbClr val="E8912D"/>
-          </a:solidFill>
-          <a:ln w="12700">
-            <a:solidFill>
-              <a:srgbClr val="E8912D"/>
-            </a:solidFill>
-            <a:prstDash val="solid"/>
-          </a:ln>
-        </p:spPr>
-      </p:sp>
-      <p:pic>
-        <p:nvPicPr>
-          <p:cNvPr id="12" name="Image 1" descr="preencoded.png">    </p:cNvPr>
-          <p:cNvPicPr>
-            <a:picLocks noChangeAspect="1"/>
-          </p:cNvPicPr>
-          <p:nvPr/>
-        </p:nvPicPr>
-        <p:blipFill>
-          <a:blip r:embed="rId2"/>
-          <a:stretch>
-            <a:fillRect/>
-          </a:stretch>
-        </p:blipFill>
-        <p:spPr>
-          <a:xfrm>
-            <a:off x="3910413" y="2480197"/>
-            <a:ext cx="283464" cy="283464"/>
-          </a:xfrm>
-          <a:prstGeom prst="rect">
-            <a:avLst/>
-          </a:prstGeom>
-        </p:spPr>
-      </p:pic>
-      <p:sp>
-        <p:nvSpPr>
-          <p:cNvPr id="13" name="Text 9"/>
-          <p:cNvSpPr txBox="1"/>
-          <p:nvPr/>
-        </p:nvSpPr>
-        <p:spPr>
-          <a:xfrm>
-            <a:off x="4427049" y="2375041"/>
-            <a:ext cx="1143000" cy="246888"/>
-          </a:xfrm>
-          <a:prstGeom prst="rect">
-            <a:avLst/>
-          </a:prstGeom>
-          <a:noFill/>
-          <a:ln/>
-        </p:spPr>
-        <p:txBody>
-          <a:bodyPr wrap="square" lIns="0" tIns="0" rIns="0" bIns="0" rtlCol="0" anchor="t"/>
-          <a:lstStyle/>
-          <a:p>
-            <a:pPr algn="l" indent="0" marL="0">
-              <a:buNone/>
-            </a:pPr>
-            <a:r>
-              <a:rPr lang="en-US" sz="1100" b="1" dirty="0">
-                <a:solidFill>
-                  <a:srgbClr val="1A2B3C"/>
-                </a:solidFill>
-                <a:latin typeface="Arial" pitchFamily="34" charset="0"/>
-                <a:ea typeface="Arial" pitchFamily="34" charset="-122"/>
-                <a:cs typeface="Arial" pitchFamily="34" charset="-120"/>
-              </a:rPr>
-              <a:t>2 Simulate</a:t>
-            </a:r>
-            <a:endParaRPr lang="en-US" sz="1100" dirty="0"/>
-          </a:p>
-        </p:txBody>
-      </p:sp>
-      <p:sp>
-        <p:nvSpPr>
-          <p:cNvPr id="14" name="Text 10"/>
-          <p:cNvSpPr txBox="1"/>
-          <p:nvPr/>
-        </p:nvSpPr>
-        <p:spPr>
-          <a:xfrm>
-            <a:off x="4427049" y="2612785"/>
-            <a:ext cx="1143000" cy="228600"/>
-          </a:xfrm>
-          <a:prstGeom prst="rect">
-            <a:avLst/>
-          </a:prstGeom>
-          <a:noFill/>
-          <a:ln/>
-        </p:spPr>
-        <p:txBody>
-          <a:bodyPr wrap="square" lIns="0" tIns="0" rIns="0" bIns="0" rtlCol="0" anchor="t"/>
-          <a:lstStyle/>
-          <a:p>
-            <a:pPr algn="l" indent="0" marL="0">
-              <a:buNone/>
-            </a:pPr>
-            <a:r>
-              <a:rPr lang="en-US" sz="950" dirty="0">
-                <a:solidFill>
-                  <a:srgbClr val="5A6B7D"/>
-                </a:solidFill>
-                <a:latin typeface="Calibri" pitchFamily="34" charset="0"/>
-                <a:ea typeface="Calibri" pitchFamily="34" charset="-122"/>
-                <a:cs typeface="Calibri" pitchFamily="34" charset="-120"/>
-              </a:rPr>
-              <a:t>ns-3 what-if</a:t>
-            </a:r>
-            <a:endParaRPr lang="en-US" sz="950" dirty="0"/>
-          </a:p>
-        </p:txBody>
-      </p:sp>
-      <p:sp>
-        <p:nvSpPr>
-          <p:cNvPr id="15" name="Shape 11"/>
-          <p:cNvSpPr/>
-          <p:nvPr/>
-        </p:nvSpPr>
-        <p:spPr>
-          <a:xfrm>
-            <a:off x="3303635" y="3769727"/>
-            <a:ext cx="566928" cy="566928"/>
-          </a:xfrm>
-          <a:prstGeom prst="ellipse">
+            <a:off x="5394960" y="4114800"/>
+            <a:ext cx="2321357" cy="146304"/>
+          </a:xfrm>
+          <a:prstGeom prst="rect">
             <a:avLst/>
           </a:prstGeom>
           <a:solidFill>
@@ -14031,40 +18083,16 @@
           </a:ln>
         </p:spPr>
       </p:sp>
-      <p:pic>
-        <p:nvPicPr>
-          <p:cNvPr id="16" name="Image 2" descr="preencoded.png">    </p:cNvPr>
-          <p:cNvPicPr>
-            <a:picLocks noChangeAspect="1"/>
-          </p:cNvPicPr>
-          <p:nvPr/>
-        </p:nvPicPr>
-        <p:blipFill>
-          <a:blip r:embed="rId3"/>
-          <a:stretch>
-            <a:fillRect/>
-          </a:stretch>
-        </p:blipFill>
-        <p:spPr>
-          <a:xfrm>
-            <a:off x="3445367" y="3911459"/>
-            <a:ext cx="283464" cy="283464"/>
-          </a:xfrm>
-          <a:prstGeom prst="rect">
-            <a:avLst/>
-          </a:prstGeom>
-        </p:spPr>
-      </p:pic>
-      <p:sp>
-        <p:nvSpPr>
-          <p:cNvPr id="17" name="Text 12"/>
-          <p:cNvSpPr txBox="1"/>
-          <p:nvPr/>
-        </p:nvSpPr>
-        <p:spPr>
-          <a:xfrm>
-            <a:off x="3962003" y="3806303"/>
-            <a:ext cx="1143000" cy="246888"/>
+      <p:sp>
+        <p:nvSpPr>
+          <p:cNvPr id="29" name="Text 26"/>
+          <p:cNvSpPr txBox="1"/>
+          <p:nvPr/>
+        </p:nvSpPr>
+        <p:spPr>
+          <a:xfrm>
+            <a:off x="5394960" y="4343400"/>
+            <a:ext cx="3108960" cy="228600"/>
           </a:xfrm>
           <a:prstGeom prst="rect">
             <a:avLst/>
@@ -14076,46 +18104,7 @@
           <a:bodyPr wrap="square" lIns="0" tIns="0" rIns="0" bIns="0" rtlCol="0" anchor="t"/>
           <a:lstStyle/>
           <a:p>
-            <a:pPr algn="l" indent="0" marL="0">
-              <a:buNone/>
-            </a:pPr>
-            <a:r>
-              <a:rPr lang="en-US" sz="1100" b="1" dirty="0">
-                <a:solidFill>
-                  <a:srgbClr val="1A2B3C"/>
-                </a:solidFill>
-                <a:latin typeface="Arial" pitchFamily="34" charset="0"/>
-                <a:ea typeface="Arial" pitchFamily="34" charset="-122"/>
-                <a:cs typeface="Arial" pitchFamily="34" charset="-120"/>
-              </a:rPr>
-              <a:t>3 Verify</a:t>
-            </a:r>
-            <a:endParaRPr lang="en-US" sz="1100" dirty="0"/>
-          </a:p>
-        </p:txBody>
-      </p:sp>
-      <p:sp>
-        <p:nvSpPr>
-          <p:cNvPr id="18" name="Text 13"/>
-          <p:cNvSpPr txBox="1"/>
-          <p:nvPr/>
-        </p:nvSpPr>
-        <p:spPr>
-          <a:xfrm>
-            <a:off x="3962003" y="4044047"/>
-            <a:ext cx="1143000" cy="228600"/>
-          </a:xfrm>
-          <a:prstGeom prst="rect">
-            <a:avLst/>
-          </a:prstGeom>
-          <a:noFill/>
-          <a:ln/>
-        </p:spPr>
-        <p:txBody>
-          <a:bodyPr wrap="square" lIns="0" tIns="0" rIns="0" bIns="0" rtlCol="0" anchor="t"/>
-          <a:lstStyle/>
-          <a:p>
-            <a:pPr algn="l" indent="0" marL="0">
+            <a:pPr indent="0" marL="0">
               <a:buNone/>
             </a:pPr>
             <a:r>
@@ -14127,782 +18116,9 @@
                 <a:ea typeface="Calibri" pitchFamily="34" charset="-122"/>
                 <a:cs typeface="Calibri" pitchFamily="34" charset="-120"/>
               </a:rPr>
-              <a:t>TS 28.561 gates</a:t>
+              <a:t>25% headroom → change passes the latency gate</a:t>
             </a:r>
             <a:endParaRPr lang="en-US" sz="950" dirty="0"/>
-          </a:p>
-        </p:txBody>
-      </p:sp>
-      <p:sp>
-        <p:nvSpPr>
-          <p:cNvPr id="19" name="Shape 14"/>
-          <p:cNvSpPr/>
-          <p:nvPr/>
-        </p:nvSpPr>
-        <p:spPr>
-          <a:xfrm>
-            <a:off x="1798717" y="3769727"/>
-            <a:ext cx="566928" cy="566928"/>
-          </a:xfrm>
-          <a:prstGeom prst="ellipse">
-            <a:avLst/>
-          </a:prstGeom>
-          <a:solidFill>
-            <a:srgbClr val="22A06B"/>
-          </a:solidFill>
-          <a:ln w="12700">
-            <a:solidFill>
-              <a:srgbClr val="22A06B"/>
-            </a:solidFill>
-            <a:prstDash val="solid"/>
-          </a:ln>
-        </p:spPr>
-      </p:sp>
-      <p:pic>
-        <p:nvPicPr>
-          <p:cNvPr id="20" name="Image 3" descr="preencoded.png">    </p:cNvPr>
-          <p:cNvPicPr>
-            <a:picLocks noChangeAspect="1"/>
-          </p:cNvPicPr>
-          <p:nvPr/>
-        </p:nvPicPr>
-        <p:blipFill>
-          <a:blip r:embed="rId4"/>
-          <a:stretch>
-            <a:fillRect/>
-          </a:stretch>
-        </p:blipFill>
-        <p:spPr>
-          <a:xfrm>
-            <a:off x="1940449" y="3911459"/>
-            <a:ext cx="283464" cy="283464"/>
-          </a:xfrm>
-          <a:prstGeom prst="rect">
-            <a:avLst/>
-          </a:prstGeom>
-        </p:spPr>
-      </p:pic>
-      <p:sp>
-        <p:nvSpPr>
-          <p:cNvPr id="21" name="Text 15"/>
-          <p:cNvSpPr txBox="1"/>
-          <p:nvPr/>
-        </p:nvSpPr>
-        <p:spPr>
-          <a:xfrm>
-            <a:off x="756301" y="3806303"/>
-            <a:ext cx="950976" cy="246888"/>
-          </a:xfrm>
-          <a:prstGeom prst="rect">
-            <a:avLst/>
-          </a:prstGeom>
-          <a:noFill/>
-          <a:ln/>
-        </p:spPr>
-        <p:txBody>
-          <a:bodyPr wrap="square" lIns="0" tIns="0" rIns="0" bIns="0" rtlCol="0" anchor="t"/>
-          <a:lstStyle/>
-          <a:p>
-            <a:pPr algn="r" indent="0" marL="0">
-              <a:buNone/>
-            </a:pPr>
-            <a:r>
-              <a:rPr lang="en-US" sz="1100" b="1" dirty="0">
-                <a:solidFill>
-                  <a:srgbClr val="1A2B3C"/>
-                </a:solidFill>
-                <a:latin typeface="Arial" pitchFamily="34" charset="0"/>
-                <a:ea typeface="Arial" pitchFamily="34" charset="-122"/>
-                <a:cs typeface="Arial" pitchFamily="34" charset="-120"/>
-              </a:rPr>
-              <a:t>4 Actuate</a:t>
-            </a:r>
-            <a:endParaRPr lang="en-US" sz="1100" dirty="0"/>
-          </a:p>
-        </p:txBody>
-      </p:sp>
-      <p:sp>
-        <p:nvSpPr>
-          <p:cNvPr id="22" name="Text 16"/>
-          <p:cNvSpPr txBox="1"/>
-          <p:nvPr/>
-        </p:nvSpPr>
-        <p:spPr>
-          <a:xfrm>
-            <a:off x="756301" y="4044047"/>
-            <a:ext cx="950976" cy="228600"/>
-          </a:xfrm>
-          <a:prstGeom prst="rect">
-            <a:avLst/>
-          </a:prstGeom>
-          <a:noFill/>
-          <a:ln/>
-        </p:spPr>
-        <p:txBody>
-          <a:bodyPr wrap="square" lIns="0" tIns="0" rIns="0" bIns="0" rtlCol="0" anchor="t"/>
-          <a:lstStyle/>
-          <a:p>
-            <a:pPr algn="r" indent="0" marL="0">
-              <a:buNone/>
-            </a:pPr>
-            <a:r>
-              <a:rPr lang="en-US" sz="950" dirty="0">
-                <a:solidFill>
-                  <a:srgbClr val="5A6B7D"/>
-                </a:solidFill>
-                <a:latin typeface="Calibri" pitchFamily="34" charset="0"/>
-                <a:ea typeface="Calibri" pitchFamily="34" charset="-122"/>
-                <a:cs typeface="Calibri" pitchFamily="34" charset="-120"/>
-              </a:rPr>
-              <a:t>RESTCONF 2PC</a:t>
-            </a:r>
-            <a:endParaRPr lang="en-US" sz="950" dirty="0"/>
-          </a:p>
-        </p:txBody>
-      </p:sp>
-      <p:sp>
-        <p:nvSpPr>
-          <p:cNvPr id="23" name="Shape 17"/>
-          <p:cNvSpPr/>
-          <p:nvPr/>
-        </p:nvSpPr>
-        <p:spPr>
-          <a:xfrm>
-            <a:off x="1333671" y="2338465"/>
-            <a:ext cx="566928" cy="566928"/>
-          </a:xfrm>
-          <a:prstGeom prst="ellipse">
-            <a:avLst/>
-          </a:prstGeom>
-          <a:solidFill>
-            <a:srgbClr val="14304F"/>
-          </a:solidFill>
-          <a:ln w="12700">
-            <a:solidFill>
-              <a:srgbClr val="14304F"/>
-            </a:solidFill>
-            <a:prstDash val="solid"/>
-          </a:ln>
-        </p:spPr>
-      </p:sp>
-      <p:pic>
-        <p:nvPicPr>
-          <p:cNvPr id="24" name="Image 4" descr="preencoded.png">    </p:cNvPr>
-          <p:cNvPicPr>
-            <a:picLocks noChangeAspect="1"/>
-          </p:cNvPicPr>
-          <p:nvPr/>
-        </p:nvPicPr>
-        <p:blipFill>
-          <a:blip r:embed="rId5"/>
-          <a:stretch>
-            <a:fillRect/>
-          </a:stretch>
-        </p:blipFill>
-        <p:spPr>
-          <a:xfrm>
-            <a:off x="1475403" y="2480197"/>
-            <a:ext cx="283464" cy="283464"/>
-          </a:xfrm>
-          <a:prstGeom prst="rect">
-            <a:avLst/>
-          </a:prstGeom>
-        </p:spPr>
-      </p:pic>
-      <p:sp>
-        <p:nvSpPr>
-          <p:cNvPr id="25" name="Text 18"/>
-          <p:cNvSpPr txBox="1"/>
-          <p:nvPr/>
-        </p:nvSpPr>
-        <p:spPr>
-          <a:xfrm>
-            <a:off x="291255" y="2375041"/>
-            <a:ext cx="950976" cy="246888"/>
-          </a:xfrm>
-          <a:prstGeom prst="rect">
-            <a:avLst/>
-          </a:prstGeom>
-          <a:noFill/>
-          <a:ln/>
-        </p:spPr>
-        <p:txBody>
-          <a:bodyPr wrap="square" lIns="0" tIns="0" rIns="0" bIns="0" rtlCol="0" anchor="t"/>
-          <a:lstStyle/>
-          <a:p>
-            <a:pPr algn="r" indent="0" marL="0">
-              <a:buNone/>
-            </a:pPr>
-            <a:r>
-              <a:rPr lang="en-US" sz="1100" b="1" dirty="0">
-                <a:solidFill>
-                  <a:srgbClr val="1A2B3C"/>
-                </a:solidFill>
-                <a:latin typeface="Arial" pitchFamily="34" charset="0"/>
-                <a:ea typeface="Arial" pitchFamily="34" charset="-122"/>
-                <a:cs typeface="Arial" pitchFamily="34" charset="-120"/>
-              </a:rPr>
-              <a:t>5 Monitor</a:t>
-            </a:r>
-            <a:endParaRPr lang="en-US" sz="1100" dirty="0"/>
-          </a:p>
-        </p:txBody>
-      </p:sp>
-      <p:sp>
-        <p:nvSpPr>
-          <p:cNvPr id="26" name="Text 19"/>
-          <p:cNvSpPr txBox="1"/>
-          <p:nvPr/>
-        </p:nvSpPr>
-        <p:spPr>
-          <a:xfrm>
-            <a:off x="291255" y="2612785"/>
-            <a:ext cx="950976" cy="228600"/>
-          </a:xfrm>
-          <a:prstGeom prst="rect">
-            <a:avLst/>
-          </a:prstGeom>
-          <a:noFill/>
-          <a:ln/>
-        </p:spPr>
-        <p:txBody>
-          <a:bodyPr wrap="square" lIns="0" tIns="0" rIns="0" bIns="0" rtlCol="0" anchor="t"/>
-          <a:lstStyle/>
-          <a:p>
-            <a:pPr algn="r" indent="0" marL="0">
-              <a:buNone/>
-            </a:pPr>
-            <a:r>
-              <a:rPr lang="en-US" sz="950" dirty="0">
-                <a:solidFill>
-                  <a:srgbClr val="5A6B7D"/>
-                </a:solidFill>
-                <a:latin typeface="Calibri" pitchFamily="34" charset="0"/>
-                <a:ea typeface="Calibri" pitchFamily="34" charset="-122"/>
-                <a:cs typeface="Calibri" pitchFamily="34" charset="-120"/>
-              </a:rPr>
-              <a:t>live telemetry</a:t>
-            </a:r>
-            <a:endParaRPr lang="en-US" sz="950" dirty="0"/>
-          </a:p>
-        </p:txBody>
-      </p:sp>
-      <p:sp>
-        <p:nvSpPr>
-          <p:cNvPr id="27" name="Text 20"/>
-          <p:cNvSpPr txBox="1"/>
-          <p:nvPr/>
-        </p:nvSpPr>
-        <p:spPr>
-          <a:xfrm>
-            <a:off x="5394960" y="1234440"/>
-            <a:ext cx="3291840" cy="274320"/>
-          </a:xfrm>
-          <a:prstGeom prst="rect">
-            <a:avLst/>
-          </a:prstGeom>
-          <a:noFill/>
-          <a:ln/>
-        </p:spPr>
-        <p:txBody>
-          <a:bodyPr wrap="square" lIns="0" tIns="0" rIns="0" bIns="0" rtlCol="0" anchor="t"/>
-          <a:lstStyle/>
-          <a:p>
-            <a:pPr indent="0" marL="0">
-              <a:buNone/>
-            </a:pPr>
-            <a:r>
-              <a:rPr lang="en-US" sz="1250" b="1" dirty="0">
-                <a:solidFill>
-                  <a:srgbClr val="0B1D33"/>
-                </a:solidFill>
-                <a:latin typeface="Arial" pitchFamily="34" charset="0"/>
-                <a:ea typeface="Arial" pitchFamily="34" charset="-122"/>
-                <a:cs typeface="Arial" pitchFamily="34" charset="-120"/>
-              </a:rPr>
-              <a:t>Where the ~2 s go</a:t>
-            </a:r>
-            <a:endParaRPr lang="en-US" sz="1250" dirty="0"/>
-          </a:p>
-        </p:txBody>
-      </p:sp>
-      <p:sp>
-        <p:nvSpPr>
-          <p:cNvPr id="28" name="Shape 21"/>
-          <p:cNvSpPr/>
-          <p:nvPr/>
-        </p:nvSpPr>
-        <p:spPr>
-          <a:xfrm>
-            <a:off x="5394960" y="1645920"/>
-            <a:ext cx="1720735" cy="384048"/>
-          </a:xfrm>
-          <a:prstGeom prst="rect">
-            <a:avLst/>
-          </a:prstGeom>
-          <a:solidFill>
-            <a:srgbClr val="E8912D"/>
-          </a:solidFill>
-          <a:ln w="12700">
-            <a:solidFill>
-              <a:srgbClr val="FFFFFF"/>
-            </a:solidFill>
-            <a:prstDash val="solid"/>
-          </a:ln>
-        </p:spPr>
-      </p:sp>
-      <p:sp>
-        <p:nvSpPr>
-          <p:cNvPr id="29" name="Shape 22"/>
-          <p:cNvSpPr/>
-          <p:nvPr/>
-        </p:nvSpPr>
-        <p:spPr>
-          <a:xfrm>
-            <a:off x="7115695" y="1645920"/>
-            <a:ext cx="1122218" cy="384048"/>
-          </a:xfrm>
-          <a:prstGeom prst="rect">
-            <a:avLst/>
-          </a:prstGeom>
-          <a:solidFill>
-            <a:srgbClr val="0FA3B1"/>
-          </a:solidFill>
-          <a:ln w="12700">
-            <a:solidFill>
-              <a:srgbClr val="0FA3B1"/>
-            </a:solidFill>
-            <a:prstDash val="solid"/>
-          </a:ln>
-        </p:spPr>
-      </p:sp>
-      <p:sp>
-        <p:nvSpPr>
-          <p:cNvPr id="30" name="Shape 23"/>
-          <p:cNvSpPr/>
-          <p:nvPr/>
-        </p:nvSpPr>
-        <p:spPr>
-          <a:xfrm>
-            <a:off x="8237913" y="1645920"/>
-            <a:ext cx="448887" cy="384048"/>
-          </a:xfrm>
-          <a:prstGeom prst="rect">
-            <a:avLst/>
-          </a:prstGeom>
-          <a:solidFill>
-            <a:srgbClr val="7CCAD2"/>
-          </a:solidFill>
-          <a:ln w="12700">
-            <a:solidFill>
-              <a:srgbClr val="7CCAD2"/>
-            </a:solidFill>
-            <a:prstDash val="solid"/>
-          </a:ln>
-        </p:spPr>
-      </p:sp>
-      <p:sp>
-        <p:nvSpPr>
-          <p:cNvPr id="31" name="Text 24"/>
-          <p:cNvSpPr txBox="1"/>
-          <p:nvPr/>
-        </p:nvSpPr>
-        <p:spPr>
-          <a:xfrm>
-            <a:off x="5394960" y="1645920"/>
-            <a:ext cx="1720735" cy="384048"/>
-          </a:xfrm>
-          <a:prstGeom prst="rect">
-            <a:avLst/>
-          </a:prstGeom>
-          <a:noFill/>
-          <a:ln/>
-        </p:spPr>
-        <p:txBody>
-          <a:bodyPr wrap="square" lIns="0" tIns="0" rIns="0" bIns="0" rtlCol="0" anchor="ctr"/>
-          <a:lstStyle/>
-          <a:p>
-            <a:pPr algn="ctr" indent="0" marL="0">
-              <a:buNone/>
-            </a:pPr>
-            <a:r>
-              <a:rPr lang="en-US" sz="1100" b="1" dirty="0">
-                <a:solidFill>
-                  <a:srgbClr val="FFFFFF"/>
-                </a:solidFill>
-                <a:latin typeface="Calibri" pitchFamily="34" charset="0"/>
-                <a:ea typeface="Calibri" pitchFamily="34" charset="-122"/>
-                <a:cs typeface="Calibri" pitchFamily="34" charset="-120"/>
-              </a:rPr>
-              <a:t>1.15 s</a:t>
-            </a:r>
-            <a:endParaRPr lang="en-US" sz="1100" dirty="0"/>
-          </a:p>
-        </p:txBody>
-      </p:sp>
-      <p:sp>
-        <p:nvSpPr>
-          <p:cNvPr id="32" name="Text 25"/>
-          <p:cNvSpPr txBox="1"/>
-          <p:nvPr/>
-        </p:nvSpPr>
-        <p:spPr>
-          <a:xfrm>
-            <a:off x="8237913" y="1645920"/>
-            <a:ext cx="448887" cy="384048"/>
-          </a:xfrm>
-          <a:prstGeom prst="rect">
-            <a:avLst/>
-          </a:prstGeom>
-          <a:noFill/>
-          <a:ln/>
-        </p:spPr>
-        <p:txBody>
-          <a:bodyPr wrap="square" lIns="0" tIns="0" rIns="0" bIns="0" rtlCol="0" anchor="ctr"/>
-          <a:lstStyle/>
-          <a:p>
-            <a:pPr algn="ctr" indent="0" marL="0">
-              <a:buNone/>
-            </a:pPr>
-            <a:r>
-              <a:rPr lang="en-US" sz="900" b="1" dirty="0">
-                <a:solidFill>
-                  <a:srgbClr val="FFFFFF"/>
-                </a:solidFill>
-                <a:latin typeface="Calibri" pitchFamily="34" charset="0"/>
-                <a:ea typeface="Calibri" pitchFamily="34" charset="-122"/>
-                <a:cs typeface="Calibri" pitchFamily="34" charset="-120"/>
-              </a:rPr>
-              <a:t>+0.3</a:t>
-            </a:r>
-            <a:endParaRPr lang="en-US" sz="900" dirty="0"/>
-          </a:p>
-        </p:txBody>
-      </p:sp>
-      <p:sp>
-        <p:nvSpPr>
-          <p:cNvPr id="33" name="Text 26"/>
-          <p:cNvSpPr txBox="1"/>
-          <p:nvPr/>
-        </p:nvSpPr>
-        <p:spPr>
-          <a:xfrm>
-            <a:off x="7115695" y="1645920"/>
-            <a:ext cx="1122218" cy="384048"/>
-          </a:xfrm>
-          <a:prstGeom prst="rect">
-            <a:avLst/>
-          </a:prstGeom>
-          <a:noFill/>
-          <a:ln/>
-        </p:spPr>
-        <p:txBody>
-          <a:bodyPr wrap="square" lIns="0" tIns="0" rIns="0" bIns="0" rtlCol="0" anchor="ctr"/>
-          <a:lstStyle/>
-          <a:p>
-            <a:pPr algn="ctr" indent="0" marL="0">
-              <a:buNone/>
-            </a:pPr>
-            <a:r>
-              <a:rPr lang="en-US" sz="1050" b="1" dirty="0">
-                <a:solidFill>
-                  <a:srgbClr val="FFFFFF"/>
-                </a:solidFill>
-                <a:latin typeface="Calibri" pitchFamily="34" charset="0"/>
-                <a:ea typeface="Calibri" pitchFamily="34" charset="-122"/>
-                <a:cs typeface="Calibri" pitchFamily="34" charset="-120"/>
-              </a:rPr>
-              <a:t>0.75 s</a:t>
-            </a:r>
-            <a:endParaRPr lang="en-US" sz="1050" dirty="0"/>
-          </a:p>
-        </p:txBody>
-      </p:sp>
-      <p:sp>
-        <p:nvSpPr>
-          <p:cNvPr id="34" name="Text 27"/>
-          <p:cNvSpPr txBox="1"/>
-          <p:nvPr/>
-        </p:nvSpPr>
-        <p:spPr>
-          <a:xfrm>
-            <a:off x="5394960" y="2084832"/>
-            <a:ext cx="1720735" cy="228600"/>
-          </a:xfrm>
-          <a:prstGeom prst="rect">
-            <a:avLst/>
-          </a:prstGeom>
-          <a:noFill/>
-          <a:ln/>
-        </p:spPr>
-        <p:txBody>
-          <a:bodyPr wrap="square" lIns="0" tIns="0" rIns="0" bIns="0" rtlCol="0" anchor="t"/>
-          <a:lstStyle/>
-          <a:p>
-            <a:pPr indent="0" marL="0">
-              <a:buNone/>
-            </a:pPr>
-            <a:r>
-              <a:rPr lang="en-US" sz="950" dirty="0">
-                <a:solidFill>
-                  <a:srgbClr val="5A6B7D"/>
-                </a:solidFill>
-                <a:latin typeface="Calibri" pitchFamily="34" charset="0"/>
-                <a:ea typeface="Calibri" pitchFamily="34" charset="-122"/>
-                <a:cs typeface="Calibri" pitchFamily="34" charset="-120"/>
-              </a:rPr>
-              <a:t>ns-3 what-if (Tier 4)</a:t>
-            </a:r>
-            <a:endParaRPr lang="en-US" sz="950" dirty="0"/>
-          </a:p>
-        </p:txBody>
-      </p:sp>
-      <p:sp>
-        <p:nvSpPr>
-          <p:cNvPr id="35" name="Text 28"/>
-          <p:cNvSpPr txBox="1"/>
-          <p:nvPr/>
-        </p:nvSpPr>
-        <p:spPr>
-          <a:xfrm>
-            <a:off x="7115695" y="2084832"/>
-            <a:ext cx="1571105" cy="228600"/>
-          </a:xfrm>
-          <a:prstGeom prst="rect">
-            <a:avLst/>
-          </a:prstGeom>
-          <a:noFill/>
-          <a:ln/>
-        </p:spPr>
-        <p:txBody>
-          <a:bodyPr wrap="square" lIns="0" tIns="0" rIns="0" bIns="0" rtlCol="0" anchor="t"/>
-          <a:lstStyle/>
-          <a:p>
-            <a:pPr algn="r" indent="0" marL="0">
-              <a:buNone/>
-            </a:pPr>
-            <a:r>
-              <a:rPr lang="en-US" sz="950" dirty="0">
-                <a:solidFill>
-                  <a:srgbClr val="5A6B7D"/>
-                </a:solidFill>
-                <a:latin typeface="Calibri" pitchFamily="34" charset="0"/>
-                <a:ea typeface="Calibri" pitchFamily="34" charset="-122"/>
-                <a:cs typeface="Calibri" pitchFamily="34" charset="-120"/>
-              </a:rPr>
-              <a:t>reconcile · verify · commit</a:t>
-            </a:r>
-            <a:endParaRPr lang="en-US" sz="950" dirty="0"/>
-          </a:p>
-        </p:txBody>
-      </p:sp>
-      <p:sp>
-        <p:nvSpPr>
-          <p:cNvPr id="36" name="Shape 29"/>
-          <p:cNvSpPr/>
-          <p:nvPr/>
-        </p:nvSpPr>
-        <p:spPr>
-          <a:xfrm>
-            <a:off x="5394960" y="2697480"/>
-            <a:ext cx="3291840" cy="960120"/>
-          </a:xfrm>
-          <a:prstGeom prst="roundRect">
-            <a:avLst>
-              <a:gd name="adj" fmla="val 7619"/>
-            </a:avLst>
-          </a:prstGeom>
-          <a:solidFill>
-            <a:srgbClr val="F2F5F8"/>
-          </a:solidFill>
-          <a:ln w="12700">
-            <a:solidFill>
-              <a:srgbClr val="F2F5F8"/>
-            </a:solidFill>
-            <a:prstDash val="solid"/>
-          </a:ln>
-        </p:spPr>
-      </p:sp>
-      <p:sp>
-        <p:nvSpPr>
-          <p:cNvPr id="37" name="Text 30"/>
-          <p:cNvSpPr txBox="1"/>
-          <p:nvPr/>
-        </p:nvSpPr>
-        <p:spPr>
-          <a:xfrm>
-            <a:off x="5577840" y="2770632"/>
-            <a:ext cx="2926080" cy="502920"/>
-          </a:xfrm>
-          <a:prstGeom prst="rect">
-            <a:avLst/>
-          </a:prstGeom>
-          <a:noFill/>
-          <a:ln/>
-        </p:spPr>
-        <p:txBody>
-          <a:bodyPr wrap="square" lIns="0" tIns="0" rIns="0" bIns="0" rtlCol="0" anchor="ctr"/>
-          <a:lstStyle/>
-          <a:p>
-            <a:pPr indent="0" marL="0">
-              <a:buNone/>
-            </a:pPr>
-            <a:r>
-              <a:rPr lang="en-US" sz="2600" b="1" dirty="0">
-                <a:solidFill>
-                  <a:srgbClr val="9AA7B4"/>
-                </a:solidFill>
-                <a:latin typeface="Arial" pitchFamily="34" charset="0"/>
-                <a:ea typeface="Arial" pitchFamily="34" charset="-122"/>
-                <a:cs typeface="Arial" pitchFamily="34" charset="-120"/>
-              </a:rPr>
-              <a:t>hours</a:t>
-            </a:r>
-            <a:endParaRPr lang="en-US" sz="2600" dirty="0"/>
-          </a:p>
-        </p:txBody>
-      </p:sp>
-      <p:sp>
-        <p:nvSpPr>
-          <p:cNvPr id="38" name="Text 31"/>
-          <p:cNvSpPr txBox="1"/>
-          <p:nvPr/>
-        </p:nvSpPr>
-        <p:spPr>
-          <a:xfrm>
-            <a:off x="5577840" y="3291840"/>
-            <a:ext cx="2926080" cy="274320"/>
-          </a:xfrm>
-          <a:prstGeom prst="rect">
-            <a:avLst/>
-          </a:prstGeom>
-          <a:noFill/>
-          <a:ln/>
-        </p:spPr>
-        <p:txBody>
-          <a:bodyPr wrap="square" lIns="0" tIns="0" rIns="0" bIns="0" rtlCol="0" anchor="t"/>
-          <a:lstStyle/>
-          <a:p>
-            <a:pPr indent="0" marL="0">
-              <a:buNone/>
-            </a:pPr>
-            <a:r>
-              <a:rPr lang="en-US" sz="1100" dirty="0">
-                <a:solidFill>
-                  <a:srgbClr val="1A2B3C"/>
-                </a:solidFill>
-                <a:latin typeface="Calibri" pitchFamily="34" charset="0"/>
-                <a:ea typeface="Calibri" pitchFamily="34" charset="-122"/>
-                <a:cs typeface="Calibri" pitchFamily="34" charset="-120"/>
-              </a:rPr>
-              <a:t>manual CLI troubleshooting</a:t>
-            </a:r>
-            <a:endParaRPr lang="en-US" sz="1100" dirty="0"/>
-          </a:p>
-        </p:txBody>
-      </p:sp>
-      <p:sp>
-        <p:nvSpPr>
-          <p:cNvPr id="39" name="Shape 32"/>
-          <p:cNvSpPr/>
-          <p:nvPr/>
-        </p:nvSpPr>
-        <p:spPr>
-          <a:xfrm>
-            <a:off x="5394960" y="3794760"/>
-            <a:ext cx="3291840" cy="960120"/>
-          </a:xfrm>
-          <a:prstGeom prst="roundRect">
-            <a:avLst>
-              <a:gd name="adj" fmla="val 7619"/>
-            </a:avLst>
-          </a:prstGeom>
-          <a:solidFill>
-            <a:srgbClr val="F2F5F8"/>
-          </a:solidFill>
-          <a:ln w="12700">
-            <a:solidFill>
-              <a:srgbClr val="F2F5F8"/>
-            </a:solidFill>
-            <a:prstDash val="solid"/>
-          </a:ln>
-        </p:spPr>
-      </p:sp>
-      <p:sp>
-        <p:nvSpPr>
-          <p:cNvPr id="40" name="Text 33"/>
-          <p:cNvSpPr txBox="1"/>
-          <p:nvPr/>
-        </p:nvSpPr>
-        <p:spPr>
-          <a:xfrm>
-            <a:off x="5577840" y="3867912"/>
-            <a:ext cx="2926080" cy="502920"/>
-          </a:xfrm>
-          <a:prstGeom prst="rect">
-            <a:avLst/>
-          </a:prstGeom>
-          <a:noFill/>
-          <a:ln/>
-        </p:spPr>
-        <p:txBody>
-          <a:bodyPr wrap="square" lIns="0" tIns="0" rIns="0" bIns="0" rtlCol="0" anchor="ctr"/>
-          <a:lstStyle/>
-          <a:p>
-            <a:pPr indent="0" marL="0">
-              <a:buNone/>
-            </a:pPr>
-            <a:r>
-              <a:rPr lang="en-US" sz="2600" b="1" dirty="0">
-                <a:solidFill>
-                  <a:srgbClr val="0FA3B1"/>
-                </a:solidFill>
-                <a:latin typeface="Arial" pitchFamily="34" charset="0"/>
-                <a:ea typeface="Arial" pitchFamily="34" charset="-122"/>
-                <a:cs typeface="Arial" pitchFamily="34" charset="-120"/>
-              </a:rPr>
-              <a:t>1.9–2.2 s</a:t>
-            </a:r>
-            <a:endParaRPr lang="en-US" sz="2600" dirty="0"/>
-          </a:p>
-        </p:txBody>
-      </p:sp>
-      <p:sp>
-        <p:nvSpPr>
-          <p:cNvPr id="41" name="Text 34"/>
-          <p:cNvSpPr txBox="1"/>
-          <p:nvPr/>
-        </p:nvSpPr>
-        <p:spPr>
-          <a:xfrm>
-            <a:off x="5577840" y="4389120"/>
-            <a:ext cx="2926080" cy="274320"/>
-          </a:xfrm>
-          <a:prstGeom prst="rect">
-            <a:avLst/>
-          </a:prstGeom>
-          <a:noFill/>
-          <a:ln/>
-        </p:spPr>
-        <p:txBody>
-          <a:bodyPr wrap="square" lIns="0" tIns="0" rIns="0" bIns="0" rtlCol="0" anchor="t"/>
-          <a:lstStyle/>
-          <a:p>
-            <a:pPr indent="0" marL="0">
-              <a:buNone/>
-            </a:pPr>
-            <a:r>
-              <a:rPr lang="en-US" sz="1100" dirty="0">
-                <a:solidFill>
-                  <a:srgbClr val="1A2B3C"/>
-                </a:solidFill>
-                <a:latin typeface="Calibri" pitchFamily="34" charset="0"/>
-                <a:ea typeface="Calibri" pitchFamily="34" charset="-122"/>
-                <a:cs typeface="Calibri" pitchFamily="34" charset="-120"/>
-              </a:rPr>
-              <a:t>autonomous closed loop</a:t>
-            </a:r>
-            <a:endParaRPr lang="en-US" sz="1100" dirty="0"/>
           </a:p>
         </p:txBody>
       </p:sp>
